--- a/PPT/Viscoplastic Squeeze pptGE.pptx
+++ b/PPT/Viscoplastic Squeeze pptGE.pptx
@@ -5,16 +5,20 @@
     <p:sldMasterId id="2147483650" r:id="rId4"/>
   </p:sldMasterIdLst>
   <p:notesMasterIdLst>
-    <p:notesMasterId r:id="rId9"/>
+    <p:notesMasterId r:id="rId13"/>
   </p:notesMasterIdLst>
   <p:handoutMasterIdLst>
-    <p:handoutMasterId r:id="rId10"/>
+    <p:handoutMasterId r:id="rId14"/>
   </p:handoutMasterIdLst>
   <p:sldIdLst>
     <p:sldId id="281" r:id="rId5"/>
     <p:sldId id="323" r:id="rId6"/>
-    <p:sldId id="322" r:id="rId7"/>
-    <p:sldId id="324" r:id="rId8"/>
+    <p:sldId id="325" r:id="rId7"/>
+    <p:sldId id="322" r:id="rId8"/>
+    <p:sldId id="326" r:id="rId9"/>
+    <p:sldId id="328" r:id="rId10"/>
+    <p:sldId id="324" r:id="rId11"/>
+    <p:sldId id="327" r:id="rId12"/>
   </p:sldIdLst>
   <p:sldSz cx="12192000" cy="6858000"/>
   <p:notesSz cx="13716000" cy="24384000"/>
@@ -740,6 +744,112 @@
   <p:cSld>
     <p:spTree>
       <p:nvGrpSpPr>
+        <p:cNvPr id="1" name="">
+          <a:extLst>
+            <a:ext uri="{FF2B5EF4-FFF2-40B4-BE49-F238E27FC236}">
+              <a16:creationId xmlns:a16="http://schemas.microsoft.com/office/drawing/2014/main" id="{865BD47E-9E7F-B82D-4791-876AF65FB310}"/>
+            </a:ext>
+          </a:extLst>
+        </p:cNvPr>
+        <p:cNvGrpSpPr/>
+        <p:nvPr/>
+      </p:nvGrpSpPr>
+      <p:grpSpPr>
+        <a:xfrm>
+          <a:off x="0" y="0"/>
+          <a:ext cx="0" cy="0"/>
+          <a:chOff x="0" y="0"/>
+          <a:chExt cx="0" cy="0"/>
+        </a:xfrm>
+      </p:grpSpPr>
+      <p:sp>
+        <p:nvSpPr>
+          <p:cNvPr id="2" name="Espace réservé de l’image des diapositives 1">
+            <a:extLst>
+              <a:ext uri="{FF2B5EF4-FFF2-40B4-BE49-F238E27FC236}">
+                <a16:creationId xmlns:a16="http://schemas.microsoft.com/office/drawing/2014/main" id="{FA31ED92-6A69-745E-44B9-AE39E1A9E04C}"/>
+              </a:ext>
+            </a:extLst>
+          </p:cNvPr>
+          <p:cNvSpPr>
+            <a:spLocks noGrp="1" noRot="1" noChangeAspect="1"/>
+          </p:cNvSpPr>
+          <p:nvPr>
+            <p:ph type="sldImg"/>
+          </p:nvPr>
+        </p:nvSpPr>
+        <p:spPr>
+          <a:xfrm>
+            <a:off x="-457200" y="3048000"/>
+            <a:ext cx="14630400" cy="8229600"/>
+          </a:xfrm>
+          <a:prstGeom prst="rect">
+            <a:avLst/>
+          </a:prstGeom>
+          <a:noFill/>
+          <a:ln w="12700">
+            <a:solidFill>
+              <a:prstClr val="black"/>
+            </a:solidFill>
+          </a:ln>
+        </p:spPr>
+      </p:sp>
+      <p:sp>
+        <p:nvSpPr>
+          <p:cNvPr id="3" name="Espace réservé des commentaires 2">
+            <a:extLst>
+              <a:ext uri="{FF2B5EF4-FFF2-40B4-BE49-F238E27FC236}">
+                <a16:creationId xmlns:a16="http://schemas.microsoft.com/office/drawing/2014/main" id="{6995F080-C548-5E6D-485E-E903210EA595}"/>
+              </a:ext>
+            </a:extLst>
+          </p:cNvPr>
+          <p:cNvSpPr>
+            <a:spLocks noGrp="1"/>
+          </p:cNvSpPr>
+          <p:nvPr>
+            <p:ph type="body" idx="1"/>
+          </p:nvPr>
+        </p:nvSpPr>
+        <p:spPr>
+          <a:xfrm>
+            <a:off x="1371600" y="11734800"/>
+            <a:ext cx="10972800" cy="9601200"/>
+          </a:xfrm>
+          <a:prstGeom prst="rect">
+            <a:avLst/>
+          </a:prstGeom>
+        </p:spPr>
+        <p:txBody>
+          <a:bodyPr rtlCol="0"/>
+          <a:lstStyle>
+            <a:defPPr>
+              <a:defRPr lang="fr-FR"/>
+            </a:defPPr>
+          </a:lstStyle>
+          <a:p>
+            <a:pPr rtl="0"/>
+            <a:endParaRPr lang="fr-FR" dirty="0"/>
+          </a:p>
+        </p:txBody>
+      </p:sp>
+    </p:spTree>
+    <p:extLst>
+      <p:ext uri="{BB962C8B-B14F-4D97-AF65-F5344CB8AC3E}">
+        <p14:creationId xmlns:p14="http://schemas.microsoft.com/office/powerpoint/2010/main" val="3945459687"/>
+      </p:ext>
+    </p:extLst>
+  </p:cSld>
+  <p:clrMapOvr>
+    <a:masterClrMapping/>
+  </p:clrMapOvr>
+</p:notes>
+</file>
+
+<file path=ppt/notesSlides/notesSlide4.xml><?xml version="1.0" encoding="utf-8"?>
+<p:notes xmlns:a="http://schemas.openxmlformats.org/drawingml/2006/main" xmlns:r="http://schemas.openxmlformats.org/officeDocument/2006/relationships" xmlns:p="http://schemas.openxmlformats.org/presentationml/2006/main">
+  <p:cSld>
+    <p:spTree>
+      <p:nvGrpSpPr>
         <p:cNvPr id="1" name=""/>
         <p:cNvGrpSpPr/>
         <p:nvPr/>
@@ -823,7 +933,7 @@
 </p:notes>
 </file>
 
-<file path=ppt/notesSlides/notesSlide4.xml><?xml version="1.0" encoding="utf-8"?>
+<file path=ppt/notesSlides/notesSlide5.xml><?xml version="1.0" encoding="utf-8"?>
 <p:notes xmlns:a="http://schemas.openxmlformats.org/drawingml/2006/main" xmlns:r="http://schemas.openxmlformats.org/officeDocument/2006/relationships" xmlns:p="http://schemas.openxmlformats.org/presentationml/2006/main">
   <p:cSld>
     <p:spTree>
@@ -17503,7 +17613,7 @@
         </p:nvSpPr>
         <p:spPr>
           <a:xfrm>
-            <a:off x="1413463" y="5220627"/>
+            <a:off x="1413463" y="5297280"/>
             <a:ext cx="9365074" cy="1313738"/>
           </a:xfrm>
         </p:spPr>
@@ -17520,7 +17630,7 @@
             <a:pPr algn="ctr" rtl="0"/>
             <a:r>
               <a:rPr lang="fr-FR" sz="2600" dirty="0"/>
-              <a:t>Cylindre de fluide visqueux, plastique, élastique, soumis à une compression par une masse totale M.</a:t>
+              <a:t>Cylindre de fluide visqueux, plastique, élastique, soumis à une compression par une masse totale M</a:t>
             </a:r>
           </a:p>
           <a:p>
@@ -17534,10 +17644,10 @@
       </p:sp>
       <p:pic>
         <p:nvPicPr>
-          <p:cNvPr id="17" name="Image 16">
+          <p:cNvPr id="5" name="Image 4">
             <a:extLst>
               <a:ext uri="{FF2B5EF4-FFF2-40B4-BE49-F238E27FC236}">
-                <a16:creationId xmlns:a16="http://schemas.microsoft.com/office/drawing/2014/main" id="{A28180B8-A36F-7D12-B48A-CC195D702072}"/>
+                <a16:creationId xmlns:a16="http://schemas.microsoft.com/office/drawing/2014/main" id="{462100C0-2074-EC8E-65F8-FB679352F34B}"/>
               </a:ext>
             </a:extLst>
           </p:cNvPr>
@@ -17554,8 +17664,8 @@
         </p:blipFill>
         <p:spPr>
           <a:xfrm>
-            <a:off x="2465887" y="1502176"/>
-            <a:ext cx="7257611" cy="3395417"/>
+            <a:off x="2353158" y="1384767"/>
+            <a:ext cx="7485684" cy="3659844"/>
           </a:xfrm>
           <a:prstGeom prst="rect">
             <a:avLst/>
@@ -17651,7 +17761,7 @@
           <a:lstStyle/>
           <a:p>
             <a:pPr algn="ctr"/>
-            <a:endParaRPr lang="fr-FR"/>
+            <a:endParaRPr lang="fr-FR" dirty="0"/>
           </a:p>
         </p:txBody>
       </p:sp>
@@ -17713,8 +17823,8 @@
             </p:nvSpPr>
             <p:spPr>
               <a:xfrm>
-                <a:off x="879702" y="1447926"/>
-                <a:ext cx="10429982" cy="2264144"/>
+                <a:off x="1109486" y="1805540"/>
+                <a:ext cx="4719713" cy="1679989"/>
               </a:xfrm>
             </p:spPr>
             <p:txBody>
@@ -17729,33 +17839,34 @@
               <a:p>
                 <a:pPr rtl="0"/>
                 <a:r>
-                  <a:rPr lang="fr-FR" sz="2600" b="1" dirty="0"/>
+                  <a:rPr lang="fr-FR" sz="2000" b="1" dirty="0"/>
                   <a:t>Herschel-</a:t>
                 </a:r>
                 <a:r>
-                  <a:rPr lang="fr-FR" sz="2600" b="1" dirty="0" err="1"/>
+                  <a:rPr lang="fr-FR" sz="2000" b="1" dirty="0" err="1"/>
                   <a:t>Bulkley</a:t>
                 </a:r>
                 <a:r>
-                  <a:rPr lang="fr-FR" sz="2600" b="1" dirty="0"/>
+                  <a:rPr lang="fr-FR" sz="2000" b="1" dirty="0"/>
                   <a:t> :</a:t>
                 </a:r>
               </a:p>
               <a:p>
                 <a:r>
-                  <a:rPr lang="fr-FR" sz="2600" dirty="0"/>
+                  <a:rPr lang="fr-FR" sz="2000" dirty="0"/>
                   <a:t>Donne l’équation constitutive d’un fluide </a:t>
                 </a:r>
                 <a:r>
-                  <a:rPr lang="fr-FR" sz="2600" b="1" dirty="0" err="1"/>
+                  <a:rPr lang="fr-FR" sz="2000" dirty="0" err="1"/>
                   <a:t>visco-plastique</a:t>
                 </a:r>
                 <a:r>
-                  <a:rPr lang="fr-FR" sz="2600" dirty="0"/>
+                  <a:rPr lang="fr-FR" sz="2000" dirty="0"/>
                   <a:t> : </a:t>
                 </a:r>
               </a:p>
               <a:p>
+                <a:pPr/>
                 <a14:m>
                   <m:oMathPara xmlns:m="http://schemas.openxmlformats.org/officeDocument/2006/math">
                     <m:oMathParaPr>
@@ -17763,19 +17874,37 @@
                     </m:oMathParaPr>
                     <m:oMath xmlns:m="http://schemas.openxmlformats.org/officeDocument/2006/math">
                       <m:r>
-                        <a:rPr lang="fr-FR" sz="2600" i="1" smtClean="0">
+                        <a:rPr lang="fr-FR" sz="2000" i="1" smtClean="0">
+                          <a:solidFill>
+                            <a:schemeClr val="accent6">
+                              <a:lumMod val="60000"/>
+                              <a:lumOff val="40000"/>
+                            </a:schemeClr>
+                          </a:solidFill>
                           <a:latin typeface="Cambria Math" panose="02040503050406030204" pitchFamily="18" charset="0"/>
                         </a:rPr>
                         <m:t>𝜏</m:t>
                       </m:r>
                       <m:r>
-                        <a:rPr lang="fr-FR" sz="2600" i="1" smtClean="0">
+                        <a:rPr lang="fr-FR" sz="2000" i="1" smtClean="0">
+                          <a:solidFill>
+                            <a:schemeClr val="accent6">
+                              <a:lumMod val="60000"/>
+                              <a:lumOff val="40000"/>
+                            </a:schemeClr>
+                          </a:solidFill>
                           <a:latin typeface="Cambria Math" panose="02040503050406030204" pitchFamily="18" charset="0"/>
                         </a:rPr>
                         <m:t>=</m:t>
                       </m:r>
                       <m:r>
-                        <a:rPr lang="fr-FR" sz="2600" i="1" smtClean="0">
+                        <a:rPr lang="fr-FR" sz="2000" i="1" smtClean="0">
+                          <a:solidFill>
+                            <a:schemeClr val="accent6">
+                              <a:lumMod val="60000"/>
+                              <a:lumOff val="40000"/>
+                            </a:schemeClr>
+                          </a:solidFill>
                           <a:latin typeface="Cambria Math" panose="02040503050406030204" pitchFamily="18" charset="0"/>
                         </a:rPr>
                         <m:t>𝑘</m:t>
@@ -17783,7 +17912,13 @@
                       <m:sSup>
                         <m:sSupPr>
                           <m:ctrlPr>
-                            <a:rPr lang="fr-FR" sz="2600" i="1" smtClean="0">
+                            <a:rPr lang="fr-FR" sz="2000" i="1" smtClean="0">
+                              <a:solidFill>
+                                <a:schemeClr val="accent6">
+                                  <a:lumMod val="60000"/>
+                                  <a:lumOff val="40000"/>
+                                </a:schemeClr>
+                              </a:solidFill>
                               <a:latin typeface="Cambria Math" panose="02040503050406030204" pitchFamily="18" charset="0"/>
                             </a:rPr>
                           </m:ctrlPr>
@@ -17793,14 +17928,26 @@
                             <m:accPr>
                               <m:chr m:val="̇"/>
                               <m:ctrlPr>
-                                <a:rPr lang="fr-FR" sz="2600" i="1" smtClean="0">
+                                <a:rPr lang="fr-FR" sz="2000" i="1" smtClean="0">
+                                  <a:solidFill>
+                                    <a:schemeClr val="accent6">
+                                      <a:lumMod val="60000"/>
+                                      <a:lumOff val="40000"/>
+                                    </a:schemeClr>
+                                  </a:solidFill>
                                   <a:latin typeface="Cambria Math" panose="02040503050406030204" pitchFamily="18" charset="0"/>
                                 </a:rPr>
                               </m:ctrlPr>
                             </m:accPr>
                             <m:e>
                               <m:r>
-                                <a:rPr lang="fr-FR" sz="2600" i="1">
+                                <a:rPr lang="fr-FR" sz="2000" i="1">
+                                  <a:solidFill>
+                                    <a:schemeClr val="accent6">
+                                      <a:lumMod val="60000"/>
+                                      <a:lumOff val="40000"/>
+                                    </a:schemeClr>
+                                  </a:solidFill>
                                   <a:latin typeface="Cambria Math" panose="02040503050406030204" pitchFamily="18" charset="0"/>
                                 </a:rPr>
                                 <m:t>𝛾</m:t>
@@ -17810,7 +17957,13 @@
                         </m:e>
                         <m:sup>
                           <m:r>
-                            <a:rPr lang="fr-FR" sz="2600" i="1" smtClean="0">
+                            <a:rPr lang="fr-FR" sz="2000" i="1" smtClean="0">
+                              <a:solidFill>
+                                <a:schemeClr val="accent6">
+                                  <a:lumMod val="60000"/>
+                                  <a:lumOff val="40000"/>
+                                </a:schemeClr>
+                              </a:solidFill>
                               <a:latin typeface="Cambria Math" panose="02040503050406030204" pitchFamily="18" charset="0"/>
                             </a:rPr>
                             <m:t>𝑚</m:t>
@@ -17818,7 +17971,13 @@
                         </m:sup>
                       </m:sSup>
                       <m:r>
-                        <a:rPr lang="fr-FR" sz="2600" dirty="0" smtClean="0">
+                        <a:rPr lang="fr-FR" sz="2000" dirty="0" smtClean="0">
+                          <a:solidFill>
+                            <a:schemeClr val="accent6">
+                              <a:lumMod val="60000"/>
+                              <a:lumOff val="40000"/>
+                            </a:schemeClr>
+                          </a:solidFill>
                           <a:latin typeface="Cambria Math" panose="02040503050406030204" pitchFamily="18" charset="0"/>
                         </a:rPr>
                         <m:t>+</m:t>
@@ -17826,14 +17985,26 @@
                       <m:sSub>
                         <m:sSubPr>
                           <m:ctrlPr>
-                            <a:rPr lang="fr-FR" sz="2600" i="1" dirty="0" smtClean="0">
+                            <a:rPr lang="fr-FR" sz="2000" i="1" dirty="0" smtClean="0">
+                              <a:solidFill>
+                                <a:schemeClr val="accent6">
+                                  <a:lumMod val="60000"/>
+                                  <a:lumOff val="40000"/>
+                                </a:schemeClr>
+                              </a:solidFill>
                               <a:latin typeface="Cambria Math" panose="02040503050406030204" pitchFamily="18" charset="0"/>
                             </a:rPr>
                           </m:ctrlPr>
                         </m:sSubPr>
                         <m:e>
                           <m:r>
-                            <a:rPr lang="fr-FR" sz="2600" i="1" dirty="0" smtClean="0">
+                            <a:rPr lang="fr-FR" sz="2000" i="1" dirty="0" smtClean="0">
+                              <a:solidFill>
+                                <a:schemeClr val="accent6">
+                                  <a:lumMod val="60000"/>
+                                  <a:lumOff val="40000"/>
+                                </a:schemeClr>
+                              </a:solidFill>
                               <a:latin typeface="Cambria Math" panose="02040503050406030204" pitchFamily="18" charset="0"/>
                             </a:rPr>
                             <m:t>𝜏</m:t>
@@ -17841,7 +18012,13 @@
                         </m:e>
                         <m:sub>
                           <m:r>
-                            <a:rPr lang="fr-FR" sz="2600" i="0" dirty="0" smtClean="0">
+                            <a:rPr lang="fr-FR" sz="2000" i="0" dirty="0" smtClean="0">
+                              <a:solidFill>
+                                <a:schemeClr val="accent6">
+                                  <a:lumMod val="60000"/>
+                                  <a:lumOff val="40000"/>
+                                </a:schemeClr>
+                              </a:solidFill>
                               <a:latin typeface="Cambria Math" panose="02040503050406030204" pitchFamily="18" charset="0"/>
                             </a:rPr>
                             <m:t>0</m:t>
@@ -17849,31 +18026,37 @@
                         </m:sub>
                       </m:sSub>
                       <m:r>
-                        <a:rPr lang="fr-FR" sz="2600" b="0" i="1" dirty="0" smtClean="0">
+                        <a:rPr lang="fr-FR" sz="2000" b="0" i="1" dirty="0" smtClean="0">
+                          <a:solidFill>
+                            <a:schemeClr val="accent6">
+                              <a:lumMod val="60000"/>
+                              <a:lumOff val="40000"/>
+                            </a:schemeClr>
+                          </a:solidFill>
                           <a:latin typeface="Cambria Math" panose="02040503050406030204" pitchFamily="18" charset="0"/>
                         </a:rPr>
                         <m:t> </m:t>
                       </m:r>
                       <m:r>
-                        <a:rPr lang="fr-FR" sz="2600" b="0" i="1" dirty="0" smtClean="0">
+                        <a:rPr lang="fr-FR" sz="2000" b="0" i="1" dirty="0" smtClean="0">
                           <a:latin typeface="Cambria Math" panose="02040503050406030204" pitchFamily="18" charset="0"/>
                         </a:rPr>
                         <m:t>𝑠𝑖</m:t>
                       </m:r>
                       <m:r>
-                        <a:rPr lang="fr-FR" sz="2600" b="0" i="1" dirty="0" smtClean="0">
+                        <a:rPr lang="fr-FR" sz="2000" b="0" i="1" dirty="0" smtClean="0">
                           <a:latin typeface="Cambria Math" panose="02040503050406030204" pitchFamily="18" charset="0"/>
                         </a:rPr>
                         <m:t> </m:t>
                       </m:r>
                       <m:r>
-                        <a:rPr lang="fr-FR" sz="2600" i="1">
+                        <a:rPr lang="fr-FR" sz="2000" i="1">
                           <a:latin typeface="Cambria Math" panose="02040503050406030204" pitchFamily="18" charset="0"/>
                         </a:rPr>
                         <m:t>𝜏</m:t>
                       </m:r>
                       <m:r>
-                        <a:rPr lang="fr-FR" sz="2600" b="0" i="1" smtClean="0">
+                        <a:rPr lang="fr-FR" sz="2000" b="0" i="1" smtClean="0">
                           <a:latin typeface="Cambria Math" panose="02040503050406030204" pitchFamily="18" charset="0"/>
                         </a:rPr>
                         <m:t>≥</m:t>
@@ -17881,14 +18064,14 @@
                       <m:sSub>
                         <m:sSubPr>
                           <m:ctrlPr>
-                            <a:rPr lang="fr-FR" sz="2600" b="0" i="1" smtClean="0">
+                            <a:rPr lang="fr-FR" sz="2000" b="0" i="1" smtClean="0">
                               <a:latin typeface="Cambria Math" panose="02040503050406030204" pitchFamily="18" charset="0"/>
                             </a:rPr>
                           </m:ctrlPr>
                         </m:sSubPr>
                         <m:e>
                           <m:r>
-                            <a:rPr lang="fr-FR" sz="2600" i="1">
+                            <a:rPr lang="fr-FR" sz="2000" i="1">
                               <a:latin typeface="Cambria Math" panose="02040503050406030204" pitchFamily="18" charset="0"/>
                             </a:rPr>
                             <m:t>𝜏</m:t>
@@ -17896,7 +18079,7 @@
                         </m:e>
                         <m:sub>
                           <m:r>
-                            <a:rPr lang="fr-FR" sz="2600" b="0" i="1" smtClean="0">
+                            <a:rPr lang="fr-FR" sz="2000" b="0" i="1" smtClean="0">
                               <a:latin typeface="Cambria Math" panose="02040503050406030204" pitchFamily="18" charset="0"/>
                             </a:rPr>
                             <m:t>0</m:t>
@@ -17906,11 +18089,12 @@
                     </m:oMath>
                   </m:oMathPara>
                 </a14:m>
-                <a:endParaRPr lang="fr-FR" sz="2600" b="0" i="1" dirty="0">
+                <a:endParaRPr lang="fr-FR" sz="2000" b="0" i="1" dirty="0">
                   <a:latin typeface="Cambria Math" panose="02040503050406030204" pitchFamily="18" charset="0"/>
                 </a:endParaRPr>
               </a:p>
               <a:p>
+                <a:pPr/>
                 <a14:m>
                   <m:oMathPara xmlns:m="http://schemas.openxmlformats.org/officeDocument/2006/math">
                     <m:oMathParaPr>
@@ -17918,7 +18102,7 @@
                     </m:oMathParaPr>
                     <m:oMath xmlns:m="http://schemas.openxmlformats.org/officeDocument/2006/math">
                       <m:r>
-                        <a:rPr lang="fr-FR" sz="2600" b="0" i="1" smtClean="0">
+                        <a:rPr lang="fr-FR" sz="2000" b="0" i="1" smtClean="0">
                           <a:latin typeface="Cambria Math" panose="02040503050406030204" pitchFamily="18" charset="0"/>
                         </a:rPr>
                         <m:t>𝑠𝑖𝑛𝑜𝑛</m:t>
@@ -17927,49 +18111,42 @@
                         <m:accPr>
                           <m:chr m:val="̇"/>
                           <m:ctrlPr>
-                            <a:rPr lang="fr-FR" sz="2600" i="1">
+                            <a:rPr lang="fr-FR" sz="2000" i="1">
                               <a:latin typeface="Cambria Math" panose="02040503050406030204" pitchFamily="18" charset="0"/>
                             </a:rPr>
                           </m:ctrlPr>
                         </m:accPr>
                         <m:e>
                           <m:r>
-                            <a:rPr lang="fr-FR" sz="2600" b="0" i="1" smtClean="0">
+                            <a:rPr lang="fr-FR" sz="2000" b="0" i="1" smtClean="0">
                               <a:latin typeface="Cambria Math" panose="02040503050406030204" pitchFamily="18" charset="0"/>
                             </a:rPr>
                             <m:t> </m:t>
                           </m:r>
                           <m:r>
-                            <a:rPr lang="fr-FR" sz="2600" i="1">
+                            <a:rPr lang="fr-FR" sz="2000" i="1">
                               <a:latin typeface="Cambria Math" panose="02040503050406030204" pitchFamily="18" charset="0"/>
                             </a:rPr>
                             <m:t>𝛾</m:t>
                           </m:r>
-                          <m:r>
-                            <a:rPr lang="fr-FR" sz="2600" b="0" i="1" smtClean="0">
-                              <a:latin typeface="Cambria Math" panose="02040503050406030204" pitchFamily="18" charset="0"/>
-                            </a:rPr>
-                            <m:t>=</m:t>
-                          </m:r>
-                          <m:r>
-                            <a:rPr lang="fr-FR" sz="2600" b="0" i="1" smtClean="0">
-                              <a:latin typeface="Cambria Math" panose="02040503050406030204" pitchFamily="18" charset="0"/>
-                            </a:rPr>
-                            <m:t>0</m:t>
-                          </m:r>
                         </m:e>
                       </m:acc>
+                      <m:r>
+                        <a:rPr lang="fr-FR" sz="2000" b="0" i="1" smtClean="0">
+                          <a:latin typeface="Cambria Math" panose="02040503050406030204" pitchFamily="18" charset="0"/>
+                        </a:rPr>
+                        <m:t>=</m:t>
+                      </m:r>
+                      <m:r>
+                        <a:rPr lang="fr-FR" sz="2000" b="0" i="1" smtClean="0">
+                          <a:latin typeface="Cambria Math" panose="02040503050406030204" pitchFamily="18" charset="0"/>
+                        </a:rPr>
+                        <m:t>0</m:t>
+                      </m:r>
                     </m:oMath>
                   </m:oMathPara>
                 </a14:m>
-                <a:endParaRPr lang="fr-FR" sz="2600" dirty="0"/>
-              </a:p>
-              <a:p>
-                <a:endParaRPr lang="fr-FR" sz="2600" dirty="0"/>
-              </a:p>
-              <a:p>
-                <a:pPr rtl="0"/>
-                <a:endParaRPr lang="fr-FR" sz="2600" dirty="0"/>
+                <a:endParaRPr lang="fr-FR" sz="2000" dirty="0"/>
               </a:p>
             </p:txBody>
           </p:sp>
@@ -17993,13 +18170,13 @@
             </p:nvSpPr>
             <p:spPr>
               <a:xfrm>
-                <a:off x="879702" y="1447926"/>
-                <a:ext cx="10429982" cy="2264144"/>
+                <a:off x="1109486" y="1805540"/>
+                <a:ext cx="4719713" cy="1679989"/>
               </a:xfrm>
               <a:blipFill>
                 <a:blip r:embed="rId3"/>
                 <a:stretch>
-                  <a:fillRect l="-1052" t="-4852"/>
+                  <a:fillRect l="-1292" t="-4710" r="-388"/>
                 </a:stretch>
               </a:blipFill>
             </p:spPr>
@@ -18036,8 +18213,8 @@
             </p:nvSpPr>
             <p:spPr>
               <a:xfrm>
-                <a:off x="879702" y="3276260"/>
-                <a:ext cx="8031687" cy="1632159"/>
+                <a:off x="1109486" y="3645649"/>
+                <a:ext cx="4370391" cy="1372818"/>
               </a:xfrm>
               <a:prstGeom prst="rect">
                 <a:avLst/>
@@ -18216,115 +18393,78 @@
               </a:lstStyle>
               <a:p>
                 <a:r>
-                  <a:rPr lang="fr-FR" sz="2600" b="1" dirty="0"/>
-                  <a:t>Kelvin-Voigt :</a:t>
+                  <a:rPr lang="fr-FR" sz="2000" b="1" dirty="0"/>
+                  <a:t>Hooke :</a:t>
                 </a:r>
               </a:p>
               <a:p>
                 <a:r>
-                  <a:rPr lang="fr-FR" sz="2600" dirty="0"/>
-                  <a:t>Donne l’expression de la contrainte résultante d’un fluide </a:t>
+                  <a:rPr lang="fr-FR" sz="2000" dirty="0"/>
+                  <a:t>Donne l’expression de la contrainte résultante d’un fluide élastique :</a:t>
                 </a:r>
-                <a:r>
-                  <a:rPr lang="fr-FR" sz="2600" b="1" dirty="0" err="1"/>
-                  <a:t>visco-élastiqu</a:t>
-                </a:r>
-                <a:r>
-                  <a:rPr lang="fr-FR" sz="2600" b="1" dirty="0"/>
-                  <a:t>e</a:t>
-                </a:r>
-                <a:r>
-                  <a:rPr lang="fr-FR" sz="2600" dirty="0"/>
-                  <a:t> : </a:t>
-                </a:r>
-                <a:r>
-                  <a:rPr lang="fr-FR" sz="2600" b="1" dirty="0"/>
-                  <a:t>	</a:t>
-                </a:r>
-                <a14:m>
-                  <m:oMath xmlns:m="http://schemas.openxmlformats.org/officeDocument/2006/math">
-                    <m:r>
-                      <a:rPr lang="fr-FR" sz="2600" i="1" smtClean="0">
-                        <a:latin typeface="Cambria Math" panose="02040503050406030204" pitchFamily="18" charset="0"/>
-                      </a:rPr>
-                      <m:t>𝜏</m:t>
-                    </m:r>
-                    <m:r>
-                      <a:rPr lang="fr-FR" sz="2600" i="1" smtClean="0">
-                        <a:latin typeface="Cambria Math" panose="02040503050406030204" pitchFamily="18" charset="0"/>
-                      </a:rPr>
-                      <m:t>=</m:t>
-                    </m:r>
-                    <m:r>
-                      <a:rPr lang="fr-FR" sz="2600" b="0" i="1" smtClean="0">
-                        <a:latin typeface="Cambria Math" panose="02040503050406030204" pitchFamily="18" charset="0"/>
-                      </a:rPr>
-                      <m:t>𝐺</m:t>
-                    </m:r>
-                    <m:r>
-                      <a:rPr lang="ar-AE" sz="2600" i="1">
-                        <a:latin typeface="Cambria Math" panose="02040503050406030204" pitchFamily="18" charset="0"/>
-                      </a:rPr>
-                      <m:t>𝛾</m:t>
-                    </m:r>
-                    <m:r>
-                      <a:rPr lang="fr-FR" sz="2600" b="0" i="1" smtClean="0">
-                        <a:latin typeface="Cambria Math" panose="02040503050406030204" pitchFamily="18" charset="0"/>
-                      </a:rPr>
-                      <m:t>+</m:t>
-                    </m:r>
-                    <m:r>
-                      <a:rPr lang="fr-FR" sz="2600" i="1" smtClean="0">
-                        <a:latin typeface="Cambria Math" panose="02040503050406030204" pitchFamily="18" charset="0"/>
-                      </a:rPr>
-                      <m:t>𝑘</m:t>
-                    </m:r>
-                    <m:sSup>
-                      <m:sSupPr>
-                        <m:ctrlPr>
-                          <a:rPr lang="ar-AE" sz="2600" i="1" smtClean="0">
-                            <a:latin typeface="Cambria Math" panose="02040503050406030204" pitchFamily="18" charset="0"/>
-                          </a:rPr>
-                        </m:ctrlPr>
-                      </m:sSupPr>
-                      <m:e>
-                        <m:acc>
-                          <m:accPr>
-                            <m:chr m:val="̇"/>
-                            <m:ctrlPr>
-                              <a:rPr lang="ar-AE" sz="2600" i="1" smtClean="0">
-                                <a:latin typeface="Cambria Math" panose="02040503050406030204" pitchFamily="18" charset="0"/>
-                              </a:rPr>
-                            </m:ctrlPr>
-                          </m:accPr>
-                          <m:e>
-                            <m:r>
-                              <a:rPr lang="ar-AE" sz="2600" i="1">
-                                <a:latin typeface="Cambria Math" panose="02040503050406030204" pitchFamily="18" charset="0"/>
-                              </a:rPr>
-                              <m:t>𝛾</m:t>
-                            </m:r>
-                          </m:e>
-                        </m:acc>
-                      </m:e>
-                      <m:sup>
-                        <m:r>
-                          <a:rPr lang="ar-AE" sz="2600" i="1" smtClean="0">
-                            <a:latin typeface="Cambria Math" panose="02040503050406030204" pitchFamily="18" charset="0"/>
-                          </a:rPr>
-                          <m:t>𝑚</m:t>
-                        </m:r>
-                      </m:sup>
-                    </m:sSup>
-                  </m:oMath>
-                </a14:m>
-                <a:endParaRPr lang="ar-AE" sz="2600" dirty="0"/>
               </a:p>
               <a:p>
-                <a:endParaRPr lang="ar-AE" sz="2600" dirty="0"/>
+                <a14:m>
+                  <m:oMathPara xmlns:m="http://schemas.openxmlformats.org/officeDocument/2006/math">
+                    <m:oMathParaPr>
+                      <m:jc m:val="centerGroup"/>
+                    </m:oMathParaPr>
+                    <m:oMath xmlns:m="http://schemas.openxmlformats.org/officeDocument/2006/math">
+                      <m:r>
+                        <a:rPr lang="fr-FR" sz="2000" i="1" smtClean="0">
+                          <a:solidFill>
+                            <a:schemeClr val="accent6">
+                              <a:lumMod val="60000"/>
+                              <a:lumOff val="40000"/>
+                            </a:schemeClr>
+                          </a:solidFill>
+                          <a:latin typeface="Cambria Math" panose="02040503050406030204" pitchFamily="18" charset="0"/>
+                        </a:rPr>
+                        <m:t>𝜏</m:t>
+                      </m:r>
+                      <m:r>
+                        <a:rPr lang="fr-FR" sz="2000" i="1" smtClean="0">
+                          <a:solidFill>
+                            <a:schemeClr val="accent6">
+                              <a:lumMod val="60000"/>
+                              <a:lumOff val="40000"/>
+                            </a:schemeClr>
+                          </a:solidFill>
+                          <a:latin typeface="Cambria Math" panose="02040503050406030204" pitchFamily="18" charset="0"/>
+                        </a:rPr>
+                        <m:t>=</m:t>
+                      </m:r>
+                      <m:r>
+                        <a:rPr lang="fr-FR" sz="2000" b="0" i="1" smtClean="0">
+                          <a:solidFill>
+                            <a:schemeClr val="accent6">
+                              <a:lumMod val="60000"/>
+                              <a:lumOff val="40000"/>
+                            </a:schemeClr>
+                          </a:solidFill>
+                          <a:latin typeface="Cambria Math" panose="02040503050406030204" pitchFamily="18" charset="0"/>
+                        </a:rPr>
+                        <m:t>𝐺</m:t>
+                      </m:r>
+                      <m:r>
+                        <a:rPr lang="ar-AE" sz="2000" i="1">
+                          <a:solidFill>
+                            <a:schemeClr val="accent6">
+                              <a:lumMod val="60000"/>
+                              <a:lumOff val="40000"/>
+                            </a:schemeClr>
+                          </a:solidFill>
+                          <a:latin typeface="Cambria Math" panose="02040503050406030204" pitchFamily="18" charset="0"/>
+                        </a:rPr>
+                        <m:t>𝛾</m:t>
+                      </m:r>
+                    </m:oMath>
+                  </m:oMathPara>
+                </a14:m>
+                <a:endParaRPr lang="ar-AE" sz="2000" dirty="0"/>
               </a:p>
               <a:p>
-                <a:endParaRPr lang="ar-AE" sz="2600" dirty="0"/>
+                <a:endParaRPr lang="ar-AE" sz="2000" dirty="0"/>
               </a:p>
             </p:txBody>
           </p:sp>
@@ -18346,8 +18486,8 @@
             </p:nvSpPr>
             <p:spPr>
               <a:xfrm>
-                <a:off x="879702" y="3276260"/>
-                <a:ext cx="8031687" cy="1632159"/>
+                <a:off x="1109486" y="3645649"/>
+                <a:ext cx="4370391" cy="1372818"/>
               </a:xfrm>
               <a:prstGeom prst="rect">
                 <a:avLst/>
@@ -18355,7 +18495,7 @@
               <a:blipFill>
                 <a:blip r:embed="rId4"/>
                 <a:stretch>
-                  <a:fillRect l="-1366" t="-6343"/>
+                  <a:fillRect l="-1395" t="-5778"/>
                 </a:stretch>
               </a:blipFill>
             </p:spPr>
@@ -18374,36 +18514,6 @@
           </p:sp>
         </mc:Fallback>
       </mc:AlternateContent>
-      <p:pic>
-        <p:nvPicPr>
-          <p:cNvPr id="15" name="Image 14">
-            <a:extLst>
-              <a:ext uri="{FF2B5EF4-FFF2-40B4-BE49-F238E27FC236}">
-                <a16:creationId xmlns:a16="http://schemas.microsoft.com/office/drawing/2014/main" id="{CAE50F76-4E12-8504-9139-6A8DF2E7A70D}"/>
-              </a:ext>
-            </a:extLst>
-          </p:cNvPr>
-          <p:cNvPicPr>
-            <a:picLocks noChangeAspect="1"/>
-          </p:cNvPicPr>
-          <p:nvPr/>
-        </p:nvPicPr>
-        <p:blipFill>
-          <a:blip r:embed="rId5"/>
-          <a:stretch>
-            <a:fillRect/>
-          </a:stretch>
-        </p:blipFill>
-        <p:spPr>
-          <a:xfrm>
-            <a:off x="8620010" y="2909588"/>
-            <a:ext cx="2689674" cy="1796251"/>
-          </a:xfrm>
-          <a:prstGeom prst="rect">
-            <a:avLst/>
-          </a:prstGeom>
-        </p:spPr>
-      </p:pic>
       <mc:AlternateContent xmlns:mc="http://schemas.openxmlformats.org/markup-compatibility/2006">
         <mc:Choice xmlns:a14="http://schemas.microsoft.com/office/drawing/2010/main" Requires="a14">
           <p:sp>
@@ -18422,8 +18532,8 @@
             </p:nvSpPr>
             <p:spPr>
               <a:xfrm>
-                <a:off x="3312331" y="5068883"/>
-                <a:ext cx="5564724" cy="1322641"/>
+                <a:off x="2354855" y="5338722"/>
+                <a:ext cx="7482290" cy="1184517"/>
               </a:xfrm>
               <a:prstGeom prst="rect">
                 <a:avLst/>
@@ -18433,6 +18543,1481 @@
                 <a:solidFill>
                   <a:srgbClr val="F5CDCE"/>
                 </a:solidFill>
+              </a:ln>
+            </p:spPr>
+            <p:txBody>
+              <a:bodyPr vert="horz" lIns="91440" tIns="0" rIns="91440" bIns="0" rtlCol="0">
+                <a:normAutofit fontScale="92500"/>
+              </a:bodyPr>
+              <a:lstStyle>
+                <a:defPPr>
+                  <a:defRPr lang="fr-FR"/>
+                </a:defPPr>
+                <a:lvl1pPr marL="0" indent="0" algn="l" defTabSz="914400" rtl="0" eaLnBrk="1" latinLnBrk="0" hangingPunct="1">
+                  <a:lnSpc>
+                    <a:spcPct val="100000"/>
+                  </a:lnSpc>
+                  <a:spcBef>
+                    <a:spcPts val="0"/>
+                  </a:spcBef>
+                  <a:buFont typeface="Arial" panose="020B0604020202020204" pitchFamily="34" charset="0"/>
+                  <a:buNone/>
+                  <a:defRPr lang="fr-FR" sz="2400" kern="1200">
+                    <a:solidFill>
+                      <a:schemeClr val="accent6"/>
+                    </a:solidFill>
+                    <a:latin typeface="+mn-lt"/>
+                    <a:ea typeface="+mn-ea"/>
+                    <a:cs typeface="+mn-cs"/>
+                  </a:defRPr>
+                </a:lvl1pPr>
+                <a:lvl2pPr marL="347472" indent="-347472" algn="l" defTabSz="914400" rtl="0" eaLnBrk="1" latinLnBrk="0" hangingPunct="1">
+                  <a:lnSpc>
+                    <a:spcPct val="100000"/>
+                  </a:lnSpc>
+                  <a:spcBef>
+                    <a:spcPts val="0"/>
+                  </a:spcBef>
+                  <a:buFont typeface="Arial" panose="020B0604020202020204" pitchFamily="34" charset="0"/>
+                  <a:buChar char="•"/>
+                  <a:defRPr lang="fr-FR" sz="2400" kern="1200">
+                    <a:solidFill>
+                      <a:schemeClr val="accent6"/>
+                    </a:solidFill>
+                    <a:latin typeface="+mn-lt"/>
+                    <a:ea typeface="+mn-ea"/>
+                    <a:cs typeface="+mn-cs"/>
+                  </a:defRPr>
+                </a:lvl2pPr>
+                <a:lvl3pPr marL="685800" indent="-347472" algn="l" defTabSz="914400" rtl="0" eaLnBrk="1" latinLnBrk="0" hangingPunct="1">
+                  <a:lnSpc>
+                    <a:spcPct val="100000"/>
+                  </a:lnSpc>
+                  <a:spcBef>
+                    <a:spcPts val="0"/>
+                  </a:spcBef>
+                  <a:buFont typeface="Arial" panose="020B0604020202020204" pitchFamily="34" charset="0"/>
+                  <a:buChar char="•"/>
+                  <a:defRPr lang="fr-FR" sz="2400" kern="1200">
+                    <a:solidFill>
+                      <a:schemeClr val="accent6"/>
+                    </a:solidFill>
+                    <a:latin typeface="+mn-lt"/>
+                    <a:ea typeface="+mn-ea"/>
+                    <a:cs typeface="+mn-cs"/>
+                  </a:defRPr>
+                </a:lvl3pPr>
+                <a:lvl4pPr marL="1600200" indent="-347472" algn="l" defTabSz="914400" rtl="0" eaLnBrk="1" latinLnBrk="0" hangingPunct="1">
+                  <a:lnSpc>
+                    <a:spcPct val="100000"/>
+                  </a:lnSpc>
+                  <a:spcBef>
+                    <a:spcPts val="360"/>
+                  </a:spcBef>
+                  <a:buFont typeface="Arial" panose="020B0604020202020204" pitchFamily="34" charset="0"/>
+                  <a:buChar char="•"/>
+                  <a:defRPr lang="fr-FR" sz="1800" kern="1200">
+                    <a:solidFill>
+                      <a:schemeClr val="accent6"/>
+                    </a:solidFill>
+                    <a:latin typeface="+mn-lt"/>
+                    <a:ea typeface="+mn-ea"/>
+                    <a:cs typeface="+mn-cs"/>
+                  </a:defRPr>
+                </a:lvl4pPr>
+                <a:lvl5pPr marL="2057400" indent="-347472" algn="l" defTabSz="914400" rtl="0" eaLnBrk="1" latinLnBrk="0" hangingPunct="1">
+                  <a:lnSpc>
+                    <a:spcPct val="100000"/>
+                  </a:lnSpc>
+                  <a:spcBef>
+                    <a:spcPts val="360"/>
+                  </a:spcBef>
+                  <a:buFont typeface="Arial" panose="020B0604020202020204" pitchFamily="34" charset="0"/>
+                  <a:buChar char="•"/>
+                  <a:defRPr lang="fr-FR" sz="1800" kern="1200">
+                    <a:solidFill>
+                      <a:schemeClr val="accent6"/>
+                    </a:solidFill>
+                    <a:latin typeface="+mn-lt"/>
+                    <a:ea typeface="+mn-ea"/>
+                    <a:cs typeface="+mn-cs"/>
+                  </a:defRPr>
+                </a:lvl5pPr>
+                <a:lvl6pPr marL="2514600" indent="-228600" algn="l" defTabSz="914400" rtl="0" eaLnBrk="1" latinLnBrk="0" hangingPunct="1">
+                  <a:lnSpc>
+                    <a:spcPct val="90000"/>
+                  </a:lnSpc>
+                  <a:spcBef>
+                    <a:spcPts val="500"/>
+                  </a:spcBef>
+                  <a:buFont typeface="Arial" panose="020B0604020202020204" pitchFamily="34" charset="0"/>
+                  <a:buChar char="•"/>
+                  <a:defRPr lang="fr-FR" sz="1800" kern="1200">
+                    <a:solidFill>
+                      <a:schemeClr val="tx1"/>
+                    </a:solidFill>
+                    <a:latin typeface="+mn-lt"/>
+                    <a:ea typeface="+mn-ea"/>
+                    <a:cs typeface="+mn-cs"/>
+                  </a:defRPr>
+                </a:lvl6pPr>
+                <a:lvl7pPr marL="2971800" indent="-228600" algn="l" defTabSz="914400" rtl="0" eaLnBrk="1" latinLnBrk="0" hangingPunct="1">
+                  <a:lnSpc>
+                    <a:spcPct val="90000"/>
+                  </a:lnSpc>
+                  <a:spcBef>
+                    <a:spcPts val="500"/>
+                  </a:spcBef>
+                  <a:buFont typeface="Arial" panose="020B0604020202020204" pitchFamily="34" charset="0"/>
+                  <a:buChar char="•"/>
+                  <a:defRPr lang="fr-FR" sz="1800" kern="1200">
+                    <a:solidFill>
+                      <a:schemeClr val="tx1"/>
+                    </a:solidFill>
+                    <a:latin typeface="+mn-lt"/>
+                    <a:ea typeface="+mn-ea"/>
+                    <a:cs typeface="+mn-cs"/>
+                  </a:defRPr>
+                </a:lvl7pPr>
+                <a:lvl8pPr marL="3429000" indent="-228600" algn="l" defTabSz="914400" rtl="0" eaLnBrk="1" latinLnBrk="0" hangingPunct="1">
+                  <a:lnSpc>
+                    <a:spcPct val="90000"/>
+                  </a:lnSpc>
+                  <a:spcBef>
+                    <a:spcPts val="500"/>
+                  </a:spcBef>
+                  <a:buFont typeface="Arial" panose="020B0604020202020204" pitchFamily="34" charset="0"/>
+                  <a:buChar char="•"/>
+                  <a:defRPr lang="fr-FR" sz="1800" kern="1200">
+                    <a:solidFill>
+                      <a:schemeClr val="tx1"/>
+                    </a:solidFill>
+                    <a:latin typeface="+mn-lt"/>
+                    <a:ea typeface="+mn-ea"/>
+                    <a:cs typeface="+mn-cs"/>
+                  </a:defRPr>
+                </a:lvl8pPr>
+                <a:lvl9pPr marL="3886200" indent="-228600" algn="l" defTabSz="914400" rtl="0" eaLnBrk="1" latinLnBrk="0" hangingPunct="1">
+                  <a:lnSpc>
+                    <a:spcPct val="90000"/>
+                  </a:lnSpc>
+                  <a:spcBef>
+                    <a:spcPts val="500"/>
+                  </a:spcBef>
+                  <a:buFont typeface="Arial" panose="020B0604020202020204" pitchFamily="34" charset="0"/>
+                  <a:buChar char="•"/>
+                  <a:defRPr lang="fr-FR" sz="1800" kern="1200">
+                    <a:solidFill>
+                      <a:schemeClr val="tx1"/>
+                    </a:solidFill>
+                    <a:latin typeface="+mn-lt"/>
+                    <a:ea typeface="+mn-ea"/>
+                    <a:cs typeface="+mn-cs"/>
+                  </a:defRPr>
+                </a:lvl9pPr>
+              </a:lstStyle>
+              <a:p>
+                <a:endParaRPr lang="fr-FR" sz="1600" i="1" dirty="0">
+                  <a:latin typeface="Cambria Math" panose="02040503050406030204" pitchFamily="18" charset="0"/>
+                </a:endParaRPr>
+              </a:p>
+              <a:p>
+                <a:pPr/>
+                <a14:m>
+                  <m:oMathPara xmlns:m="http://schemas.openxmlformats.org/officeDocument/2006/math">
+                    <m:oMathParaPr>
+                      <m:jc m:val="centerGroup"/>
+                    </m:oMathParaPr>
+                    <m:oMath xmlns:m="http://schemas.openxmlformats.org/officeDocument/2006/math">
+                      <m:sSub>
+                        <m:sSubPr>
+                          <m:ctrlPr>
+                            <a:rPr lang="fr-FR" sz="2600" b="0" i="1" smtClean="0">
+                              <a:latin typeface="Cambria Math" panose="02040503050406030204" pitchFamily="18" charset="0"/>
+                            </a:rPr>
+                          </m:ctrlPr>
+                        </m:sSubPr>
+                        <m:e>
+                          <m:r>
+                            <a:rPr lang="fr-FR" sz="2600" i="1">
+                              <a:latin typeface="Cambria Math" panose="02040503050406030204" pitchFamily="18" charset="0"/>
+                            </a:rPr>
+                            <m:t>𝜏</m:t>
+                          </m:r>
+                        </m:e>
+                        <m:sub>
+                          <m:r>
+                            <a:rPr lang="fr-FR" sz="2600" b="0" i="1" smtClean="0">
+                              <a:latin typeface="Cambria Math" panose="02040503050406030204" pitchFamily="18" charset="0"/>
+                            </a:rPr>
+                            <m:t>𝑡𝑜𝑡𝑎𝑙</m:t>
+                          </m:r>
+                        </m:sub>
+                      </m:sSub>
+                      <m:r>
+                        <a:rPr lang="fr-FR" sz="2600" i="1">
+                          <a:latin typeface="Cambria Math" panose="02040503050406030204" pitchFamily="18" charset="0"/>
+                        </a:rPr>
+                        <m:t>=</m:t>
+                      </m:r>
+                      <m:r>
+                        <a:rPr lang="fr-FR" sz="2600" b="0" i="1" smtClean="0">
+                          <a:latin typeface="Cambria Math" panose="02040503050406030204" pitchFamily="18" charset="0"/>
+                        </a:rPr>
+                        <m:t>−</m:t>
+                      </m:r>
+                      <m:f>
+                        <m:fPr>
+                          <m:ctrlPr>
+                            <a:rPr lang="fr-FR" sz="2600" b="0" i="1" smtClean="0">
+                              <a:latin typeface="Cambria Math" panose="02040503050406030204" pitchFamily="18" charset="0"/>
+                            </a:rPr>
+                          </m:ctrlPr>
+                        </m:fPr>
+                        <m:num>
+                          <m:r>
+                            <a:rPr lang="fr-FR" sz="2600" b="0" i="1" smtClean="0">
+                              <a:latin typeface="Cambria Math" panose="02040503050406030204" pitchFamily="18" charset="0"/>
+                            </a:rPr>
+                            <m:t>𝑀𝑔</m:t>
+                          </m:r>
+                        </m:num>
+                        <m:den>
+                          <m:r>
+                            <a:rPr lang="fr-FR" sz="2600" b="0" i="1" smtClean="0">
+                              <a:latin typeface="Cambria Math" panose="02040503050406030204" pitchFamily="18" charset="0"/>
+                              <a:ea typeface="Cambria Math" panose="02040503050406030204" pitchFamily="18" charset="0"/>
+                            </a:rPr>
+                            <m:t>𝜋</m:t>
+                          </m:r>
+                          <m:sSup>
+                            <m:sSupPr>
+                              <m:ctrlPr>
+                                <a:rPr lang="fr-FR" sz="2600" b="0" i="1" smtClean="0">
+                                  <a:latin typeface="Cambria Math" panose="02040503050406030204" pitchFamily="18" charset="0"/>
+                                </a:rPr>
+                              </m:ctrlPr>
+                            </m:sSupPr>
+                            <m:e>
+                              <m:r>
+                                <a:rPr lang="fr-FR" sz="2600" b="0" i="1" smtClean="0">
+                                  <a:latin typeface="Cambria Math" panose="02040503050406030204" pitchFamily="18" charset="0"/>
+                                </a:rPr>
+                                <m:t>𝑟</m:t>
+                              </m:r>
+                            </m:e>
+                            <m:sup>
+                              <m:r>
+                                <a:rPr lang="fr-FR" sz="2600" b="0" i="1" smtClean="0">
+                                  <a:latin typeface="Cambria Math" panose="02040503050406030204" pitchFamily="18" charset="0"/>
+                                </a:rPr>
+                                <m:t>2</m:t>
+                              </m:r>
+                            </m:sup>
+                          </m:sSup>
+                        </m:den>
+                      </m:f>
+                      <m:r>
+                        <a:rPr lang="fr-FR" sz="2600" b="0" i="1" smtClean="0">
+                          <a:latin typeface="Cambria Math" panose="02040503050406030204" pitchFamily="18" charset="0"/>
+                        </a:rPr>
+                        <m:t>−</m:t>
+                      </m:r>
+                      <m:r>
+                        <a:rPr lang="fr-FR" sz="2600" b="0" i="1" smtClean="0">
+                          <a:latin typeface="Cambria Math" panose="02040503050406030204" pitchFamily="18" charset="0"/>
+                          <a:ea typeface="Cambria Math" panose="02040503050406030204" pitchFamily="18" charset="0"/>
+                        </a:rPr>
+                        <m:t>𝜌</m:t>
+                      </m:r>
+                      <m:r>
+                        <a:rPr lang="fr-FR" sz="2600" b="0" i="1" smtClean="0">
+                          <a:latin typeface="Cambria Math" panose="02040503050406030204" pitchFamily="18" charset="0"/>
+                          <a:ea typeface="Cambria Math" panose="02040503050406030204" pitchFamily="18" charset="0"/>
+                        </a:rPr>
+                        <m:t>𝑔</m:t>
+                      </m:r>
+                      <m:r>
+                        <a:rPr lang="fr-FR" sz="2600" b="0" i="1" smtClean="0">
+                          <a:latin typeface="Cambria Math" panose="02040503050406030204" pitchFamily="18" charset="0"/>
+                          <a:ea typeface="Cambria Math" panose="02040503050406030204" pitchFamily="18" charset="0"/>
+                        </a:rPr>
+                        <m:t>h</m:t>
+                      </m:r>
+                      <m:r>
+                        <a:rPr lang="fr-FR" sz="2600" b="0" i="1" smtClean="0">
+                          <a:latin typeface="Cambria Math" panose="02040503050406030204" pitchFamily="18" charset="0"/>
+                          <a:ea typeface="Cambria Math" panose="02040503050406030204" pitchFamily="18" charset="0"/>
+                        </a:rPr>
+                        <m:t>−</m:t>
+                      </m:r>
+                      <m:f>
+                        <m:fPr>
+                          <m:ctrlPr>
+                            <a:rPr lang="fr-FR" sz="2600" b="0" i="1" smtClean="0">
+                              <a:latin typeface="Cambria Math" panose="02040503050406030204" pitchFamily="18" charset="0"/>
+                              <a:ea typeface="Cambria Math" panose="02040503050406030204" pitchFamily="18" charset="0"/>
+                            </a:rPr>
+                          </m:ctrlPr>
+                        </m:fPr>
+                        <m:num>
+                          <m:r>
+                            <a:rPr lang="fr-FR" sz="2600" b="0" i="1" smtClean="0">
+                              <a:latin typeface="Cambria Math" panose="02040503050406030204" pitchFamily="18" charset="0"/>
+                              <a:ea typeface="Cambria Math" panose="02040503050406030204" pitchFamily="18" charset="0"/>
+                            </a:rPr>
+                            <m:t>𝜎</m:t>
+                          </m:r>
+                        </m:num>
+                        <m:den>
+                          <m:sSub>
+                            <m:sSubPr>
+                              <m:ctrlPr>
+                                <a:rPr lang="fr-FR" sz="2600" b="0" i="1" smtClean="0">
+                                  <a:latin typeface="Cambria Math" panose="02040503050406030204" pitchFamily="18" charset="0"/>
+                                  <a:ea typeface="Cambria Math" panose="02040503050406030204" pitchFamily="18" charset="0"/>
+                                </a:rPr>
+                              </m:ctrlPr>
+                            </m:sSubPr>
+                            <m:e>
+                              <m:r>
+                                <a:rPr lang="fr-FR" sz="2600" b="0" i="1" smtClean="0">
+                                  <a:latin typeface="Cambria Math" panose="02040503050406030204" pitchFamily="18" charset="0"/>
+                                  <a:ea typeface="Cambria Math" panose="02040503050406030204" pitchFamily="18" charset="0"/>
+                                </a:rPr>
+                                <m:t>𝑟</m:t>
+                              </m:r>
+                            </m:e>
+                            <m:sub>
+                              <m:r>
+                                <a:rPr lang="fr-FR" sz="2600" b="0" i="1" smtClean="0">
+                                  <a:latin typeface="Cambria Math" panose="02040503050406030204" pitchFamily="18" charset="0"/>
+                                  <a:ea typeface="Cambria Math" panose="02040503050406030204" pitchFamily="18" charset="0"/>
+                                </a:rPr>
+                                <m:t>0</m:t>
+                              </m:r>
+                            </m:sub>
+                          </m:sSub>
+                        </m:den>
+                      </m:f>
+                      <m:r>
+                        <a:rPr lang="fr-FR" sz="2600" b="0" i="1" smtClean="0">
+                          <a:latin typeface="Cambria Math" panose="02040503050406030204" pitchFamily="18" charset="0"/>
+                          <a:ea typeface="Cambria Math" panose="02040503050406030204" pitchFamily="18" charset="0"/>
+                        </a:rPr>
+                        <m:t>(</m:t>
+                      </m:r>
+                      <m:f>
+                        <m:fPr>
+                          <m:ctrlPr>
+                            <a:rPr lang="fr-FR" sz="2600" b="0" i="1" smtClean="0">
+                              <a:latin typeface="Cambria Math" panose="02040503050406030204" pitchFamily="18" charset="0"/>
+                              <a:ea typeface="Cambria Math" panose="02040503050406030204" pitchFamily="18" charset="0"/>
+                            </a:rPr>
+                          </m:ctrlPr>
+                        </m:fPr>
+                        <m:num>
+                          <m:sSub>
+                            <m:sSubPr>
+                              <m:ctrlPr>
+                                <a:rPr lang="fr-FR" sz="2600" b="0" i="1" smtClean="0">
+                                  <a:latin typeface="Cambria Math" panose="02040503050406030204" pitchFamily="18" charset="0"/>
+                                  <a:ea typeface="Cambria Math" panose="02040503050406030204" pitchFamily="18" charset="0"/>
+                                </a:rPr>
+                              </m:ctrlPr>
+                            </m:sSubPr>
+                            <m:e>
+                              <m:r>
+                                <a:rPr lang="fr-FR" sz="2600" b="0" i="1" smtClean="0">
+                                  <a:latin typeface="Cambria Math" panose="02040503050406030204" pitchFamily="18" charset="0"/>
+                                  <a:ea typeface="Cambria Math" panose="02040503050406030204" pitchFamily="18" charset="0"/>
+                                </a:rPr>
+                                <m:t>𝑟</m:t>
+                              </m:r>
+                            </m:e>
+                            <m:sub>
+                              <m:r>
+                                <a:rPr lang="fr-FR" sz="2600" b="0" i="1" smtClean="0">
+                                  <a:latin typeface="Cambria Math" panose="02040503050406030204" pitchFamily="18" charset="0"/>
+                                  <a:ea typeface="Cambria Math" panose="02040503050406030204" pitchFamily="18" charset="0"/>
+                                </a:rPr>
+                                <m:t>0</m:t>
+                              </m:r>
+                            </m:sub>
+                          </m:sSub>
+                        </m:num>
+                        <m:den>
+                          <m:r>
+                            <a:rPr lang="fr-FR" sz="2600" b="0" i="1" smtClean="0">
+                              <a:latin typeface="Cambria Math" panose="02040503050406030204" pitchFamily="18" charset="0"/>
+                              <a:ea typeface="Cambria Math" panose="02040503050406030204" pitchFamily="18" charset="0"/>
+                            </a:rPr>
+                            <m:t>𝑟</m:t>
+                          </m:r>
+                        </m:den>
+                      </m:f>
+                      <m:r>
+                        <a:rPr lang="fr-FR" sz="2600" b="0" i="1" smtClean="0">
+                          <a:latin typeface="Cambria Math" panose="02040503050406030204" pitchFamily="18" charset="0"/>
+                          <a:ea typeface="Cambria Math" panose="02040503050406030204" pitchFamily="18" charset="0"/>
+                        </a:rPr>
+                        <m:t>−</m:t>
+                      </m:r>
+                      <m:r>
+                        <a:rPr lang="fr-FR" sz="2600" b="0" i="1" smtClean="0">
+                          <a:latin typeface="Cambria Math" panose="02040503050406030204" pitchFamily="18" charset="0"/>
+                          <a:ea typeface="Cambria Math" panose="02040503050406030204" pitchFamily="18" charset="0"/>
+                        </a:rPr>
+                        <m:t>1</m:t>
+                      </m:r>
+                      <m:r>
+                        <a:rPr lang="fr-FR" sz="2600" b="0" i="1" smtClean="0">
+                          <a:latin typeface="Cambria Math" panose="02040503050406030204" pitchFamily="18" charset="0"/>
+                          <a:ea typeface="Cambria Math" panose="02040503050406030204" pitchFamily="18" charset="0"/>
+                        </a:rPr>
+                        <m:t>)+</m:t>
+                      </m:r>
+                      <m:r>
+                        <a:rPr lang="fr-FR" sz="2600" i="1" smtClean="0">
+                          <a:solidFill>
+                            <a:schemeClr val="accent6">
+                              <a:lumMod val="60000"/>
+                              <a:lumOff val="40000"/>
+                            </a:schemeClr>
+                          </a:solidFill>
+                          <a:latin typeface="Cambria Math" panose="02040503050406030204" pitchFamily="18" charset="0"/>
+                        </a:rPr>
+                        <m:t>𝐺</m:t>
+                      </m:r>
+                      <m:r>
+                        <a:rPr lang="ar-AE" sz="2600" i="1">
+                          <a:solidFill>
+                            <a:schemeClr val="accent6">
+                              <a:lumMod val="60000"/>
+                              <a:lumOff val="40000"/>
+                            </a:schemeClr>
+                          </a:solidFill>
+                          <a:latin typeface="Cambria Math" panose="02040503050406030204" pitchFamily="18" charset="0"/>
+                        </a:rPr>
+                        <m:t>𝛾</m:t>
+                      </m:r>
+                      <m:r>
+                        <a:rPr lang="fr-FR" sz="2600" b="0" i="1" smtClean="0">
+                          <a:solidFill>
+                            <a:schemeClr val="accent6">
+                              <a:lumMod val="60000"/>
+                              <a:lumOff val="40000"/>
+                            </a:schemeClr>
+                          </a:solidFill>
+                          <a:latin typeface="Cambria Math" panose="02040503050406030204" pitchFamily="18" charset="0"/>
+                        </a:rPr>
+                        <m:t>+</m:t>
+                      </m:r>
+                      <m:r>
+                        <a:rPr lang="fr-FR" sz="2600" i="1">
+                          <a:solidFill>
+                            <a:schemeClr val="accent6">
+                              <a:lumMod val="60000"/>
+                              <a:lumOff val="40000"/>
+                            </a:schemeClr>
+                          </a:solidFill>
+                          <a:latin typeface="Cambria Math" panose="02040503050406030204" pitchFamily="18" charset="0"/>
+                        </a:rPr>
+                        <m:t>𝑘</m:t>
+                      </m:r>
+                      <m:sSup>
+                        <m:sSupPr>
+                          <m:ctrlPr>
+                            <a:rPr lang="fr-FR" sz="2600" i="1">
+                              <a:solidFill>
+                                <a:schemeClr val="accent6">
+                                  <a:lumMod val="60000"/>
+                                  <a:lumOff val="40000"/>
+                                </a:schemeClr>
+                              </a:solidFill>
+                              <a:latin typeface="Cambria Math" panose="02040503050406030204" pitchFamily="18" charset="0"/>
+                            </a:rPr>
+                          </m:ctrlPr>
+                        </m:sSupPr>
+                        <m:e>
+                          <m:acc>
+                            <m:accPr>
+                              <m:chr m:val="̇"/>
+                              <m:ctrlPr>
+                                <a:rPr lang="fr-FR" sz="2600" i="1">
+                                  <a:solidFill>
+                                    <a:schemeClr val="accent6">
+                                      <a:lumMod val="60000"/>
+                                      <a:lumOff val="40000"/>
+                                    </a:schemeClr>
+                                  </a:solidFill>
+                                  <a:latin typeface="Cambria Math" panose="02040503050406030204" pitchFamily="18" charset="0"/>
+                                </a:rPr>
+                              </m:ctrlPr>
+                            </m:accPr>
+                            <m:e>
+                              <m:r>
+                                <a:rPr lang="fr-FR" sz="2600" i="1">
+                                  <a:solidFill>
+                                    <a:schemeClr val="accent6">
+                                      <a:lumMod val="60000"/>
+                                      <a:lumOff val="40000"/>
+                                    </a:schemeClr>
+                                  </a:solidFill>
+                                  <a:latin typeface="Cambria Math" panose="02040503050406030204" pitchFamily="18" charset="0"/>
+                                </a:rPr>
+                                <m:t>𝛾</m:t>
+                              </m:r>
+                            </m:e>
+                          </m:acc>
+                        </m:e>
+                        <m:sup>
+                          <m:r>
+                            <a:rPr lang="fr-FR" sz="2600" i="1">
+                              <a:solidFill>
+                                <a:schemeClr val="accent6">
+                                  <a:lumMod val="60000"/>
+                                  <a:lumOff val="40000"/>
+                                </a:schemeClr>
+                              </a:solidFill>
+                              <a:latin typeface="Cambria Math" panose="02040503050406030204" pitchFamily="18" charset="0"/>
+                            </a:rPr>
+                            <m:t>𝑚</m:t>
+                          </m:r>
+                        </m:sup>
+                      </m:sSup>
+                      <m:r>
+                        <a:rPr lang="fr-FR" sz="2600" dirty="0">
+                          <a:solidFill>
+                            <a:schemeClr val="accent6">
+                              <a:lumMod val="60000"/>
+                              <a:lumOff val="40000"/>
+                            </a:schemeClr>
+                          </a:solidFill>
+                          <a:latin typeface="Cambria Math" panose="02040503050406030204" pitchFamily="18" charset="0"/>
+                        </a:rPr>
+                        <m:t>+</m:t>
+                      </m:r>
+                      <m:sSub>
+                        <m:sSubPr>
+                          <m:ctrlPr>
+                            <a:rPr lang="fr-FR" sz="2600" i="1" dirty="0">
+                              <a:solidFill>
+                                <a:schemeClr val="accent6">
+                                  <a:lumMod val="60000"/>
+                                  <a:lumOff val="40000"/>
+                                </a:schemeClr>
+                              </a:solidFill>
+                              <a:latin typeface="Cambria Math" panose="02040503050406030204" pitchFamily="18" charset="0"/>
+                            </a:rPr>
+                          </m:ctrlPr>
+                        </m:sSubPr>
+                        <m:e>
+                          <m:r>
+                            <a:rPr lang="fr-FR" sz="2600" i="1" dirty="0">
+                              <a:solidFill>
+                                <a:schemeClr val="accent6">
+                                  <a:lumMod val="60000"/>
+                                  <a:lumOff val="40000"/>
+                                </a:schemeClr>
+                              </a:solidFill>
+                              <a:latin typeface="Cambria Math" panose="02040503050406030204" pitchFamily="18" charset="0"/>
+                            </a:rPr>
+                            <m:t>𝜏</m:t>
+                          </m:r>
+                        </m:e>
+                        <m:sub>
+                          <m:r>
+                            <a:rPr lang="fr-FR" sz="2600" dirty="0">
+                              <a:solidFill>
+                                <a:schemeClr val="accent6">
+                                  <a:lumMod val="60000"/>
+                                  <a:lumOff val="40000"/>
+                                </a:schemeClr>
+                              </a:solidFill>
+                              <a:latin typeface="Cambria Math" panose="02040503050406030204" pitchFamily="18" charset="0"/>
+                            </a:rPr>
+                            <m:t>0</m:t>
+                          </m:r>
+                        </m:sub>
+                      </m:sSub>
+                    </m:oMath>
+                  </m:oMathPara>
+                </a14:m>
+                <a:endParaRPr lang="ar-AE" sz="2600" dirty="0"/>
+              </a:p>
+              <a:p>
+                <a:endParaRPr lang="ar-AE" sz="2800" dirty="0"/>
+              </a:p>
+              <a:p>
+                <a:endParaRPr lang="ar-AE" sz="2800" dirty="0"/>
+              </a:p>
+            </p:txBody>
+          </p:sp>
+        </mc:Choice>
+        <mc:Fallback>
+          <p:sp>
+            <p:nvSpPr>
+              <p:cNvPr id="16" name="Espace réservé du texte 2">
+                <a:extLst>
+                  <a:ext uri="{FF2B5EF4-FFF2-40B4-BE49-F238E27FC236}">
+                    <a16:creationId xmlns:a16="http://schemas.microsoft.com/office/drawing/2014/main" id="{2C94D156-8166-AF11-E939-C3D496469A55}"/>
+                  </a:ext>
+                </a:extLst>
+              </p:cNvPr>
+              <p:cNvSpPr txBox="1">
+                <a:spLocks noRot="1" noChangeAspect="1" noMove="1" noResize="1" noEditPoints="1" noAdjustHandles="1" noChangeArrowheads="1" noChangeShapeType="1" noTextEdit="1"/>
+              </p:cNvSpPr>
+              <p:nvPr/>
+            </p:nvSpPr>
+            <p:spPr>
+              <a:xfrm>
+                <a:off x="2354855" y="5338722"/>
+                <a:ext cx="7482290" cy="1184517"/>
+              </a:xfrm>
+              <a:prstGeom prst="rect">
+                <a:avLst/>
+              </a:prstGeom>
+              <a:blipFill>
+                <a:blip r:embed="rId5"/>
+                <a:stretch>
+                  <a:fillRect/>
+                </a:stretch>
+              </a:blipFill>
+              <a:ln w="76200">
+                <a:solidFill>
+                  <a:srgbClr val="F5CDCE"/>
+                </a:solidFill>
+              </a:ln>
+            </p:spPr>
+            <p:txBody>
+              <a:bodyPr/>
+              <a:lstStyle/>
+              <a:p>
+                <a:r>
+                  <a:rPr lang="fr-FR">
+                    <a:noFill/>
+                  </a:rPr>
+                  <a:t> </a:t>
+                </a:r>
+              </a:p>
+            </p:txBody>
+          </p:sp>
+        </mc:Fallback>
+      </mc:AlternateContent>
+      <p:pic>
+        <p:nvPicPr>
+          <p:cNvPr id="7" name="Image 6">
+            <a:extLst>
+              <a:ext uri="{FF2B5EF4-FFF2-40B4-BE49-F238E27FC236}">
+                <a16:creationId xmlns:a16="http://schemas.microsoft.com/office/drawing/2014/main" id="{C826C115-28C1-D89D-91C6-BA7E959850AC}"/>
+              </a:ext>
+            </a:extLst>
+          </p:cNvPr>
+          <p:cNvPicPr>
+            <a:picLocks noChangeAspect="1"/>
+          </p:cNvPicPr>
+          <p:nvPr/>
+        </p:nvPicPr>
+        <p:blipFill>
+          <a:blip r:embed="rId6"/>
+          <a:srcRect l="3952" t="2686" r="3555" b="4300"/>
+          <a:stretch>
+            <a:fillRect/>
+          </a:stretch>
+        </p:blipFill>
+        <p:spPr>
+          <a:xfrm>
+            <a:off x="6271799" y="1535702"/>
+            <a:ext cx="4806029" cy="3474792"/>
+          </a:xfrm>
+          <a:prstGeom prst="rect">
+            <a:avLst/>
+          </a:prstGeom>
+          <a:ln w="38100">
+            <a:solidFill>
+              <a:srgbClr val="AAC4E9"/>
+            </a:solidFill>
+          </a:ln>
+        </p:spPr>
+      </p:pic>
+      <p:sp>
+        <p:nvSpPr>
+          <p:cNvPr id="8" name="Espace réservé du texte 2">
+            <a:extLst>
+              <a:ext uri="{FF2B5EF4-FFF2-40B4-BE49-F238E27FC236}">
+                <a16:creationId xmlns:a16="http://schemas.microsoft.com/office/drawing/2014/main" id="{E0B5800F-8133-05A4-F243-73EF1E725250}"/>
+              </a:ext>
+            </a:extLst>
+          </p:cNvPr>
+          <p:cNvSpPr txBox="1">
+            <a:spLocks/>
+          </p:cNvSpPr>
+          <p:nvPr/>
+        </p:nvSpPr>
+        <p:spPr>
+          <a:xfrm>
+            <a:off x="4654550" y="1039110"/>
+            <a:ext cx="2882900" cy="496592"/>
+          </a:xfrm>
+          <a:prstGeom prst="rect">
+            <a:avLst/>
+          </a:prstGeom>
+        </p:spPr>
+        <p:txBody>
+          <a:bodyPr vert="horz" lIns="91440" tIns="0" rIns="91440" bIns="0" rtlCol="0">
+            <a:normAutofit/>
+          </a:bodyPr>
+          <a:lstStyle>
+            <a:defPPr>
+              <a:defRPr lang="fr-FR"/>
+            </a:defPPr>
+            <a:lvl1pPr marL="0" indent="0" algn="l" defTabSz="914400" rtl="0" eaLnBrk="1" latinLnBrk="0" hangingPunct="1">
+              <a:lnSpc>
+                <a:spcPct val="100000"/>
+              </a:lnSpc>
+              <a:spcBef>
+                <a:spcPts val="0"/>
+              </a:spcBef>
+              <a:buFont typeface="Arial" panose="020B0604020202020204" pitchFamily="34" charset="0"/>
+              <a:buNone/>
+              <a:defRPr lang="fr-FR" sz="2400" kern="1200">
+                <a:solidFill>
+                  <a:schemeClr val="accent6"/>
+                </a:solidFill>
+                <a:latin typeface="+mn-lt"/>
+                <a:ea typeface="+mn-ea"/>
+                <a:cs typeface="+mn-cs"/>
+              </a:defRPr>
+            </a:lvl1pPr>
+            <a:lvl2pPr marL="347472" indent="-347472" algn="l" defTabSz="914400" rtl="0" eaLnBrk="1" latinLnBrk="0" hangingPunct="1">
+              <a:lnSpc>
+                <a:spcPct val="100000"/>
+              </a:lnSpc>
+              <a:spcBef>
+                <a:spcPts val="0"/>
+              </a:spcBef>
+              <a:buFont typeface="Arial" panose="020B0604020202020204" pitchFamily="34" charset="0"/>
+              <a:buChar char="•"/>
+              <a:defRPr lang="fr-FR" sz="2400" kern="1200">
+                <a:solidFill>
+                  <a:schemeClr val="accent6"/>
+                </a:solidFill>
+                <a:latin typeface="+mn-lt"/>
+                <a:ea typeface="+mn-ea"/>
+                <a:cs typeface="+mn-cs"/>
+              </a:defRPr>
+            </a:lvl2pPr>
+            <a:lvl3pPr marL="685800" indent="-347472" algn="l" defTabSz="914400" rtl="0" eaLnBrk="1" latinLnBrk="0" hangingPunct="1">
+              <a:lnSpc>
+                <a:spcPct val="100000"/>
+              </a:lnSpc>
+              <a:spcBef>
+                <a:spcPts val="0"/>
+              </a:spcBef>
+              <a:buFont typeface="Arial" panose="020B0604020202020204" pitchFamily="34" charset="0"/>
+              <a:buChar char="•"/>
+              <a:defRPr lang="fr-FR" sz="2400" kern="1200">
+                <a:solidFill>
+                  <a:schemeClr val="accent6"/>
+                </a:solidFill>
+                <a:latin typeface="+mn-lt"/>
+                <a:ea typeface="+mn-ea"/>
+                <a:cs typeface="+mn-cs"/>
+              </a:defRPr>
+            </a:lvl3pPr>
+            <a:lvl4pPr marL="1600200" indent="-347472" algn="l" defTabSz="914400" rtl="0" eaLnBrk="1" latinLnBrk="0" hangingPunct="1">
+              <a:lnSpc>
+                <a:spcPct val="100000"/>
+              </a:lnSpc>
+              <a:spcBef>
+                <a:spcPts val="360"/>
+              </a:spcBef>
+              <a:buFont typeface="Arial" panose="020B0604020202020204" pitchFamily="34" charset="0"/>
+              <a:buChar char="•"/>
+              <a:defRPr lang="fr-FR" sz="1800" kern="1200">
+                <a:solidFill>
+                  <a:schemeClr val="accent6"/>
+                </a:solidFill>
+                <a:latin typeface="+mn-lt"/>
+                <a:ea typeface="+mn-ea"/>
+                <a:cs typeface="+mn-cs"/>
+              </a:defRPr>
+            </a:lvl4pPr>
+            <a:lvl5pPr marL="2057400" indent="-347472" algn="l" defTabSz="914400" rtl="0" eaLnBrk="1" latinLnBrk="0" hangingPunct="1">
+              <a:lnSpc>
+                <a:spcPct val="100000"/>
+              </a:lnSpc>
+              <a:spcBef>
+                <a:spcPts val="360"/>
+              </a:spcBef>
+              <a:buFont typeface="Arial" panose="020B0604020202020204" pitchFamily="34" charset="0"/>
+              <a:buChar char="•"/>
+              <a:defRPr lang="fr-FR" sz="1800" kern="1200">
+                <a:solidFill>
+                  <a:schemeClr val="accent6"/>
+                </a:solidFill>
+                <a:latin typeface="+mn-lt"/>
+                <a:ea typeface="+mn-ea"/>
+                <a:cs typeface="+mn-cs"/>
+              </a:defRPr>
+            </a:lvl5pPr>
+            <a:lvl6pPr marL="2514600" indent="-228600" algn="l" defTabSz="914400" rtl="0" eaLnBrk="1" latinLnBrk="0" hangingPunct="1">
+              <a:lnSpc>
+                <a:spcPct val="90000"/>
+              </a:lnSpc>
+              <a:spcBef>
+                <a:spcPts val="500"/>
+              </a:spcBef>
+              <a:buFont typeface="Arial" panose="020B0604020202020204" pitchFamily="34" charset="0"/>
+              <a:buChar char="•"/>
+              <a:defRPr lang="fr-FR" sz="1800" kern="1200">
+                <a:solidFill>
+                  <a:schemeClr val="tx1"/>
+                </a:solidFill>
+                <a:latin typeface="+mn-lt"/>
+                <a:ea typeface="+mn-ea"/>
+                <a:cs typeface="+mn-cs"/>
+              </a:defRPr>
+            </a:lvl6pPr>
+            <a:lvl7pPr marL="2971800" indent="-228600" algn="l" defTabSz="914400" rtl="0" eaLnBrk="1" latinLnBrk="0" hangingPunct="1">
+              <a:lnSpc>
+                <a:spcPct val="90000"/>
+              </a:lnSpc>
+              <a:spcBef>
+                <a:spcPts val="500"/>
+              </a:spcBef>
+              <a:buFont typeface="Arial" panose="020B0604020202020204" pitchFamily="34" charset="0"/>
+              <a:buChar char="•"/>
+              <a:defRPr lang="fr-FR" sz="1800" kern="1200">
+                <a:solidFill>
+                  <a:schemeClr val="tx1"/>
+                </a:solidFill>
+                <a:latin typeface="+mn-lt"/>
+                <a:ea typeface="+mn-ea"/>
+                <a:cs typeface="+mn-cs"/>
+              </a:defRPr>
+            </a:lvl7pPr>
+            <a:lvl8pPr marL="3429000" indent="-228600" algn="l" defTabSz="914400" rtl="0" eaLnBrk="1" latinLnBrk="0" hangingPunct="1">
+              <a:lnSpc>
+                <a:spcPct val="90000"/>
+              </a:lnSpc>
+              <a:spcBef>
+                <a:spcPts val="500"/>
+              </a:spcBef>
+              <a:buFont typeface="Arial" panose="020B0604020202020204" pitchFamily="34" charset="0"/>
+              <a:buChar char="•"/>
+              <a:defRPr lang="fr-FR" sz="1800" kern="1200">
+                <a:solidFill>
+                  <a:schemeClr val="tx1"/>
+                </a:solidFill>
+                <a:latin typeface="+mn-lt"/>
+                <a:ea typeface="+mn-ea"/>
+                <a:cs typeface="+mn-cs"/>
+              </a:defRPr>
+            </a:lvl8pPr>
+            <a:lvl9pPr marL="3886200" indent="-228600" algn="l" defTabSz="914400" rtl="0" eaLnBrk="1" latinLnBrk="0" hangingPunct="1">
+              <a:lnSpc>
+                <a:spcPct val="90000"/>
+              </a:lnSpc>
+              <a:spcBef>
+                <a:spcPts val="500"/>
+              </a:spcBef>
+              <a:buFont typeface="Arial" panose="020B0604020202020204" pitchFamily="34" charset="0"/>
+              <a:buChar char="•"/>
+              <a:defRPr lang="fr-FR" sz="1800" kern="1200">
+                <a:solidFill>
+                  <a:schemeClr val="tx1"/>
+                </a:solidFill>
+                <a:latin typeface="+mn-lt"/>
+                <a:ea typeface="+mn-ea"/>
+                <a:cs typeface="+mn-cs"/>
+              </a:defRPr>
+            </a:lvl9pPr>
+          </a:lstStyle>
+          <a:p>
+            <a:r>
+              <a:rPr lang="fr-FR" sz="2000" b="1" dirty="0"/>
+              <a:t>Calcul des contraintes</a:t>
+            </a:r>
+            <a:endParaRPr lang="ar-AE" sz="2000" b="1" dirty="0"/>
+          </a:p>
+        </p:txBody>
+      </p:sp>
+    </p:spTree>
+    <p:extLst>
+      <p:ext uri="{BB962C8B-B14F-4D97-AF65-F5344CB8AC3E}">
+        <p14:creationId xmlns:p14="http://schemas.microsoft.com/office/powerpoint/2010/main" val="3002823423"/>
+      </p:ext>
+    </p:extLst>
+  </p:cSld>
+  <p:clrMapOvr>
+    <a:masterClrMapping/>
+  </p:clrMapOvr>
+</p:sld>
+</file>
+
+<file path=ppt/slides/slide3.xml><?xml version="1.0" encoding="utf-8"?>
+<p:sld xmlns:a="http://schemas.openxmlformats.org/drawingml/2006/main" xmlns:r="http://schemas.openxmlformats.org/officeDocument/2006/relationships" xmlns:p="http://schemas.openxmlformats.org/presentationml/2006/main">
+  <p:cSld>
+    <p:spTree>
+      <p:nvGrpSpPr>
+        <p:cNvPr id="1" name="">
+          <a:extLst>
+            <a:ext uri="{FF2B5EF4-FFF2-40B4-BE49-F238E27FC236}">
+              <a16:creationId xmlns:a16="http://schemas.microsoft.com/office/drawing/2014/main" id="{3240C4FE-272E-837C-3D07-3756B9CBBD65}"/>
+            </a:ext>
+          </a:extLst>
+        </p:cNvPr>
+        <p:cNvGrpSpPr/>
+        <p:nvPr/>
+      </p:nvGrpSpPr>
+      <p:grpSpPr>
+        <a:xfrm>
+          <a:off x="0" y="0"/>
+          <a:ext cx="0" cy="0"/>
+          <a:chOff x="0" y="0"/>
+          <a:chExt cx="0" cy="0"/>
+        </a:xfrm>
+      </p:grpSpPr>
+      <p:sp>
+        <p:nvSpPr>
+          <p:cNvPr id="4" name="Rectangle 3">
+            <a:extLst>
+              <a:ext uri="{FF2B5EF4-FFF2-40B4-BE49-F238E27FC236}">
+                <a16:creationId xmlns:a16="http://schemas.microsoft.com/office/drawing/2014/main" id="{9A40907C-ACA7-0A2B-6631-6E7D5E2F3111}"/>
+              </a:ext>
+            </a:extLst>
+          </p:cNvPr>
+          <p:cNvSpPr/>
+          <p:nvPr/>
+        </p:nvSpPr>
+        <p:spPr>
+          <a:xfrm>
+            <a:off x="4844716" y="3388895"/>
+            <a:ext cx="4219073" cy="3474793"/>
+          </a:xfrm>
+          <a:prstGeom prst="rect">
+            <a:avLst/>
+          </a:prstGeom>
+          <a:solidFill>
+            <a:srgbClr val="FDFAF6"/>
+          </a:solidFill>
+          <a:ln>
+            <a:noFill/>
+          </a:ln>
+        </p:spPr>
+        <p:style>
+          <a:lnRef idx="2">
+            <a:schemeClr val="accent1">
+              <a:shade val="15000"/>
+            </a:schemeClr>
+          </a:lnRef>
+          <a:fillRef idx="1">
+            <a:schemeClr val="accent1"/>
+          </a:fillRef>
+          <a:effectRef idx="0">
+            <a:schemeClr val="accent1"/>
+          </a:effectRef>
+          <a:fontRef idx="minor">
+            <a:schemeClr val="lt1"/>
+          </a:fontRef>
+        </p:style>
+        <p:txBody>
+          <a:bodyPr rtlCol="0" anchor="ctr"/>
+          <a:lstStyle/>
+          <a:p>
+            <a:pPr algn="ctr"/>
+            <a:endParaRPr lang="fr-FR"/>
+          </a:p>
+        </p:txBody>
+      </p:sp>
+      <p:sp>
+        <p:nvSpPr>
+          <p:cNvPr id="2" name="Titre 1">
+            <a:extLst>
+              <a:ext uri="{FF2B5EF4-FFF2-40B4-BE49-F238E27FC236}">
+                <a16:creationId xmlns:a16="http://schemas.microsoft.com/office/drawing/2014/main" id="{76557C9A-2890-D2FC-4EA8-113C1F76429D}"/>
+              </a:ext>
+            </a:extLst>
+          </p:cNvPr>
+          <p:cNvSpPr>
+            <a:spLocks noGrp="1"/>
+          </p:cNvSpPr>
+          <p:nvPr>
+            <p:ph type="title"/>
+          </p:nvPr>
+        </p:nvSpPr>
+        <p:spPr>
+          <a:xfrm>
+            <a:off x="2597150" y="235876"/>
+            <a:ext cx="6997700" cy="848396"/>
+          </a:xfrm>
+        </p:spPr>
+        <p:txBody>
+          <a:bodyPr rtlCol="0"/>
+          <a:lstStyle>
+            <a:defPPr>
+              <a:defRPr lang="fr-FR"/>
+            </a:defPPr>
+          </a:lstStyle>
+          <a:p>
+            <a:pPr algn="ctr" rtl="0"/>
+            <a:r>
+              <a:rPr lang="fr-FR" dirty="0"/>
+              <a:t>Système d’équations</a:t>
+            </a:r>
+          </a:p>
+        </p:txBody>
+      </p:sp>
+      <mc:AlternateContent xmlns:mc="http://schemas.openxmlformats.org/markup-compatibility/2006">
+        <mc:Choice xmlns:a14="http://schemas.microsoft.com/office/drawing/2010/main" Requires="a14">
+          <p:sp>
+            <p:nvSpPr>
+              <p:cNvPr id="11" name="Espace réservé du texte 2">
+                <a:extLst>
+                  <a:ext uri="{FF2B5EF4-FFF2-40B4-BE49-F238E27FC236}">
+                    <a16:creationId xmlns:a16="http://schemas.microsoft.com/office/drawing/2014/main" id="{F2BCD148-3B17-9BCE-231C-7AADD3F512A2}"/>
+                  </a:ext>
+                </a:extLst>
+              </p:cNvPr>
+              <p:cNvSpPr txBox="1">
+                <a:spLocks/>
+              </p:cNvSpPr>
+              <p:nvPr/>
+            </p:nvSpPr>
+            <p:spPr>
+              <a:xfrm>
+                <a:off x="1027293" y="1640721"/>
+                <a:ext cx="8293170" cy="848396"/>
+              </a:xfrm>
+              <a:prstGeom prst="rect">
+                <a:avLst/>
+              </a:prstGeom>
+            </p:spPr>
+            <p:txBody>
+              <a:bodyPr vert="horz" lIns="91440" tIns="0" rIns="91440" bIns="0" rtlCol="0">
+                <a:normAutofit/>
+              </a:bodyPr>
+              <a:lstStyle>
+                <a:defPPr>
+                  <a:defRPr lang="fr-FR"/>
+                </a:defPPr>
+                <a:lvl1pPr marL="0" indent="0" algn="l" defTabSz="914400" rtl="0" eaLnBrk="1" latinLnBrk="0" hangingPunct="1">
+                  <a:lnSpc>
+                    <a:spcPct val="100000"/>
+                  </a:lnSpc>
+                  <a:spcBef>
+                    <a:spcPts val="0"/>
+                  </a:spcBef>
+                  <a:buFont typeface="Arial" panose="020B0604020202020204" pitchFamily="34" charset="0"/>
+                  <a:buNone/>
+                  <a:defRPr lang="fr-FR" sz="2400" kern="1200">
+                    <a:solidFill>
+                      <a:schemeClr val="accent6"/>
+                    </a:solidFill>
+                    <a:latin typeface="+mn-lt"/>
+                    <a:ea typeface="+mn-ea"/>
+                    <a:cs typeface="+mn-cs"/>
+                  </a:defRPr>
+                </a:lvl1pPr>
+                <a:lvl2pPr marL="347472" indent="-347472" algn="l" defTabSz="914400" rtl="0" eaLnBrk="1" latinLnBrk="0" hangingPunct="1">
+                  <a:lnSpc>
+                    <a:spcPct val="100000"/>
+                  </a:lnSpc>
+                  <a:spcBef>
+                    <a:spcPts val="0"/>
+                  </a:spcBef>
+                  <a:buFont typeface="Arial" panose="020B0604020202020204" pitchFamily="34" charset="0"/>
+                  <a:buChar char="•"/>
+                  <a:defRPr lang="fr-FR" sz="2400" kern="1200">
+                    <a:solidFill>
+                      <a:schemeClr val="accent6"/>
+                    </a:solidFill>
+                    <a:latin typeface="+mn-lt"/>
+                    <a:ea typeface="+mn-ea"/>
+                    <a:cs typeface="+mn-cs"/>
+                  </a:defRPr>
+                </a:lvl2pPr>
+                <a:lvl3pPr marL="685800" indent="-347472" algn="l" defTabSz="914400" rtl="0" eaLnBrk="1" latinLnBrk="0" hangingPunct="1">
+                  <a:lnSpc>
+                    <a:spcPct val="100000"/>
+                  </a:lnSpc>
+                  <a:spcBef>
+                    <a:spcPts val="0"/>
+                  </a:spcBef>
+                  <a:buFont typeface="Arial" panose="020B0604020202020204" pitchFamily="34" charset="0"/>
+                  <a:buChar char="•"/>
+                  <a:defRPr lang="fr-FR" sz="2400" kern="1200">
+                    <a:solidFill>
+                      <a:schemeClr val="accent6"/>
+                    </a:solidFill>
+                    <a:latin typeface="+mn-lt"/>
+                    <a:ea typeface="+mn-ea"/>
+                    <a:cs typeface="+mn-cs"/>
+                  </a:defRPr>
+                </a:lvl3pPr>
+                <a:lvl4pPr marL="1600200" indent="-347472" algn="l" defTabSz="914400" rtl="0" eaLnBrk="1" latinLnBrk="0" hangingPunct="1">
+                  <a:lnSpc>
+                    <a:spcPct val="100000"/>
+                  </a:lnSpc>
+                  <a:spcBef>
+                    <a:spcPts val="360"/>
+                  </a:spcBef>
+                  <a:buFont typeface="Arial" panose="020B0604020202020204" pitchFamily="34" charset="0"/>
+                  <a:buChar char="•"/>
+                  <a:defRPr lang="fr-FR" sz="1800" kern="1200">
+                    <a:solidFill>
+                      <a:schemeClr val="accent6"/>
+                    </a:solidFill>
+                    <a:latin typeface="+mn-lt"/>
+                    <a:ea typeface="+mn-ea"/>
+                    <a:cs typeface="+mn-cs"/>
+                  </a:defRPr>
+                </a:lvl4pPr>
+                <a:lvl5pPr marL="2057400" indent="-347472" algn="l" defTabSz="914400" rtl="0" eaLnBrk="1" latinLnBrk="0" hangingPunct="1">
+                  <a:lnSpc>
+                    <a:spcPct val="100000"/>
+                  </a:lnSpc>
+                  <a:spcBef>
+                    <a:spcPts val="360"/>
+                  </a:spcBef>
+                  <a:buFont typeface="Arial" panose="020B0604020202020204" pitchFamily="34" charset="0"/>
+                  <a:buChar char="•"/>
+                  <a:defRPr lang="fr-FR" sz="1800" kern="1200">
+                    <a:solidFill>
+                      <a:schemeClr val="accent6"/>
+                    </a:solidFill>
+                    <a:latin typeface="+mn-lt"/>
+                    <a:ea typeface="+mn-ea"/>
+                    <a:cs typeface="+mn-cs"/>
+                  </a:defRPr>
+                </a:lvl5pPr>
+                <a:lvl6pPr marL="2514600" indent="-228600" algn="l" defTabSz="914400" rtl="0" eaLnBrk="1" latinLnBrk="0" hangingPunct="1">
+                  <a:lnSpc>
+                    <a:spcPct val="90000"/>
+                  </a:lnSpc>
+                  <a:spcBef>
+                    <a:spcPts val="500"/>
+                  </a:spcBef>
+                  <a:buFont typeface="Arial" panose="020B0604020202020204" pitchFamily="34" charset="0"/>
+                  <a:buChar char="•"/>
+                  <a:defRPr lang="fr-FR" sz="1800" kern="1200">
+                    <a:solidFill>
+                      <a:schemeClr val="tx1"/>
+                    </a:solidFill>
+                    <a:latin typeface="+mn-lt"/>
+                    <a:ea typeface="+mn-ea"/>
+                    <a:cs typeface="+mn-cs"/>
+                  </a:defRPr>
+                </a:lvl6pPr>
+                <a:lvl7pPr marL="2971800" indent="-228600" algn="l" defTabSz="914400" rtl="0" eaLnBrk="1" latinLnBrk="0" hangingPunct="1">
+                  <a:lnSpc>
+                    <a:spcPct val="90000"/>
+                  </a:lnSpc>
+                  <a:spcBef>
+                    <a:spcPts val="500"/>
+                  </a:spcBef>
+                  <a:buFont typeface="Arial" panose="020B0604020202020204" pitchFamily="34" charset="0"/>
+                  <a:buChar char="•"/>
+                  <a:defRPr lang="fr-FR" sz="1800" kern="1200">
+                    <a:solidFill>
+                      <a:schemeClr val="tx1"/>
+                    </a:solidFill>
+                    <a:latin typeface="+mn-lt"/>
+                    <a:ea typeface="+mn-ea"/>
+                    <a:cs typeface="+mn-cs"/>
+                  </a:defRPr>
+                </a:lvl7pPr>
+                <a:lvl8pPr marL="3429000" indent="-228600" algn="l" defTabSz="914400" rtl="0" eaLnBrk="1" latinLnBrk="0" hangingPunct="1">
+                  <a:lnSpc>
+                    <a:spcPct val="90000"/>
+                  </a:lnSpc>
+                  <a:spcBef>
+                    <a:spcPts val="500"/>
+                  </a:spcBef>
+                  <a:buFont typeface="Arial" panose="020B0604020202020204" pitchFamily="34" charset="0"/>
+                  <a:buChar char="•"/>
+                  <a:defRPr lang="fr-FR" sz="1800" kern="1200">
+                    <a:solidFill>
+                      <a:schemeClr val="tx1"/>
+                    </a:solidFill>
+                    <a:latin typeface="+mn-lt"/>
+                    <a:ea typeface="+mn-ea"/>
+                    <a:cs typeface="+mn-cs"/>
+                  </a:defRPr>
+                </a:lvl8pPr>
+                <a:lvl9pPr marL="3886200" indent="-228600" algn="l" defTabSz="914400" rtl="0" eaLnBrk="1" latinLnBrk="0" hangingPunct="1">
+                  <a:lnSpc>
+                    <a:spcPct val="90000"/>
+                  </a:lnSpc>
+                  <a:spcBef>
+                    <a:spcPts val="500"/>
+                  </a:spcBef>
+                  <a:buFont typeface="Arial" panose="020B0604020202020204" pitchFamily="34" charset="0"/>
+                  <a:buChar char="•"/>
+                  <a:defRPr lang="fr-FR" sz="1800" kern="1200">
+                    <a:solidFill>
+                      <a:schemeClr val="tx1"/>
+                    </a:solidFill>
+                    <a:latin typeface="+mn-lt"/>
+                    <a:ea typeface="+mn-ea"/>
+                    <a:cs typeface="+mn-cs"/>
+                  </a:defRPr>
+                </a:lvl9pPr>
+              </a:lstStyle>
+              <a:p>
+                <a:r>
+                  <a:rPr lang="fr-FR" b="1" dirty="0"/>
+                  <a:t>Conservation de la masse :  </a:t>
+                </a:r>
+                <a14:m>
+                  <m:oMath xmlns:m="http://schemas.openxmlformats.org/officeDocument/2006/math">
+                    <m:r>
+                      <a:rPr lang="fr-FR" b="0" i="1" smtClean="0">
+                        <a:latin typeface="Cambria Math" panose="02040503050406030204" pitchFamily="18" charset="0"/>
+                        <a:ea typeface="Cambria Math" panose="02040503050406030204" pitchFamily="18" charset="0"/>
+                      </a:rPr>
+                      <m:t>𝜋</m:t>
+                    </m:r>
+                    <m:sSup>
+                      <m:sSupPr>
+                        <m:ctrlPr>
+                          <a:rPr lang="fr-FR" b="0" i="1" smtClean="0">
+                            <a:latin typeface="Cambria Math" panose="02040503050406030204" pitchFamily="18" charset="0"/>
+                            <a:ea typeface="Cambria Math" panose="02040503050406030204" pitchFamily="18" charset="0"/>
+                          </a:rPr>
+                        </m:ctrlPr>
+                      </m:sSupPr>
+                      <m:e>
+                        <m:r>
+                          <a:rPr lang="fr-FR" b="0" i="1" smtClean="0">
+                            <a:latin typeface="Cambria Math" panose="02040503050406030204" pitchFamily="18" charset="0"/>
+                            <a:ea typeface="Cambria Math" panose="02040503050406030204" pitchFamily="18" charset="0"/>
+                          </a:rPr>
+                          <m:t>𝑟</m:t>
+                        </m:r>
+                      </m:e>
+                      <m:sup>
+                        <m:r>
+                          <a:rPr lang="fr-FR" b="0" i="1" smtClean="0">
+                            <a:latin typeface="Cambria Math" panose="02040503050406030204" pitchFamily="18" charset="0"/>
+                            <a:ea typeface="Cambria Math" panose="02040503050406030204" pitchFamily="18" charset="0"/>
+                          </a:rPr>
+                          <m:t>2</m:t>
+                        </m:r>
+                      </m:sup>
+                    </m:sSup>
+                    <m:r>
+                      <a:rPr lang="fr-FR" i="1">
+                        <a:latin typeface="Cambria Math" panose="02040503050406030204" pitchFamily="18" charset="0"/>
+                        <a:ea typeface="Cambria Math" panose="02040503050406030204" pitchFamily="18" charset="0"/>
+                      </a:rPr>
+                      <m:t>h</m:t>
+                    </m:r>
+                    <m:r>
+                      <a:rPr lang="fr-FR" i="1">
+                        <a:latin typeface="Cambria Math" panose="02040503050406030204" pitchFamily="18" charset="0"/>
+                        <a:ea typeface="Cambria Math" panose="02040503050406030204" pitchFamily="18" charset="0"/>
+                      </a:rPr>
+                      <m:t>=</m:t>
+                    </m:r>
+                    <m:r>
+                      <a:rPr lang="fr-FR" i="1">
+                        <a:latin typeface="Cambria Math" panose="02040503050406030204" pitchFamily="18" charset="0"/>
+                        <a:ea typeface="Cambria Math" panose="02040503050406030204" pitchFamily="18" charset="0"/>
+                      </a:rPr>
+                      <m:t>𝜋</m:t>
+                    </m:r>
+                    <m:sSubSup>
+                      <m:sSubSupPr>
+                        <m:ctrlPr>
+                          <a:rPr lang="fr-FR" b="0" i="1" smtClean="0">
+                            <a:latin typeface="Cambria Math" panose="02040503050406030204" pitchFamily="18" charset="0"/>
+                            <a:ea typeface="Cambria Math" panose="02040503050406030204" pitchFamily="18" charset="0"/>
+                          </a:rPr>
+                        </m:ctrlPr>
+                      </m:sSubSupPr>
+                      <m:e>
+                        <m:r>
+                          <a:rPr lang="fr-FR" i="1">
+                            <a:latin typeface="Cambria Math" panose="02040503050406030204" pitchFamily="18" charset="0"/>
+                            <a:ea typeface="Cambria Math" panose="02040503050406030204" pitchFamily="18" charset="0"/>
+                          </a:rPr>
+                          <m:t>𝑟</m:t>
+                        </m:r>
+                      </m:e>
+                      <m:sub>
+                        <m:r>
+                          <a:rPr lang="fr-FR" b="0" i="1" smtClean="0">
+                            <a:latin typeface="Cambria Math" panose="02040503050406030204" pitchFamily="18" charset="0"/>
+                            <a:ea typeface="Cambria Math" panose="02040503050406030204" pitchFamily="18" charset="0"/>
+                          </a:rPr>
+                          <m:t>0</m:t>
+                        </m:r>
+                      </m:sub>
+                      <m:sup>
+                        <m:r>
+                          <a:rPr lang="fr-FR" i="1">
+                            <a:latin typeface="Cambria Math" panose="02040503050406030204" pitchFamily="18" charset="0"/>
+                            <a:ea typeface="Cambria Math" panose="02040503050406030204" pitchFamily="18" charset="0"/>
+                          </a:rPr>
+                          <m:t>2</m:t>
+                        </m:r>
+                      </m:sup>
+                    </m:sSubSup>
+                    <m:sSub>
+                      <m:sSubPr>
+                        <m:ctrlPr>
+                          <a:rPr lang="fr-FR" b="0" i="0" smtClean="0">
+                            <a:latin typeface="Cambria Math" panose="02040503050406030204" pitchFamily="18" charset="0"/>
+                            <a:ea typeface="Cambria Math" panose="02040503050406030204" pitchFamily="18" charset="0"/>
+                          </a:rPr>
+                        </m:ctrlPr>
+                      </m:sSubPr>
+                      <m:e>
+                        <m:r>
+                          <a:rPr lang="fr-FR" i="1">
+                            <a:latin typeface="Cambria Math" panose="02040503050406030204" pitchFamily="18" charset="0"/>
+                            <a:ea typeface="Cambria Math" panose="02040503050406030204" pitchFamily="18" charset="0"/>
+                          </a:rPr>
+                          <m:t>h</m:t>
+                        </m:r>
+                      </m:e>
+                      <m:sub>
+                        <m:r>
+                          <a:rPr lang="fr-FR" b="0" i="0" smtClean="0">
+                            <a:latin typeface="Cambria Math" panose="02040503050406030204" pitchFamily="18" charset="0"/>
+                            <a:ea typeface="Cambria Math" panose="02040503050406030204" pitchFamily="18" charset="0"/>
+                          </a:rPr>
+                          <m:t>0</m:t>
+                        </m:r>
+                      </m:sub>
+                    </m:sSub>
+                  </m:oMath>
+                </a14:m>
+                <a:r>
+                  <a:rPr lang="fr-FR" dirty="0"/>
+                  <a:t> et  </a:t>
+                </a:r>
+                <a14:m>
+                  <m:oMath xmlns:m="http://schemas.openxmlformats.org/officeDocument/2006/math">
+                    <m:f>
+                      <m:fPr>
+                        <m:ctrlPr>
+                          <a:rPr lang="fr-FR" b="0" i="1" smtClean="0">
+                            <a:latin typeface="Cambria Math" panose="02040503050406030204" pitchFamily="18" charset="0"/>
+                          </a:rPr>
+                        </m:ctrlPr>
+                      </m:fPr>
+                      <m:num>
+                        <m:r>
+                          <a:rPr lang="fr-FR" b="0" i="1" smtClean="0">
+                            <a:latin typeface="Cambria Math" panose="02040503050406030204" pitchFamily="18" charset="0"/>
+                          </a:rPr>
+                          <m:t>𝑑𝑟</m:t>
+                        </m:r>
+                      </m:num>
+                      <m:den>
+                        <m:r>
+                          <a:rPr lang="fr-FR" b="0" i="1" smtClean="0">
+                            <a:latin typeface="Cambria Math" panose="02040503050406030204" pitchFamily="18" charset="0"/>
+                          </a:rPr>
+                          <m:t>𝑑𝑡</m:t>
+                        </m:r>
+                      </m:den>
+                    </m:f>
+                    <m:r>
+                      <a:rPr lang="fr-FR" b="0" i="1" smtClean="0">
+                        <a:latin typeface="Cambria Math" panose="02040503050406030204" pitchFamily="18" charset="0"/>
+                      </a:rPr>
+                      <m:t>=</m:t>
+                    </m:r>
+                    <m:r>
+                      <a:rPr lang="fr-FR" b="0" i="1" smtClean="0">
+                        <a:latin typeface="Cambria Math" panose="02040503050406030204" pitchFamily="18" charset="0"/>
+                      </a:rPr>
+                      <m:t>𝑢</m:t>
+                    </m:r>
+                  </m:oMath>
+                </a14:m>
+                <a:endParaRPr lang="ar-AE" dirty="0"/>
+              </a:p>
+            </p:txBody>
+          </p:sp>
+        </mc:Choice>
+        <mc:Fallback>
+          <p:sp>
+            <p:nvSpPr>
+              <p:cNvPr id="11" name="Espace réservé du texte 2">
+                <a:extLst>
+                  <a:ext uri="{FF2B5EF4-FFF2-40B4-BE49-F238E27FC236}">
+                    <a16:creationId xmlns:a16="http://schemas.microsoft.com/office/drawing/2014/main" id="{F2BCD148-3B17-9BCE-231C-7AADD3F512A2}"/>
+                  </a:ext>
+                </a:extLst>
+              </p:cNvPr>
+              <p:cNvSpPr txBox="1">
+                <a:spLocks noRot="1" noChangeAspect="1" noMove="1" noResize="1" noEditPoints="1" noAdjustHandles="1" noChangeArrowheads="1" noChangeShapeType="1" noTextEdit="1"/>
+              </p:cNvSpPr>
+              <p:nvPr/>
+            </p:nvSpPr>
+            <p:spPr>
+              <a:xfrm>
+                <a:off x="1027293" y="1640721"/>
+                <a:ext cx="8293170" cy="848396"/>
+              </a:xfrm>
+              <a:prstGeom prst="rect">
+                <a:avLst/>
+              </a:prstGeom>
+              <a:blipFill>
+                <a:blip r:embed="rId3"/>
+                <a:stretch>
+                  <a:fillRect l="-1176" t="-719"/>
+                </a:stretch>
+              </a:blipFill>
+            </p:spPr>
+            <p:txBody>
+              <a:bodyPr/>
+              <a:lstStyle/>
+              <a:p>
+                <a:r>
+                  <a:rPr lang="fr-FR">
+                    <a:noFill/>
+                  </a:rPr>
+                  <a:t> </a:t>
+                </a:r>
+              </a:p>
+            </p:txBody>
+          </p:sp>
+        </mc:Fallback>
+      </mc:AlternateContent>
+      <mc:AlternateContent xmlns:mc="http://schemas.openxmlformats.org/markup-compatibility/2006">
+        <mc:Choice xmlns:a14="http://schemas.microsoft.com/office/drawing/2010/main" Requires="a14">
+          <p:sp>
+            <p:nvSpPr>
+              <p:cNvPr id="16" name="Espace réservé du texte 2">
+                <a:extLst>
+                  <a:ext uri="{FF2B5EF4-FFF2-40B4-BE49-F238E27FC236}">
+                    <a16:creationId xmlns:a16="http://schemas.microsoft.com/office/drawing/2014/main" id="{EC359F0F-A405-274C-749F-975BAF33709C}"/>
+                  </a:ext>
+                </a:extLst>
+              </p:cNvPr>
+              <p:cNvSpPr txBox="1">
+                <a:spLocks/>
+              </p:cNvSpPr>
+              <p:nvPr/>
+            </p:nvSpPr>
+            <p:spPr>
+              <a:xfrm>
+                <a:off x="1540043" y="3383723"/>
+                <a:ext cx="9095873" cy="1234394"/>
+              </a:xfrm>
+              <a:prstGeom prst="rect">
+                <a:avLst/>
+              </a:prstGeom>
+              <a:noFill/>
+              <a:ln w="76200">
+                <a:noFill/>
               </a:ln>
             </p:spPr>
             <p:txBody>
@@ -18608,214 +20193,19 @@
               </a:lstStyle>
               <a:p>
                 <a:pPr/>
-                <a:endParaRPr lang="fr-FR" sz="1600" i="1" dirty="0">
-                  <a:latin typeface="Cambria Math" panose="02040503050406030204" pitchFamily="18" charset="0"/>
-                </a:endParaRPr>
-              </a:p>
-              <a:p>
-                <a:pPr/>
-                <a14:m>
-                  <m:oMathPara xmlns:m="http://schemas.openxmlformats.org/officeDocument/2006/math">
-                    <m:oMathParaPr>
-                      <m:jc m:val="centerGroup"/>
-                    </m:oMathParaPr>
-                    <m:oMath xmlns:m="http://schemas.openxmlformats.org/officeDocument/2006/math">
-                      <m:sSub>
-                        <m:sSubPr>
-                          <m:ctrlPr>
-                            <a:rPr lang="fr-FR" sz="2600" b="0" i="1" smtClean="0">
-                              <a:latin typeface="Cambria Math" panose="02040503050406030204" pitchFamily="18" charset="0"/>
-                            </a:rPr>
-                          </m:ctrlPr>
-                        </m:sSubPr>
-                        <m:e>
-                          <m:r>
-                            <a:rPr lang="fr-FR" sz="2600" i="1">
-                              <a:latin typeface="Cambria Math" panose="02040503050406030204" pitchFamily="18" charset="0"/>
-                            </a:rPr>
-                            <m:t>𝜏</m:t>
-                          </m:r>
-                        </m:e>
-                        <m:sub>
-                          <m:r>
-                            <a:rPr lang="fr-FR" sz="2600" b="0" i="1" smtClean="0">
-                              <a:latin typeface="Cambria Math" panose="02040503050406030204" pitchFamily="18" charset="0"/>
-                            </a:rPr>
-                            <m:t>𝑚𝑎𝑡</m:t>
-                          </m:r>
-                          <m:r>
-                            <a:rPr lang="fr-FR" sz="2600" b="0" i="1" smtClean="0">
-                              <a:latin typeface="Cambria Math" panose="02040503050406030204" pitchFamily="18" charset="0"/>
-                            </a:rPr>
-                            <m:t>é</m:t>
-                          </m:r>
-                          <m:r>
-                            <a:rPr lang="fr-FR" sz="2600" b="0" i="1" smtClean="0">
-                              <a:latin typeface="Cambria Math" panose="02040503050406030204" pitchFamily="18" charset="0"/>
-                            </a:rPr>
-                            <m:t>𝑟𝑖𝑎𝑢</m:t>
-                          </m:r>
-                        </m:sub>
-                      </m:sSub>
-                      <m:r>
-                        <a:rPr lang="fr-FR" sz="2600" i="1">
-                          <a:latin typeface="Cambria Math" panose="02040503050406030204" pitchFamily="18" charset="0"/>
-                        </a:rPr>
-                        <m:t>=</m:t>
-                      </m:r>
-                      <m:r>
-                        <a:rPr lang="fr-FR" sz="2600" i="1">
-                          <a:latin typeface="Cambria Math" panose="02040503050406030204" pitchFamily="18" charset="0"/>
-                        </a:rPr>
-                        <m:t>𝐺</m:t>
-                      </m:r>
-                      <m:r>
-                        <a:rPr lang="ar-AE" sz="2600" i="1">
-                          <a:latin typeface="Cambria Math" panose="02040503050406030204" pitchFamily="18" charset="0"/>
-                        </a:rPr>
-                        <m:t>𝛾</m:t>
-                      </m:r>
-                      <m:r>
-                        <a:rPr lang="fr-FR" sz="2600" b="0" i="1" smtClean="0">
-                          <a:latin typeface="Cambria Math" panose="02040503050406030204" pitchFamily="18" charset="0"/>
-                        </a:rPr>
-                        <m:t>+</m:t>
-                      </m:r>
-                      <m:r>
-                        <a:rPr lang="fr-FR" sz="2600" i="1">
-                          <a:latin typeface="Cambria Math" panose="02040503050406030204" pitchFamily="18" charset="0"/>
-                        </a:rPr>
-                        <m:t>𝑘</m:t>
-                      </m:r>
-                      <m:sSup>
-                        <m:sSupPr>
-                          <m:ctrlPr>
-                            <a:rPr lang="fr-FR" sz="2600" i="1">
-                              <a:latin typeface="Cambria Math" panose="02040503050406030204" pitchFamily="18" charset="0"/>
-                            </a:rPr>
-                          </m:ctrlPr>
-                        </m:sSupPr>
-                        <m:e>
-                          <m:acc>
-                            <m:accPr>
-                              <m:chr m:val="̇"/>
-                              <m:ctrlPr>
-                                <a:rPr lang="fr-FR" sz="2600" i="1">
-                                  <a:latin typeface="Cambria Math" panose="02040503050406030204" pitchFamily="18" charset="0"/>
-                                </a:rPr>
-                              </m:ctrlPr>
-                            </m:accPr>
-                            <m:e>
-                              <m:r>
-                                <a:rPr lang="fr-FR" sz="2600" i="1">
-                                  <a:latin typeface="Cambria Math" panose="02040503050406030204" pitchFamily="18" charset="0"/>
-                                </a:rPr>
-                                <m:t>𝛾</m:t>
-                              </m:r>
-                            </m:e>
-                          </m:acc>
-                        </m:e>
-                        <m:sup>
-                          <m:r>
-                            <a:rPr lang="fr-FR" sz="2600" i="1">
-                              <a:latin typeface="Cambria Math" panose="02040503050406030204" pitchFamily="18" charset="0"/>
-                            </a:rPr>
-                            <m:t>𝑚</m:t>
-                          </m:r>
-                        </m:sup>
-                      </m:sSup>
-                      <m:r>
-                        <a:rPr lang="fr-FR" sz="2600" dirty="0">
-                          <a:latin typeface="Cambria Math" panose="02040503050406030204" pitchFamily="18" charset="0"/>
-                        </a:rPr>
-                        <m:t>+</m:t>
-                      </m:r>
-                      <m:sSub>
-                        <m:sSubPr>
-                          <m:ctrlPr>
-                            <a:rPr lang="fr-FR" sz="2600" i="1" dirty="0">
-                              <a:latin typeface="Cambria Math" panose="02040503050406030204" pitchFamily="18" charset="0"/>
-                            </a:rPr>
-                          </m:ctrlPr>
-                        </m:sSubPr>
-                        <m:e>
-                          <m:r>
-                            <a:rPr lang="fr-FR" sz="2600" i="1" dirty="0">
-                              <a:latin typeface="Cambria Math" panose="02040503050406030204" pitchFamily="18" charset="0"/>
-                            </a:rPr>
-                            <m:t>𝜏</m:t>
-                          </m:r>
-                        </m:e>
-                        <m:sub>
-                          <m:r>
-                            <a:rPr lang="fr-FR" sz="2600" dirty="0">
-                              <a:latin typeface="Cambria Math" panose="02040503050406030204" pitchFamily="18" charset="0"/>
-                            </a:rPr>
-                            <m:t>0</m:t>
-                          </m:r>
-                        </m:sub>
-                      </m:sSub>
-                      <m:r>
-                        <a:rPr lang="fr-FR" sz="2600" i="1" dirty="0">
-                          <a:latin typeface="Cambria Math" panose="02040503050406030204" pitchFamily="18" charset="0"/>
-                        </a:rPr>
-                        <m:t> </m:t>
-                      </m:r>
-                      <m:r>
-                        <a:rPr lang="fr-FR" sz="2600" i="1" dirty="0">
-                          <a:latin typeface="Cambria Math" panose="02040503050406030204" pitchFamily="18" charset="0"/>
-                        </a:rPr>
-                        <m:t>𝑠𝑖</m:t>
-                      </m:r>
-                      <m:r>
-                        <a:rPr lang="fr-FR" sz="2600" i="1" dirty="0">
-                          <a:latin typeface="Cambria Math" panose="02040503050406030204" pitchFamily="18" charset="0"/>
-                        </a:rPr>
-                        <m:t> </m:t>
-                      </m:r>
-                      <m:r>
-                        <a:rPr lang="fr-FR" sz="2600" i="1">
-                          <a:latin typeface="Cambria Math" panose="02040503050406030204" pitchFamily="18" charset="0"/>
-                        </a:rPr>
-                        <m:t>𝜏</m:t>
-                      </m:r>
-                      <m:r>
-                        <a:rPr lang="fr-FR" sz="2600" i="1">
-                          <a:latin typeface="Cambria Math" panose="02040503050406030204" pitchFamily="18" charset="0"/>
-                        </a:rPr>
-                        <m:t>≥</m:t>
-                      </m:r>
-                      <m:sSub>
-                        <m:sSubPr>
-                          <m:ctrlPr>
-                            <a:rPr lang="fr-FR" sz="2600" i="1">
-                              <a:latin typeface="Cambria Math" panose="02040503050406030204" pitchFamily="18" charset="0"/>
-                            </a:rPr>
-                          </m:ctrlPr>
-                        </m:sSubPr>
-                        <m:e>
-                          <m:r>
-                            <a:rPr lang="fr-FR" sz="2600" i="1">
-                              <a:latin typeface="Cambria Math" panose="02040503050406030204" pitchFamily="18" charset="0"/>
-                            </a:rPr>
-                            <m:t>𝜏</m:t>
-                          </m:r>
-                        </m:e>
-                        <m:sub>
-                          <m:r>
-                            <a:rPr lang="fr-FR" sz="2600" i="1">
-                              <a:latin typeface="Cambria Math" panose="02040503050406030204" pitchFamily="18" charset="0"/>
-                            </a:rPr>
-                            <m:t>0</m:t>
-                          </m:r>
-                        </m:sub>
-                      </m:sSub>
-                    </m:oMath>
-                  </m:oMathPara>
-                </a14:m>
-                <a:endParaRPr lang="fr-FR" sz="2600" i="1" dirty="0">
-                  <a:latin typeface="Cambria Math" panose="02040503050406030204" pitchFamily="18" charset="0"/>
-                </a:endParaRPr>
+                <a:r>
+                  <a:rPr lang="fr-FR" dirty="0"/>
+                  <a:t>Avec la </a:t>
+                </a:r>
+                <a:r>
+                  <a:rPr lang="fr-FR" b="1" dirty="0"/>
+                  <a:t>contrainte totale </a:t>
+                </a:r>
+                <a:r>
+                  <a:rPr lang="fr-FR" dirty="0"/>
+                  <a:t>:</a:t>
+                </a:r>
+                <a:endParaRPr lang="fr-FR" b="0" i="0" dirty="0"/>
               </a:p>
               <a:p>
                 <a:pPr/>
@@ -18826,57 +20216,403 @@
                     </m:oMathParaPr>
                     <m:oMath xmlns:m="http://schemas.openxmlformats.org/officeDocument/2006/math">
                       <m:r>
-                        <a:rPr lang="fr-FR" sz="2600" i="1">
+                        <a:rPr lang="fr-FR" b="0" i="0" smtClean="0">
                           <a:latin typeface="Cambria Math" panose="02040503050406030204" pitchFamily="18" charset="0"/>
                         </a:rPr>
-                        <m:t>𝑠𝑖𝑛𝑜𝑛</m:t>
+                        <m:t> </m:t>
                       </m:r>
-                      <m:acc>
-                        <m:accPr>
-                          <m:chr m:val="̇"/>
+                      <m:sSub>
+                        <m:sSubPr>
                           <m:ctrlPr>
-                            <a:rPr lang="fr-FR" sz="2600" i="1">
+                            <a:rPr lang="fr-FR" b="0" i="1" smtClean="0">
                               <a:latin typeface="Cambria Math" panose="02040503050406030204" pitchFamily="18" charset="0"/>
                             </a:rPr>
                           </m:ctrlPr>
-                        </m:accPr>
+                        </m:sSubPr>
                         <m:e>
                           <m:r>
-                            <a:rPr lang="fr-FR" sz="2600" i="1">
+                            <a:rPr lang="fr-FR" i="1">
                               <a:latin typeface="Cambria Math" panose="02040503050406030204" pitchFamily="18" charset="0"/>
                             </a:rPr>
-                            <m:t> </m:t>
+                            <m:t>𝜏</m:t>
                           </m:r>
+                        </m:e>
+                        <m:sub>
                           <m:r>
-                            <a:rPr lang="fr-FR" sz="2600" i="1">
+                            <a:rPr lang="fr-FR" b="0" i="1" smtClean="0">
                               <a:latin typeface="Cambria Math" panose="02040503050406030204" pitchFamily="18" charset="0"/>
                             </a:rPr>
-                            <m:t>𝛾</m:t>
+                            <m:t>𝑡𝑜𝑡𝑎𝑙</m:t>
                           </m:r>
-                          <m:r>
-                            <a:rPr lang="fr-FR" sz="2600" i="1">
+                        </m:sub>
+                      </m:sSub>
+                      <m:r>
+                        <a:rPr lang="fr-FR" i="1">
+                          <a:latin typeface="Cambria Math" panose="02040503050406030204" pitchFamily="18" charset="0"/>
+                        </a:rPr>
+                        <m:t>=</m:t>
+                      </m:r>
+                      <m:r>
+                        <a:rPr lang="fr-FR" b="0" i="1" smtClean="0">
+                          <a:latin typeface="Cambria Math" panose="02040503050406030204" pitchFamily="18" charset="0"/>
+                        </a:rPr>
+                        <m:t>−</m:t>
+                      </m:r>
+                      <m:f>
+                        <m:fPr>
+                          <m:ctrlPr>
+                            <a:rPr lang="fr-FR" b="0" i="1" smtClean="0">
                               <a:latin typeface="Cambria Math" panose="02040503050406030204" pitchFamily="18" charset="0"/>
                             </a:rPr>
-                            <m:t>=</m:t>
+                          </m:ctrlPr>
+                        </m:fPr>
+                        <m:num>
+                          <m:r>
+                            <a:rPr lang="fr-FR" b="0" i="1" smtClean="0">
+                              <a:latin typeface="Cambria Math" panose="02040503050406030204" pitchFamily="18" charset="0"/>
+                            </a:rPr>
+                            <m:t>𝑀𝑔</m:t>
                           </m:r>
+                        </m:num>
+                        <m:den>
                           <m:r>
-                            <a:rPr lang="fr-FR" sz="2600" i="1">
+                            <a:rPr lang="fr-FR" b="0" i="1" smtClean="0">
+                              <a:latin typeface="Cambria Math" panose="02040503050406030204" pitchFamily="18" charset="0"/>
+                              <a:ea typeface="Cambria Math" panose="02040503050406030204" pitchFamily="18" charset="0"/>
+                            </a:rPr>
+                            <m:t>𝜋</m:t>
+                          </m:r>
+                          <m:sSup>
+                            <m:sSupPr>
+                              <m:ctrlPr>
+                                <a:rPr lang="fr-FR" b="0" i="1" smtClean="0">
+                                  <a:latin typeface="Cambria Math" panose="02040503050406030204" pitchFamily="18" charset="0"/>
+                                </a:rPr>
+                              </m:ctrlPr>
+                            </m:sSupPr>
+                            <m:e>
+                              <m:r>
+                                <a:rPr lang="fr-FR" b="0" i="1" smtClean="0">
+                                  <a:latin typeface="Cambria Math" panose="02040503050406030204" pitchFamily="18" charset="0"/>
+                                </a:rPr>
+                                <m:t>𝑟</m:t>
+                              </m:r>
+                            </m:e>
+                            <m:sup>
+                              <m:r>
+                                <a:rPr lang="fr-FR" b="0" i="1" smtClean="0">
+                                  <a:latin typeface="Cambria Math" panose="02040503050406030204" pitchFamily="18" charset="0"/>
+                                </a:rPr>
+                                <m:t>2</m:t>
+                              </m:r>
+                            </m:sup>
+                          </m:sSup>
+                        </m:den>
+                      </m:f>
+                      <m:r>
+                        <a:rPr lang="fr-FR" b="0" i="1" smtClean="0">
+                          <a:latin typeface="Cambria Math" panose="02040503050406030204" pitchFamily="18" charset="0"/>
+                        </a:rPr>
+                        <m:t>−</m:t>
+                      </m:r>
+                      <m:r>
+                        <a:rPr lang="fr-FR" b="0" i="1" smtClean="0">
+                          <a:latin typeface="Cambria Math" panose="02040503050406030204" pitchFamily="18" charset="0"/>
+                          <a:ea typeface="Cambria Math" panose="02040503050406030204" pitchFamily="18" charset="0"/>
+                        </a:rPr>
+                        <m:t>𝜌</m:t>
+                      </m:r>
+                      <m:r>
+                        <a:rPr lang="fr-FR" b="0" i="1" smtClean="0">
+                          <a:latin typeface="Cambria Math" panose="02040503050406030204" pitchFamily="18" charset="0"/>
+                          <a:ea typeface="Cambria Math" panose="02040503050406030204" pitchFamily="18" charset="0"/>
+                        </a:rPr>
+                        <m:t>𝑔</m:t>
+                      </m:r>
+                      <m:r>
+                        <a:rPr lang="fr-FR" b="0" i="1" smtClean="0">
+                          <a:latin typeface="Cambria Math" panose="02040503050406030204" pitchFamily="18" charset="0"/>
+                          <a:ea typeface="Cambria Math" panose="02040503050406030204" pitchFamily="18" charset="0"/>
+                        </a:rPr>
+                        <m:t>h</m:t>
+                      </m:r>
+                      <m:r>
+                        <a:rPr lang="fr-FR" b="0" i="1" smtClean="0">
+                          <a:latin typeface="Cambria Math" panose="02040503050406030204" pitchFamily="18" charset="0"/>
+                          <a:ea typeface="Cambria Math" panose="02040503050406030204" pitchFamily="18" charset="0"/>
+                        </a:rPr>
+                        <m:t>−</m:t>
+                      </m:r>
+                      <m:f>
+                        <m:fPr>
+                          <m:ctrlPr>
+                            <a:rPr lang="fr-FR" b="0" i="1" smtClean="0">
+                              <a:latin typeface="Cambria Math" panose="02040503050406030204" pitchFamily="18" charset="0"/>
+                              <a:ea typeface="Cambria Math" panose="02040503050406030204" pitchFamily="18" charset="0"/>
+                            </a:rPr>
+                          </m:ctrlPr>
+                        </m:fPr>
+                        <m:num>
+                          <m:r>
+                            <a:rPr lang="fr-FR" b="0" i="1" smtClean="0">
+                              <a:latin typeface="Cambria Math" panose="02040503050406030204" pitchFamily="18" charset="0"/>
+                              <a:ea typeface="Cambria Math" panose="02040503050406030204" pitchFamily="18" charset="0"/>
+                            </a:rPr>
+                            <m:t>𝜎</m:t>
+                          </m:r>
+                        </m:num>
+                        <m:den>
+                          <m:sSub>
+                            <m:sSubPr>
+                              <m:ctrlPr>
+                                <a:rPr lang="fr-FR" i="1">
+                                  <a:latin typeface="Cambria Math" panose="02040503050406030204" pitchFamily="18" charset="0"/>
+                                  <a:ea typeface="Cambria Math" panose="02040503050406030204" pitchFamily="18" charset="0"/>
+                                </a:rPr>
+                              </m:ctrlPr>
+                            </m:sSubPr>
+                            <m:e>
+                              <m:r>
+                                <a:rPr lang="fr-FR" i="1">
+                                  <a:latin typeface="Cambria Math" panose="02040503050406030204" pitchFamily="18" charset="0"/>
+                                  <a:ea typeface="Cambria Math" panose="02040503050406030204" pitchFamily="18" charset="0"/>
+                                </a:rPr>
+                                <m:t>𝑟</m:t>
+                              </m:r>
+                            </m:e>
+                            <m:sub>
+                              <m:r>
+                                <a:rPr lang="fr-FR" i="1">
+                                  <a:latin typeface="Cambria Math" panose="02040503050406030204" pitchFamily="18" charset="0"/>
+                                  <a:ea typeface="Cambria Math" panose="02040503050406030204" pitchFamily="18" charset="0"/>
+                                </a:rPr>
+                                <m:t>0</m:t>
+                              </m:r>
+                            </m:sub>
+                          </m:sSub>
+                        </m:den>
+                      </m:f>
+                      <m:r>
+                        <a:rPr lang="fr-FR" b="0" i="1" smtClean="0">
+                          <a:latin typeface="Cambria Math" panose="02040503050406030204" pitchFamily="18" charset="0"/>
+                          <a:ea typeface="Cambria Math" panose="02040503050406030204" pitchFamily="18" charset="0"/>
+                        </a:rPr>
+                        <m:t> (</m:t>
+                      </m:r>
+                      <m:f>
+                        <m:fPr>
+                          <m:ctrlPr>
+                            <a:rPr lang="fr-FR" b="0" i="1" smtClean="0">
+                              <a:latin typeface="Cambria Math" panose="02040503050406030204" pitchFamily="18" charset="0"/>
+                              <a:ea typeface="Cambria Math" panose="02040503050406030204" pitchFamily="18" charset="0"/>
+                            </a:rPr>
+                          </m:ctrlPr>
+                        </m:fPr>
+                        <m:num>
+                          <m:sSub>
+                            <m:sSubPr>
+                              <m:ctrlPr>
+                                <a:rPr lang="fr-FR" b="0" i="1" smtClean="0">
+                                  <a:latin typeface="Cambria Math" panose="02040503050406030204" pitchFamily="18" charset="0"/>
+                                  <a:ea typeface="Cambria Math" panose="02040503050406030204" pitchFamily="18" charset="0"/>
+                                </a:rPr>
+                              </m:ctrlPr>
+                            </m:sSubPr>
+                            <m:e>
+                              <m:r>
+                                <a:rPr lang="fr-FR" b="0" i="1" smtClean="0">
+                                  <a:latin typeface="Cambria Math" panose="02040503050406030204" pitchFamily="18" charset="0"/>
+                                  <a:ea typeface="Cambria Math" panose="02040503050406030204" pitchFamily="18" charset="0"/>
+                                </a:rPr>
+                                <m:t>𝑟</m:t>
+                              </m:r>
+                            </m:e>
+                            <m:sub>
+                              <m:r>
+                                <a:rPr lang="fr-FR" b="0" i="1" smtClean="0">
+                                  <a:latin typeface="Cambria Math" panose="02040503050406030204" pitchFamily="18" charset="0"/>
+                                  <a:ea typeface="Cambria Math" panose="02040503050406030204" pitchFamily="18" charset="0"/>
+                                </a:rPr>
+                                <m:t>0</m:t>
+                              </m:r>
+                            </m:sub>
+                          </m:sSub>
+                        </m:num>
+                        <m:den>
+                          <m:r>
+                            <a:rPr lang="fr-FR" b="0" i="1" smtClean="0">
+                              <a:latin typeface="Cambria Math" panose="02040503050406030204" pitchFamily="18" charset="0"/>
+                              <a:ea typeface="Cambria Math" panose="02040503050406030204" pitchFamily="18" charset="0"/>
+                            </a:rPr>
+                            <m:t>𝑟</m:t>
+                          </m:r>
+                        </m:den>
+                      </m:f>
+                      <m:r>
+                        <a:rPr lang="fr-FR" b="0" i="1" smtClean="0">
+                          <a:latin typeface="Cambria Math" panose="02040503050406030204" pitchFamily="18" charset="0"/>
+                          <a:ea typeface="Cambria Math" panose="02040503050406030204" pitchFamily="18" charset="0"/>
+                        </a:rPr>
+                        <m:t>−</m:t>
+                      </m:r>
+                      <m:r>
+                        <a:rPr lang="fr-FR" b="0" i="1" smtClean="0">
+                          <a:latin typeface="Cambria Math" panose="02040503050406030204" pitchFamily="18" charset="0"/>
+                          <a:ea typeface="Cambria Math" panose="02040503050406030204" pitchFamily="18" charset="0"/>
+                        </a:rPr>
+                        <m:t>1</m:t>
+                      </m:r>
+                      <m:r>
+                        <a:rPr lang="fr-FR" b="0" i="1" smtClean="0">
+                          <a:solidFill>
+                            <a:srgbClr val="202C8F"/>
+                          </a:solidFill>
+                          <a:latin typeface="Cambria Math" panose="02040503050406030204" pitchFamily="18" charset="0"/>
+                          <a:ea typeface="Cambria Math" panose="02040503050406030204" pitchFamily="18" charset="0"/>
+                        </a:rPr>
+                        <m:t>)</m:t>
+                      </m:r>
+                      <m:r>
+                        <a:rPr lang="fr-FR" b="0" i="1" smtClean="0">
+                          <a:solidFill>
+                            <a:srgbClr val="202C8F"/>
+                          </a:solidFill>
+                          <a:latin typeface="Cambria Math" panose="02040503050406030204" pitchFamily="18" charset="0"/>
+                        </a:rPr>
+                        <m:t>+</m:t>
+                      </m:r>
+                      <m:r>
+                        <a:rPr lang="fr-FR" i="1" smtClean="0">
+                          <a:solidFill>
+                            <a:srgbClr val="202C8F"/>
+                          </a:solidFill>
+                          <a:latin typeface="Cambria Math" panose="02040503050406030204" pitchFamily="18" charset="0"/>
+                        </a:rPr>
+                        <m:t>𝐺</m:t>
+                      </m:r>
+                      <m:r>
+                        <a:rPr lang="ar-AE" i="1">
+                          <a:solidFill>
+                            <a:srgbClr val="202C8F"/>
+                          </a:solidFill>
+                          <a:latin typeface="Cambria Math" panose="02040503050406030204" pitchFamily="18" charset="0"/>
+                        </a:rPr>
+                        <m:t>𝛾</m:t>
+                      </m:r>
+                      <m:r>
+                        <a:rPr lang="fr-FR" b="0" i="1" smtClean="0">
+                          <a:solidFill>
+                            <a:srgbClr val="202C8F"/>
+                          </a:solidFill>
+                          <a:latin typeface="Cambria Math" panose="02040503050406030204" pitchFamily="18" charset="0"/>
+                        </a:rPr>
+                        <m:t>+</m:t>
+                      </m:r>
+                      <m:r>
+                        <a:rPr lang="fr-FR" i="1">
+                          <a:solidFill>
+                            <a:srgbClr val="202C8F"/>
+                          </a:solidFill>
+                          <a:latin typeface="Cambria Math" panose="02040503050406030204" pitchFamily="18" charset="0"/>
+                        </a:rPr>
+                        <m:t>𝑘</m:t>
+                      </m:r>
+                      <m:sSup>
+                        <m:sSupPr>
+                          <m:ctrlPr>
+                            <a:rPr lang="fr-FR" i="1">
+                              <a:solidFill>
+                                <a:srgbClr val="202C8F"/>
+                              </a:solidFill>
+                              <a:latin typeface="Cambria Math" panose="02040503050406030204" pitchFamily="18" charset="0"/>
+                            </a:rPr>
+                          </m:ctrlPr>
+                        </m:sSupPr>
+                        <m:e>
+                          <m:acc>
+                            <m:accPr>
+                              <m:chr m:val="̇"/>
+                              <m:ctrlPr>
+                                <a:rPr lang="fr-FR" i="1">
+                                  <a:solidFill>
+                                    <a:srgbClr val="202C8F"/>
+                                  </a:solidFill>
+                                  <a:latin typeface="Cambria Math" panose="02040503050406030204" pitchFamily="18" charset="0"/>
+                                </a:rPr>
+                              </m:ctrlPr>
+                            </m:accPr>
+                            <m:e>
+                              <m:r>
+                                <a:rPr lang="fr-FR" i="1">
+                                  <a:solidFill>
+                                    <a:srgbClr val="202C8F"/>
+                                  </a:solidFill>
+                                  <a:latin typeface="Cambria Math" panose="02040503050406030204" pitchFamily="18" charset="0"/>
+                                </a:rPr>
+                                <m:t>𝛾</m:t>
+                              </m:r>
+                            </m:e>
+                          </m:acc>
+                        </m:e>
+                        <m:sup>
+                          <m:r>
+                            <a:rPr lang="fr-FR" i="1">
+                              <a:solidFill>
+                                <a:srgbClr val="202C8F"/>
+                              </a:solidFill>
+                              <a:latin typeface="Cambria Math" panose="02040503050406030204" pitchFamily="18" charset="0"/>
+                            </a:rPr>
+                            <m:t>𝑚</m:t>
+                          </m:r>
+                        </m:sup>
+                      </m:sSup>
+                      <m:r>
+                        <a:rPr lang="fr-FR" dirty="0">
+                          <a:solidFill>
+                            <a:srgbClr val="202C8F"/>
+                          </a:solidFill>
+                          <a:latin typeface="Cambria Math" panose="02040503050406030204" pitchFamily="18" charset="0"/>
+                        </a:rPr>
+                        <m:t>+</m:t>
+                      </m:r>
+                      <m:sSub>
+                        <m:sSubPr>
+                          <m:ctrlPr>
+                            <a:rPr lang="fr-FR" i="1" dirty="0">
+                              <a:solidFill>
+                                <a:srgbClr val="202C8F"/>
+                              </a:solidFill>
+                              <a:latin typeface="Cambria Math" panose="02040503050406030204" pitchFamily="18" charset="0"/>
+                            </a:rPr>
+                          </m:ctrlPr>
+                        </m:sSubPr>
+                        <m:e>
+                          <m:r>
+                            <a:rPr lang="fr-FR" i="1" dirty="0">
+                              <a:solidFill>
+                                <a:srgbClr val="202C8F"/>
+                              </a:solidFill>
+                              <a:latin typeface="Cambria Math" panose="02040503050406030204" pitchFamily="18" charset="0"/>
+                            </a:rPr>
+                            <m:t>𝜏</m:t>
+                          </m:r>
+                        </m:e>
+                        <m:sub>
+                          <m:r>
+                            <a:rPr lang="fr-FR" dirty="0">
+                              <a:solidFill>
+                                <a:srgbClr val="202C8F"/>
+                              </a:solidFill>
                               <a:latin typeface="Cambria Math" panose="02040503050406030204" pitchFamily="18" charset="0"/>
                             </a:rPr>
                             <m:t>0</m:t>
                           </m:r>
-                        </m:e>
-                      </m:acc>
+                        </m:sub>
+                      </m:sSub>
                     </m:oMath>
                   </m:oMathPara>
                 </a14:m>
-                <a:endParaRPr lang="ar-AE" sz="2600" dirty="0"/>
-              </a:p>
-              <a:p>
-                <a:endParaRPr lang="ar-AE" sz="2800" dirty="0"/>
-              </a:p>
-              <a:p>
-                <a:endParaRPr lang="ar-AE" sz="2800" dirty="0"/>
+                <a:endParaRPr lang="ar-AE" dirty="0"/>
               </a:p>
             </p:txBody>
           </p:sp>
@@ -18887,7 +20623,7 @@
               <p:cNvPr id="16" name="Espace réservé du texte 2">
                 <a:extLst>
                   <a:ext uri="{FF2B5EF4-FFF2-40B4-BE49-F238E27FC236}">
-                    <a16:creationId xmlns:a16="http://schemas.microsoft.com/office/drawing/2014/main" id="{2C94D156-8166-AF11-E939-C3D496469A55}"/>
+                    <a16:creationId xmlns:a16="http://schemas.microsoft.com/office/drawing/2014/main" id="{EC359F0F-A405-274C-749F-975BAF33709C}"/>
                   </a:ext>
                 </a:extLst>
               </p:cNvPr>
@@ -18898,8 +20634,737 @@
             </p:nvSpPr>
             <p:spPr>
               <a:xfrm>
-                <a:off x="3312331" y="5068883"/>
-                <a:ext cx="5564724" cy="1322641"/>
+                <a:off x="1540043" y="3383723"/>
+                <a:ext cx="9095873" cy="1234394"/>
+              </a:xfrm>
+              <a:prstGeom prst="rect">
+                <a:avLst/>
+              </a:prstGeom>
+              <a:blipFill>
+                <a:blip r:embed="rId4"/>
+                <a:stretch>
+                  <a:fillRect l="-1072" t="-7389"/>
+                </a:stretch>
+              </a:blipFill>
+              <a:ln w="76200">
+                <a:noFill/>
+              </a:ln>
+            </p:spPr>
+            <p:txBody>
+              <a:bodyPr/>
+              <a:lstStyle/>
+              <a:p>
+                <a:r>
+                  <a:rPr lang="fr-FR">
+                    <a:noFill/>
+                  </a:rPr>
+                  <a:t> </a:t>
+                </a:r>
+              </a:p>
+            </p:txBody>
+          </p:sp>
+        </mc:Fallback>
+      </mc:AlternateContent>
+      <mc:AlternateContent xmlns:mc="http://schemas.openxmlformats.org/markup-compatibility/2006">
+        <mc:Choice xmlns:a14="http://schemas.microsoft.com/office/drawing/2010/main" Requires="a14">
+          <p:sp>
+            <p:nvSpPr>
+              <p:cNvPr id="8" name="Espace réservé du texte 2">
+                <a:extLst>
+                  <a:ext uri="{FF2B5EF4-FFF2-40B4-BE49-F238E27FC236}">
+                    <a16:creationId xmlns:a16="http://schemas.microsoft.com/office/drawing/2014/main" id="{0F3BD725-D521-EE11-5419-4768C6283A5F}"/>
+                  </a:ext>
+                </a:extLst>
+              </p:cNvPr>
+              <p:cNvSpPr txBox="1">
+                <a:spLocks/>
+              </p:cNvSpPr>
+              <p:nvPr/>
+            </p:nvSpPr>
+            <p:spPr>
+              <a:xfrm>
+                <a:off x="1027293" y="2621368"/>
+                <a:ext cx="8293170" cy="848396"/>
+              </a:xfrm>
+              <a:prstGeom prst="rect">
+                <a:avLst/>
+              </a:prstGeom>
+            </p:spPr>
+            <p:txBody>
+              <a:bodyPr vert="horz" lIns="91440" tIns="0" rIns="91440" bIns="0" rtlCol="0">
+                <a:normAutofit/>
+              </a:bodyPr>
+              <a:lstStyle>
+                <a:defPPr>
+                  <a:defRPr lang="fr-FR"/>
+                </a:defPPr>
+                <a:lvl1pPr marL="0" indent="0" algn="l" defTabSz="914400" rtl="0" eaLnBrk="1" latinLnBrk="0" hangingPunct="1">
+                  <a:lnSpc>
+                    <a:spcPct val="100000"/>
+                  </a:lnSpc>
+                  <a:spcBef>
+                    <a:spcPts val="0"/>
+                  </a:spcBef>
+                  <a:buFont typeface="Arial" panose="020B0604020202020204" pitchFamily="34" charset="0"/>
+                  <a:buNone/>
+                  <a:defRPr lang="fr-FR" sz="2400" kern="1200">
+                    <a:solidFill>
+                      <a:schemeClr val="accent6"/>
+                    </a:solidFill>
+                    <a:latin typeface="+mn-lt"/>
+                    <a:ea typeface="+mn-ea"/>
+                    <a:cs typeface="+mn-cs"/>
+                  </a:defRPr>
+                </a:lvl1pPr>
+                <a:lvl2pPr marL="347472" indent="-347472" algn="l" defTabSz="914400" rtl="0" eaLnBrk="1" latinLnBrk="0" hangingPunct="1">
+                  <a:lnSpc>
+                    <a:spcPct val="100000"/>
+                  </a:lnSpc>
+                  <a:spcBef>
+                    <a:spcPts val="0"/>
+                  </a:spcBef>
+                  <a:buFont typeface="Arial" panose="020B0604020202020204" pitchFamily="34" charset="0"/>
+                  <a:buChar char="•"/>
+                  <a:defRPr lang="fr-FR" sz="2400" kern="1200">
+                    <a:solidFill>
+                      <a:schemeClr val="accent6"/>
+                    </a:solidFill>
+                    <a:latin typeface="+mn-lt"/>
+                    <a:ea typeface="+mn-ea"/>
+                    <a:cs typeface="+mn-cs"/>
+                  </a:defRPr>
+                </a:lvl2pPr>
+                <a:lvl3pPr marL="685800" indent="-347472" algn="l" defTabSz="914400" rtl="0" eaLnBrk="1" latinLnBrk="0" hangingPunct="1">
+                  <a:lnSpc>
+                    <a:spcPct val="100000"/>
+                  </a:lnSpc>
+                  <a:spcBef>
+                    <a:spcPts val="0"/>
+                  </a:spcBef>
+                  <a:buFont typeface="Arial" panose="020B0604020202020204" pitchFamily="34" charset="0"/>
+                  <a:buChar char="•"/>
+                  <a:defRPr lang="fr-FR" sz="2400" kern="1200">
+                    <a:solidFill>
+                      <a:schemeClr val="accent6"/>
+                    </a:solidFill>
+                    <a:latin typeface="+mn-lt"/>
+                    <a:ea typeface="+mn-ea"/>
+                    <a:cs typeface="+mn-cs"/>
+                  </a:defRPr>
+                </a:lvl3pPr>
+                <a:lvl4pPr marL="1600200" indent="-347472" algn="l" defTabSz="914400" rtl="0" eaLnBrk="1" latinLnBrk="0" hangingPunct="1">
+                  <a:lnSpc>
+                    <a:spcPct val="100000"/>
+                  </a:lnSpc>
+                  <a:spcBef>
+                    <a:spcPts val="360"/>
+                  </a:spcBef>
+                  <a:buFont typeface="Arial" panose="020B0604020202020204" pitchFamily="34" charset="0"/>
+                  <a:buChar char="•"/>
+                  <a:defRPr lang="fr-FR" sz="1800" kern="1200">
+                    <a:solidFill>
+                      <a:schemeClr val="accent6"/>
+                    </a:solidFill>
+                    <a:latin typeface="+mn-lt"/>
+                    <a:ea typeface="+mn-ea"/>
+                    <a:cs typeface="+mn-cs"/>
+                  </a:defRPr>
+                </a:lvl4pPr>
+                <a:lvl5pPr marL="2057400" indent="-347472" algn="l" defTabSz="914400" rtl="0" eaLnBrk="1" latinLnBrk="0" hangingPunct="1">
+                  <a:lnSpc>
+                    <a:spcPct val="100000"/>
+                  </a:lnSpc>
+                  <a:spcBef>
+                    <a:spcPts val="360"/>
+                  </a:spcBef>
+                  <a:buFont typeface="Arial" panose="020B0604020202020204" pitchFamily="34" charset="0"/>
+                  <a:buChar char="•"/>
+                  <a:defRPr lang="fr-FR" sz="1800" kern="1200">
+                    <a:solidFill>
+                      <a:schemeClr val="accent6"/>
+                    </a:solidFill>
+                    <a:latin typeface="+mn-lt"/>
+                    <a:ea typeface="+mn-ea"/>
+                    <a:cs typeface="+mn-cs"/>
+                  </a:defRPr>
+                </a:lvl5pPr>
+                <a:lvl6pPr marL="2514600" indent="-228600" algn="l" defTabSz="914400" rtl="0" eaLnBrk="1" latinLnBrk="0" hangingPunct="1">
+                  <a:lnSpc>
+                    <a:spcPct val="90000"/>
+                  </a:lnSpc>
+                  <a:spcBef>
+                    <a:spcPts val="500"/>
+                  </a:spcBef>
+                  <a:buFont typeface="Arial" panose="020B0604020202020204" pitchFamily="34" charset="0"/>
+                  <a:buChar char="•"/>
+                  <a:defRPr lang="fr-FR" sz="1800" kern="1200">
+                    <a:solidFill>
+                      <a:schemeClr val="tx1"/>
+                    </a:solidFill>
+                    <a:latin typeface="+mn-lt"/>
+                    <a:ea typeface="+mn-ea"/>
+                    <a:cs typeface="+mn-cs"/>
+                  </a:defRPr>
+                </a:lvl6pPr>
+                <a:lvl7pPr marL="2971800" indent="-228600" algn="l" defTabSz="914400" rtl="0" eaLnBrk="1" latinLnBrk="0" hangingPunct="1">
+                  <a:lnSpc>
+                    <a:spcPct val="90000"/>
+                  </a:lnSpc>
+                  <a:spcBef>
+                    <a:spcPts val="500"/>
+                  </a:spcBef>
+                  <a:buFont typeface="Arial" panose="020B0604020202020204" pitchFamily="34" charset="0"/>
+                  <a:buChar char="•"/>
+                  <a:defRPr lang="fr-FR" sz="1800" kern="1200">
+                    <a:solidFill>
+                      <a:schemeClr val="tx1"/>
+                    </a:solidFill>
+                    <a:latin typeface="+mn-lt"/>
+                    <a:ea typeface="+mn-ea"/>
+                    <a:cs typeface="+mn-cs"/>
+                  </a:defRPr>
+                </a:lvl7pPr>
+                <a:lvl8pPr marL="3429000" indent="-228600" algn="l" defTabSz="914400" rtl="0" eaLnBrk="1" latinLnBrk="0" hangingPunct="1">
+                  <a:lnSpc>
+                    <a:spcPct val="90000"/>
+                  </a:lnSpc>
+                  <a:spcBef>
+                    <a:spcPts val="500"/>
+                  </a:spcBef>
+                  <a:buFont typeface="Arial" panose="020B0604020202020204" pitchFamily="34" charset="0"/>
+                  <a:buChar char="•"/>
+                  <a:defRPr lang="fr-FR" sz="1800" kern="1200">
+                    <a:solidFill>
+                      <a:schemeClr val="tx1"/>
+                    </a:solidFill>
+                    <a:latin typeface="+mn-lt"/>
+                    <a:ea typeface="+mn-ea"/>
+                    <a:cs typeface="+mn-cs"/>
+                  </a:defRPr>
+                </a:lvl8pPr>
+                <a:lvl9pPr marL="3886200" indent="-228600" algn="l" defTabSz="914400" rtl="0" eaLnBrk="1" latinLnBrk="0" hangingPunct="1">
+                  <a:lnSpc>
+                    <a:spcPct val="90000"/>
+                  </a:lnSpc>
+                  <a:spcBef>
+                    <a:spcPts val="500"/>
+                  </a:spcBef>
+                  <a:buFont typeface="Arial" panose="020B0604020202020204" pitchFamily="34" charset="0"/>
+                  <a:buChar char="•"/>
+                  <a:defRPr lang="fr-FR" sz="1800" kern="1200">
+                    <a:solidFill>
+                      <a:schemeClr val="tx1"/>
+                    </a:solidFill>
+                    <a:latin typeface="+mn-lt"/>
+                    <a:ea typeface="+mn-ea"/>
+                    <a:cs typeface="+mn-cs"/>
+                  </a:defRPr>
+                </a:lvl9pPr>
+              </a:lstStyle>
+              <a:p>
+                <a:r>
+                  <a:rPr lang="fr-FR" b="1" dirty="0"/>
+                  <a:t>Conservation de quantité de mouvement :  </a:t>
+                </a:r>
+                <a14:m>
+                  <m:oMath xmlns:m="http://schemas.openxmlformats.org/officeDocument/2006/math">
+                    <m:r>
+                      <a:rPr lang="fr-FR" b="0" i="1" smtClean="0">
+                        <a:latin typeface="Cambria Math" panose="02040503050406030204" pitchFamily="18" charset="0"/>
+                        <a:ea typeface="Cambria Math" panose="02040503050406030204" pitchFamily="18" charset="0"/>
+                      </a:rPr>
+                      <m:t>𝜌</m:t>
+                    </m:r>
+                    <m:r>
+                      <a:rPr lang="fr-FR" b="0" i="1" smtClean="0">
+                        <a:latin typeface="Cambria Math" panose="02040503050406030204" pitchFamily="18" charset="0"/>
+                        <a:ea typeface="Cambria Math" panose="02040503050406030204" pitchFamily="18" charset="0"/>
+                      </a:rPr>
+                      <m:t>h</m:t>
+                    </m:r>
+                    <m:f>
+                      <m:fPr>
+                        <m:ctrlPr>
+                          <a:rPr lang="fr-FR" i="1" smtClean="0">
+                            <a:latin typeface="Cambria Math" panose="02040503050406030204" pitchFamily="18" charset="0"/>
+                          </a:rPr>
+                        </m:ctrlPr>
+                      </m:fPr>
+                      <m:num>
+                        <m:r>
+                          <a:rPr lang="fr-FR" b="0" i="1" smtClean="0">
+                            <a:latin typeface="Cambria Math" panose="02040503050406030204" pitchFamily="18" charset="0"/>
+                          </a:rPr>
+                          <m:t>𝑑𝑢</m:t>
+                        </m:r>
+                      </m:num>
+                      <m:den>
+                        <m:r>
+                          <a:rPr lang="fr-FR" b="0" i="1" smtClean="0">
+                            <a:latin typeface="Cambria Math" panose="02040503050406030204" pitchFamily="18" charset="0"/>
+                          </a:rPr>
+                          <m:t>𝑑𝑡</m:t>
+                        </m:r>
+                      </m:den>
+                    </m:f>
+                    <m:r>
+                      <a:rPr lang="fr-FR" b="0" i="1" smtClean="0">
+                        <a:latin typeface="Cambria Math" panose="02040503050406030204" pitchFamily="18" charset="0"/>
+                      </a:rPr>
+                      <m:t>=−</m:t>
+                    </m:r>
+                    <m:sSub>
+                      <m:sSubPr>
+                        <m:ctrlPr>
+                          <a:rPr lang="fr-FR" b="0" i="1" smtClean="0">
+                            <a:latin typeface="Cambria Math" panose="02040503050406030204" pitchFamily="18" charset="0"/>
+                            <a:ea typeface="Cambria Math" panose="02040503050406030204" pitchFamily="18" charset="0"/>
+                          </a:rPr>
+                        </m:ctrlPr>
+                      </m:sSubPr>
+                      <m:e>
+                        <m:r>
+                          <a:rPr lang="fr-FR" b="0" i="1" smtClean="0">
+                            <a:latin typeface="Cambria Math" panose="02040503050406030204" pitchFamily="18" charset="0"/>
+                            <a:ea typeface="Cambria Math" panose="02040503050406030204" pitchFamily="18" charset="0"/>
+                          </a:rPr>
+                          <m:t>𝜏</m:t>
+                        </m:r>
+                      </m:e>
+                      <m:sub>
+                        <m:r>
+                          <a:rPr lang="fr-FR" b="0" i="1" smtClean="0">
+                            <a:latin typeface="Cambria Math" panose="02040503050406030204" pitchFamily="18" charset="0"/>
+                            <a:ea typeface="Cambria Math" panose="02040503050406030204" pitchFamily="18" charset="0"/>
+                          </a:rPr>
+                          <m:t>𝑡𝑜𝑡𝑎𝑙</m:t>
+                        </m:r>
+                      </m:sub>
+                    </m:sSub>
+                  </m:oMath>
+                </a14:m>
+                <a:endParaRPr lang="ar-AE" dirty="0"/>
+              </a:p>
+            </p:txBody>
+          </p:sp>
+        </mc:Choice>
+        <mc:Fallback>
+          <p:sp>
+            <p:nvSpPr>
+              <p:cNvPr id="8" name="Espace réservé du texte 2">
+                <a:extLst>
+                  <a:ext uri="{FF2B5EF4-FFF2-40B4-BE49-F238E27FC236}">
+                    <a16:creationId xmlns:a16="http://schemas.microsoft.com/office/drawing/2014/main" id="{0F3BD725-D521-EE11-5419-4768C6283A5F}"/>
+                  </a:ext>
+                </a:extLst>
+              </p:cNvPr>
+              <p:cNvSpPr txBox="1">
+                <a:spLocks noRot="1" noChangeAspect="1" noMove="1" noResize="1" noEditPoints="1" noAdjustHandles="1" noChangeArrowheads="1" noChangeShapeType="1" noTextEdit="1"/>
+              </p:cNvSpPr>
+              <p:nvPr/>
+            </p:nvSpPr>
+            <p:spPr>
+              <a:xfrm>
+                <a:off x="1027293" y="2621368"/>
+                <a:ext cx="8293170" cy="848396"/>
+              </a:xfrm>
+              <a:prstGeom prst="rect">
+                <a:avLst/>
+              </a:prstGeom>
+              <a:blipFill>
+                <a:blip r:embed="rId5"/>
+                <a:stretch>
+                  <a:fillRect l="-1176" t="-719"/>
+                </a:stretch>
+              </a:blipFill>
+            </p:spPr>
+            <p:txBody>
+              <a:bodyPr/>
+              <a:lstStyle/>
+              <a:p>
+                <a:r>
+                  <a:rPr lang="fr-FR">
+                    <a:noFill/>
+                  </a:rPr>
+                  <a:t> </a:t>
+                </a:r>
+              </a:p>
+            </p:txBody>
+          </p:sp>
+        </mc:Fallback>
+      </mc:AlternateContent>
+      <mc:AlternateContent xmlns:mc="http://schemas.openxmlformats.org/markup-compatibility/2006">
+        <mc:Choice xmlns:a14="http://schemas.microsoft.com/office/drawing/2010/main" Requires="a14">
+          <p:sp>
+            <p:nvSpPr>
+              <p:cNvPr id="9" name="Espace réservé du texte 2">
+                <a:extLst>
+                  <a:ext uri="{FF2B5EF4-FFF2-40B4-BE49-F238E27FC236}">
+                    <a16:creationId xmlns:a16="http://schemas.microsoft.com/office/drawing/2014/main" id="{3133DA29-469D-6B0F-19E9-C077F4052FD6}"/>
+                  </a:ext>
+                </a:extLst>
+              </p:cNvPr>
+              <p:cNvSpPr txBox="1">
+                <a:spLocks/>
+              </p:cNvSpPr>
+              <p:nvPr/>
+            </p:nvSpPr>
+            <p:spPr>
+              <a:xfrm>
+                <a:off x="1540043" y="4788568"/>
+                <a:ext cx="10443410" cy="1234394"/>
+              </a:xfrm>
+              <a:prstGeom prst="rect">
+                <a:avLst/>
+              </a:prstGeom>
+              <a:noFill/>
+              <a:ln w="76200">
+                <a:noFill/>
+              </a:ln>
+            </p:spPr>
+            <p:txBody>
+              <a:bodyPr vert="horz" lIns="91440" tIns="0" rIns="91440" bIns="0" rtlCol="0">
+                <a:normAutofit/>
+              </a:bodyPr>
+              <a:lstStyle>
+                <a:defPPr>
+                  <a:defRPr lang="fr-FR"/>
+                </a:defPPr>
+                <a:lvl1pPr marL="0" indent="0" algn="l" defTabSz="914400" rtl="0" eaLnBrk="1" latinLnBrk="0" hangingPunct="1">
+                  <a:lnSpc>
+                    <a:spcPct val="100000"/>
+                  </a:lnSpc>
+                  <a:spcBef>
+                    <a:spcPts val="0"/>
+                  </a:spcBef>
+                  <a:buFont typeface="Arial" panose="020B0604020202020204" pitchFamily="34" charset="0"/>
+                  <a:buNone/>
+                  <a:defRPr lang="fr-FR" sz="2400" kern="1200">
+                    <a:solidFill>
+                      <a:schemeClr val="accent6"/>
+                    </a:solidFill>
+                    <a:latin typeface="+mn-lt"/>
+                    <a:ea typeface="+mn-ea"/>
+                    <a:cs typeface="+mn-cs"/>
+                  </a:defRPr>
+                </a:lvl1pPr>
+                <a:lvl2pPr marL="347472" indent="-347472" algn="l" defTabSz="914400" rtl="0" eaLnBrk="1" latinLnBrk="0" hangingPunct="1">
+                  <a:lnSpc>
+                    <a:spcPct val="100000"/>
+                  </a:lnSpc>
+                  <a:spcBef>
+                    <a:spcPts val="0"/>
+                  </a:spcBef>
+                  <a:buFont typeface="Arial" panose="020B0604020202020204" pitchFamily="34" charset="0"/>
+                  <a:buChar char="•"/>
+                  <a:defRPr lang="fr-FR" sz="2400" kern="1200">
+                    <a:solidFill>
+                      <a:schemeClr val="accent6"/>
+                    </a:solidFill>
+                    <a:latin typeface="+mn-lt"/>
+                    <a:ea typeface="+mn-ea"/>
+                    <a:cs typeface="+mn-cs"/>
+                  </a:defRPr>
+                </a:lvl2pPr>
+                <a:lvl3pPr marL="685800" indent="-347472" algn="l" defTabSz="914400" rtl="0" eaLnBrk="1" latinLnBrk="0" hangingPunct="1">
+                  <a:lnSpc>
+                    <a:spcPct val="100000"/>
+                  </a:lnSpc>
+                  <a:spcBef>
+                    <a:spcPts val="0"/>
+                  </a:spcBef>
+                  <a:buFont typeface="Arial" panose="020B0604020202020204" pitchFamily="34" charset="0"/>
+                  <a:buChar char="•"/>
+                  <a:defRPr lang="fr-FR" sz="2400" kern="1200">
+                    <a:solidFill>
+                      <a:schemeClr val="accent6"/>
+                    </a:solidFill>
+                    <a:latin typeface="+mn-lt"/>
+                    <a:ea typeface="+mn-ea"/>
+                    <a:cs typeface="+mn-cs"/>
+                  </a:defRPr>
+                </a:lvl3pPr>
+                <a:lvl4pPr marL="1600200" indent="-347472" algn="l" defTabSz="914400" rtl="0" eaLnBrk="1" latinLnBrk="0" hangingPunct="1">
+                  <a:lnSpc>
+                    <a:spcPct val="100000"/>
+                  </a:lnSpc>
+                  <a:spcBef>
+                    <a:spcPts val="360"/>
+                  </a:spcBef>
+                  <a:buFont typeface="Arial" panose="020B0604020202020204" pitchFamily="34" charset="0"/>
+                  <a:buChar char="•"/>
+                  <a:defRPr lang="fr-FR" sz="1800" kern="1200">
+                    <a:solidFill>
+                      <a:schemeClr val="accent6"/>
+                    </a:solidFill>
+                    <a:latin typeface="+mn-lt"/>
+                    <a:ea typeface="+mn-ea"/>
+                    <a:cs typeface="+mn-cs"/>
+                  </a:defRPr>
+                </a:lvl4pPr>
+                <a:lvl5pPr marL="2057400" indent="-347472" algn="l" defTabSz="914400" rtl="0" eaLnBrk="1" latinLnBrk="0" hangingPunct="1">
+                  <a:lnSpc>
+                    <a:spcPct val="100000"/>
+                  </a:lnSpc>
+                  <a:spcBef>
+                    <a:spcPts val="360"/>
+                  </a:spcBef>
+                  <a:buFont typeface="Arial" panose="020B0604020202020204" pitchFamily="34" charset="0"/>
+                  <a:buChar char="•"/>
+                  <a:defRPr lang="fr-FR" sz="1800" kern="1200">
+                    <a:solidFill>
+                      <a:schemeClr val="accent6"/>
+                    </a:solidFill>
+                    <a:latin typeface="+mn-lt"/>
+                    <a:ea typeface="+mn-ea"/>
+                    <a:cs typeface="+mn-cs"/>
+                  </a:defRPr>
+                </a:lvl5pPr>
+                <a:lvl6pPr marL="2514600" indent="-228600" algn="l" defTabSz="914400" rtl="0" eaLnBrk="1" latinLnBrk="0" hangingPunct="1">
+                  <a:lnSpc>
+                    <a:spcPct val="90000"/>
+                  </a:lnSpc>
+                  <a:spcBef>
+                    <a:spcPts val="500"/>
+                  </a:spcBef>
+                  <a:buFont typeface="Arial" panose="020B0604020202020204" pitchFamily="34" charset="0"/>
+                  <a:buChar char="•"/>
+                  <a:defRPr lang="fr-FR" sz="1800" kern="1200">
+                    <a:solidFill>
+                      <a:schemeClr val="tx1"/>
+                    </a:solidFill>
+                    <a:latin typeface="+mn-lt"/>
+                    <a:ea typeface="+mn-ea"/>
+                    <a:cs typeface="+mn-cs"/>
+                  </a:defRPr>
+                </a:lvl6pPr>
+                <a:lvl7pPr marL="2971800" indent="-228600" algn="l" defTabSz="914400" rtl="0" eaLnBrk="1" latinLnBrk="0" hangingPunct="1">
+                  <a:lnSpc>
+                    <a:spcPct val="90000"/>
+                  </a:lnSpc>
+                  <a:spcBef>
+                    <a:spcPts val="500"/>
+                  </a:spcBef>
+                  <a:buFont typeface="Arial" panose="020B0604020202020204" pitchFamily="34" charset="0"/>
+                  <a:buChar char="•"/>
+                  <a:defRPr lang="fr-FR" sz="1800" kern="1200">
+                    <a:solidFill>
+                      <a:schemeClr val="tx1"/>
+                    </a:solidFill>
+                    <a:latin typeface="+mn-lt"/>
+                    <a:ea typeface="+mn-ea"/>
+                    <a:cs typeface="+mn-cs"/>
+                  </a:defRPr>
+                </a:lvl7pPr>
+                <a:lvl8pPr marL="3429000" indent="-228600" algn="l" defTabSz="914400" rtl="0" eaLnBrk="1" latinLnBrk="0" hangingPunct="1">
+                  <a:lnSpc>
+                    <a:spcPct val="90000"/>
+                  </a:lnSpc>
+                  <a:spcBef>
+                    <a:spcPts val="500"/>
+                  </a:spcBef>
+                  <a:buFont typeface="Arial" panose="020B0604020202020204" pitchFamily="34" charset="0"/>
+                  <a:buChar char="•"/>
+                  <a:defRPr lang="fr-FR" sz="1800" kern="1200">
+                    <a:solidFill>
+                      <a:schemeClr val="tx1"/>
+                    </a:solidFill>
+                    <a:latin typeface="+mn-lt"/>
+                    <a:ea typeface="+mn-ea"/>
+                    <a:cs typeface="+mn-cs"/>
+                  </a:defRPr>
+                </a:lvl8pPr>
+                <a:lvl9pPr marL="3886200" indent="-228600" algn="l" defTabSz="914400" rtl="0" eaLnBrk="1" latinLnBrk="0" hangingPunct="1">
+                  <a:lnSpc>
+                    <a:spcPct val="90000"/>
+                  </a:lnSpc>
+                  <a:spcBef>
+                    <a:spcPts val="500"/>
+                  </a:spcBef>
+                  <a:buFont typeface="Arial" panose="020B0604020202020204" pitchFamily="34" charset="0"/>
+                  <a:buChar char="•"/>
+                  <a:defRPr lang="fr-FR" sz="1800" kern="1200">
+                    <a:solidFill>
+                      <a:schemeClr val="tx1"/>
+                    </a:solidFill>
+                    <a:latin typeface="+mn-lt"/>
+                    <a:ea typeface="+mn-ea"/>
+                    <a:cs typeface="+mn-cs"/>
+                  </a:defRPr>
+                </a:lvl9pPr>
+              </a:lstStyle>
+              <a:p>
+                <a:pPr>
+                  <a:lnSpc>
+                    <a:spcPts val="3600"/>
+                  </a:lnSpc>
+                </a:pPr>
+                <a:r>
+                  <a:rPr lang="fr-FR" dirty="0"/>
+                  <a:t>Avec le </a:t>
+                </a:r>
+                <a:r>
+                  <a:rPr lang="fr-FR" b="1" dirty="0"/>
+                  <a:t>taux de déformation </a:t>
+                </a:r>
+                <a:r>
+                  <a:rPr lang="fr-FR" dirty="0"/>
+                  <a:t>:</a:t>
+                </a:r>
+                <a:endParaRPr lang="fr-FR" b="0" i="0" dirty="0"/>
+              </a:p>
+              <a:p>
+                <a:pPr algn="ctr">
+                  <a:lnSpc>
+                    <a:spcPts val="3600"/>
+                  </a:lnSpc>
+                </a:pPr>
+                <a14:m>
+                  <m:oMath xmlns:m="http://schemas.openxmlformats.org/officeDocument/2006/math">
+                    <m:r>
+                      <a:rPr lang="fr-FR" b="0" i="0" smtClean="0">
+                        <a:latin typeface="Cambria Math" panose="02040503050406030204" pitchFamily="18" charset="0"/>
+                      </a:rPr>
+                      <m:t> </m:t>
+                    </m:r>
+                    <m:acc>
+                      <m:accPr>
+                        <m:chr m:val="̇"/>
+                        <m:ctrlPr>
+                          <a:rPr lang="fr-FR" b="0" i="1" smtClean="0">
+                            <a:latin typeface="Cambria Math" panose="02040503050406030204" pitchFamily="18" charset="0"/>
+                          </a:rPr>
+                        </m:ctrlPr>
+                      </m:accPr>
+                      <m:e>
+                        <m:r>
+                          <a:rPr lang="fr-FR" b="0" i="1" smtClean="0">
+                            <a:latin typeface="Cambria Math" panose="02040503050406030204" pitchFamily="18" charset="0"/>
+                            <a:ea typeface="Cambria Math" panose="02040503050406030204" pitchFamily="18" charset="0"/>
+                          </a:rPr>
+                          <m:t>𝛾</m:t>
+                        </m:r>
+                      </m:e>
+                    </m:acc>
+                    <m:r>
+                      <a:rPr lang="fr-FR" b="0" i="1" smtClean="0">
+                        <a:latin typeface="Cambria Math" panose="02040503050406030204" pitchFamily="18" charset="0"/>
+                      </a:rPr>
+                      <m:t>=</m:t>
+                    </m:r>
+                    <m:f>
+                      <m:fPr>
+                        <m:ctrlPr>
+                          <a:rPr lang="fr-FR" b="0" i="1" smtClean="0">
+                            <a:latin typeface="Cambria Math" panose="02040503050406030204" pitchFamily="18" charset="0"/>
+                          </a:rPr>
+                        </m:ctrlPr>
+                      </m:fPr>
+                      <m:num>
+                        <m:r>
+                          <a:rPr lang="fr-FR" b="0" i="1" smtClean="0">
+                            <a:latin typeface="Cambria Math" panose="02040503050406030204" pitchFamily="18" charset="0"/>
+                          </a:rPr>
+                          <m:t>𝑢</m:t>
+                        </m:r>
+                      </m:num>
+                      <m:den>
+                        <m:r>
+                          <a:rPr lang="fr-FR" b="0" i="1" smtClean="0">
+                            <a:latin typeface="Cambria Math" panose="02040503050406030204" pitchFamily="18" charset="0"/>
+                          </a:rPr>
+                          <m:t>h</m:t>
+                        </m:r>
+                      </m:den>
+                    </m:f>
+                  </m:oMath>
+                </a14:m>
+                <a:r>
+                  <a:rPr lang="fr-FR" dirty="0"/>
+                  <a:t> pour le cas en adhérence,  </a:t>
+                </a:r>
+                <a14:m>
+                  <m:oMath xmlns:m="http://schemas.openxmlformats.org/officeDocument/2006/math">
+                    <m:acc>
+                      <m:accPr>
+                        <m:chr m:val="̇"/>
+                        <m:ctrlPr>
+                          <a:rPr lang="fr-FR" i="1">
+                            <a:latin typeface="Cambria Math" panose="02040503050406030204" pitchFamily="18" charset="0"/>
+                          </a:rPr>
+                        </m:ctrlPr>
+                      </m:accPr>
+                      <m:e>
+                        <m:r>
+                          <a:rPr lang="fr-FR" i="1">
+                            <a:latin typeface="Cambria Math" panose="02040503050406030204" pitchFamily="18" charset="0"/>
+                            <a:ea typeface="Cambria Math" panose="02040503050406030204" pitchFamily="18" charset="0"/>
+                          </a:rPr>
+                          <m:t>𝛾</m:t>
+                        </m:r>
+                      </m:e>
+                    </m:acc>
+                    <m:r>
+                      <a:rPr lang="fr-FR" i="1">
+                        <a:latin typeface="Cambria Math" panose="02040503050406030204" pitchFamily="18" charset="0"/>
+                      </a:rPr>
+                      <m:t>=</m:t>
+                    </m:r>
+                    <m:f>
+                      <m:fPr>
+                        <m:ctrlPr>
+                          <a:rPr lang="fr-FR" i="1">
+                            <a:latin typeface="Cambria Math" panose="02040503050406030204" pitchFamily="18" charset="0"/>
+                          </a:rPr>
+                        </m:ctrlPr>
+                      </m:fPr>
+                      <m:num>
+                        <m:r>
+                          <a:rPr lang="fr-FR" i="1">
+                            <a:latin typeface="Cambria Math" panose="02040503050406030204" pitchFamily="18" charset="0"/>
+                          </a:rPr>
+                          <m:t>𝑢</m:t>
+                        </m:r>
+                      </m:num>
+                      <m:den>
+                        <m:r>
+                          <a:rPr lang="fr-FR" b="0" i="1" smtClean="0">
+                            <a:latin typeface="Cambria Math" panose="02040503050406030204" pitchFamily="18" charset="0"/>
+                          </a:rPr>
+                          <m:t>𝑟</m:t>
+                        </m:r>
+                      </m:den>
+                    </m:f>
+                  </m:oMath>
+                </a14:m>
+                <a:r>
+                  <a:rPr lang="fr-FR" dirty="0"/>
+                  <a:t> pour le cas en glissement </a:t>
+                </a:r>
+                <a:endParaRPr lang="ar-AE" dirty="0"/>
+              </a:p>
+            </p:txBody>
+          </p:sp>
+        </mc:Choice>
+        <mc:Fallback>
+          <p:sp>
+            <p:nvSpPr>
+              <p:cNvPr id="9" name="Espace réservé du texte 2">
+                <a:extLst>
+                  <a:ext uri="{FF2B5EF4-FFF2-40B4-BE49-F238E27FC236}">
+                    <a16:creationId xmlns:a16="http://schemas.microsoft.com/office/drawing/2014/main" id="{3133DA29-469D-6B0F-19E9-C077F4052FD6}"/>
+                  </a:ext>
+                </a:extLst>
+              </p:cNvPr>
+              <p:cNvSpPr txBox="1">
+                <a:spLocks noRot="1" noChangeAspect="1" noMove="1" noResize="1" noEditPoints="1" noAdjustHandles="1" noChangeArrowheads="1" noChangeShapeType="1" noTextEdit="1"/>
+              </p:cNvSpPr>
+              <p:nvPr/>
+            </p:nvSpPr>
+            <p:spPr>
+              <a:xfrm>
+                <a:off x="1540043" y="4788568"/>
+                <a:ext cx="10443410" cy="1234394"/>
               </a:xfrm>
               <a:prstGeom prst="rect">
                 <a:avLst/>
@@ -18907,13 +21372,11 @@
               <a:blipFill>
                 <a:blip r:embed="rId6"/>
                 <a:stretch>
-                  <a:fillRect/>
+                  <a:fillRect l="-934" t="-3465"/>
                 </a:stretch>
               </a:blipFill>
               <a:ln w="76200">
-                <a:solidFill>
-                  <a:srgbClr val="F5CDCE"/>
-                </a:solidFill>
+                <a:noFill/>
               </a:ln>
             </p:spPr>
             <p:txBody>
@@ -18934,7 +21397,7 @@
     </p:spTree>
     <p:extLst>
       <p:ext uri="{BB962C8B-B14F-4D97-AF65-F5344CB8AC3E}">
-        <p14:creationId xmlns:p14="http://schemas.microsoft.com/office/powerpoint/2010/main" val="3002823423"/>
+        <p14:creationId xmlns:p14="http://schemas.microsoft.com/office/powerpoint/2010/main" val="2261552987"/>
       </p:ext>
     </p:extLst>
   </p:cSld>
@@ -18944,7 +21407,7 @@
 </p:sld>
 </file>
 
-<file path=ppt/slides/slide3.xml><?xml version="1.0" encoding="utf-8"?>
+<file path=ppt/slides/slide4.xml><?xml version="1.0" encoding="utf-8"?>
 <p:sld xmlns:a="http://schemas.openxmlformats.org/drawingml/2006/main" xmlns:r="http://schemas.openxmlformats.org/officeDocument/2006/relationships" xmlns:p="http://schemas.openxmlformats.org/presentationml/2006/main">
   <p:cSld>
     <p:spTree>
@@ -18979,8 +21442,8 @@
         </p:nvSpPr>
         <p:spPr>
           <a:xfrm>
-            <a:off x="840186" y="0"/>
-            <a:ext cx="10511627" cy="1012785"/>
+            <a:off x="840186" y="366454"/>
+            <a:ext cx="10511627" cy="646331"/>
           </a:xfrm>
         </p:spPr>
         <p:txBody>
@@ -19015,8 +21478,8 @@
         </p:nvSpPr>
         <p:spPr>
           <a:xfrm>
-            <a:off x="2128281" y="5845215"/>
-            <a:ext cx="8031687" cy="1012785"/>
+            <a:off x="3884375" y="5797818"/>
+            <a:ext cx="6995171" cy="1012785"/>
           </a:xfrm>
           <a:prstGeom prst="rect">
             <a:avLst/>
@@ -19196,25 +21659,19 @@
           <a:p>
             <a:pPr algn="ctr"/>
             <a:r>
-              <a:rPr lang="fr-FR" sz="2600" dirty="0"/>
+              <a:rPr lang="fr-FR" sz="2000" dirty="0"/>
               <a:t>Rayon et hauteur du cylindre de fluide au cours de la compression sous une masse de 100g.</a:t>
             </a:r>
-            <a:endParaRPr lang="ar-AE" sz="2600" dirty="0"/>
-          </a:p>
-          <a:p>
-            <a:endParaRPr lang="ar-AE" sz="2800" dirty="0"/>
-          </a:p>
-          <a:p>
-            <a:endParaRPr lang="ar-AE" sz="2800" dirty="0"/>
+            <a:endParaRPr lang="ar-AE" sz="2000" dirty="0"/>
           </a:p>
         </p:txBody>
       </p:sp>
       <p:pic>
         <p:nvPicPr>
-          <p:cNvPr id="18" name="Image 17">
+          <p:cNvPr id="6" name="Image 5">
             <a:extLst>
               <a:ext uri="{FF2B5EF4-FFF2-40B4-BE49-F238E27FC236}">
-                <a16:creationId xmlns:a16="http://schemas.microsoft.com/office/drawing/2014/main" id="{06982985-6AFA-DE90-3541-CC75288F373C}"/>
+                <a16:creationId xmlns:a16="http://schemas.microsoft.com/office/drawing/2014/main" id="{6AD15995-69B0-6746-6AF8-2BFBBB94EDF2}"/>
               </a:ext>
             </a:extLst>
           </p:cNvPr>
@@ -19231,8 +21688,1894 @@
         </p:blipFill>
         <p:spPr>
           <a:xfrm>
-            <a:off x="2114345" y="1276239"/>
-            <a:ext cx="7963309" cy="4305521"/>
+            <a:off x="4111193" y="1409823"/>
+            <a:ext cx="6541536" cy="4115027"/>
+          </a:xfrm>
+          <a:prstGeom prst="rect">
+            <a:avLst/>
+          </a:prstGeom>
+          <a:ln w="57150">
+            <a:solidFill>
+              <a:srgbClr val="F5CDCE"/>
+            </a:solidFill>
+          </a:ln>
+        </p:spPr>
+      </p:pic>
+      <mc:AlternateContent xmlns:mc="http://schemas.openxmlformats.org/markup-compatibility/2006">
+        <mc:Choice xmlns:a14="http://schemas.microsoft.com/office/drawing/2010/main" Requires="a14">
+          <p:sp>
+            <p:nvSpPr>
+              <p:cNvPr id="7" name="Espace réservé du texte 2">
+                <a:extLst>
+                  <a:ext uri="{FF2B5EF4-FFF2-40B4-BE49-F238E27FC236}">
+                    <a16:creationId xmlns:a16="http://schemas.microsoft.com/office/drawing/2014/main" id="{642B383E-03B4-F061-D542-B7BCD189D79A}"/>
+                  </a:ext>
+                </a:extLst>
+              </p:cNvPr>
+              <p:cNvSpPr txBox="1">
+                <a:spLocks/>
+              </p:cNvSpPr>
+              <p:nvPr/>
+            </p:nvSpPr>
+            <p:spPr>
+              <a:xfrm>
+                <a:off x="1098570" y="1538630"/>
+                <a:ext cx="2704399" cy="4944362"/>
+              </a:xfrm>
+              <a:prstGeom prst="rect">
+                <a:avLst/>
+              </a:prstGeom>
+            </p:spPr>
+            <p:txBody>
+              <a:bodyPr vert="horz" lIns="91440" tIns="0" rIns="91440" bIns="0" rtlCol="0">
+                <a:normAutofit/>
+              </a:bodyPr>
+              <a:lstStyle>
+                <a:defPPr>
+                  <a:defRPr lang="fr-FR"/>
+                </a:defPPr>
+                <a:lvl1pPr marL="0" indent="0" algn="l" defTabSz="914400" rtl="0" eaLnBrk="1" latinLnBrk="0" hangingPunct="1">
+                  <a:lnSpc>
+                    <a:spcPct val="100000"/>
+                  </a:lnSpc>
+                  <a:spcBef>
+                    <a:spcPts val="0"/>
+                  </a:spcBef>
+                  <a:buFont typeface="Arial" panose="020B0604020202020204" pitchFamily="34" charset="0"/>
+                  <a:buNone/>
+                  <a:defRPr lang="fr-FR" sz="2400" kern="1200">
+                    <a:solidFill>
+                      <a:schemeClr val="accent6"/>
+                    </a:solidFill>
+                    <a:latin typeface="+mn-lt"/>
+                    <a:ea typeface="+mn-ea"/>
+                    <a:cs typeface="+mn-cs"/>
+                  </a:defRPr>
+                </a:lvl1pPr>
+                <a:lvl2pPr marL="347472" indent="-347472" algn="l" defTabSz="914400" rtl="0" eaLnBrk="1" latinLnBrk="0" hangingPunct="1">
+                  <a:lnSpc>
+                    <a:spcPct val="100000"/>
+                  </a:lnSpc>
+                  <a:spcBef>
+                    <a:spcPts val="0"/>
+                  </a:spcBef>
+                  <a:buFont typeface="Arial" panose="020B0604020202020204" pitchFamily="34" charset="0"/>
+                  <a:buChar char="•"/>
+                  <a:defRPr lang="fr-FR" sz="2400" kern="1200">
+                    <a:solidFill>
+                      <a:schemeClr val="accent6"/>
+                    </a:solidFill>
+                    <a:latin typeface="+mn-lt"/>
+                    <a:ea typeface="+mn-ea"/>
+                    <a:cs typeface="+mn-cs"/>
+                  </a:defRPr>
+                </a:lvl2pPr>
+                <a:lvl3pPr marL="685800" indent="-347472" algn="l" defTabSz="914400" rtl="0" eaLnBrk="1" latinLnBrk="0" hangingPunct="1">
+                  <a:lnSpc>
+                    <a:spcPct val="100000"/>
+                  </a:lnSpc>
+                  <a:spcBef>
+                    <a:spcPts val="0"/>
+                  </a:spcBef>
+                  <a:buFont typeface="Arial" panose="020B0604020202020204" pitchFamily="34" charset="0"/>
+                  <a:buChar char="•"/>
+                  <a:defRPr lang="fr-FR" sz="2400" kern="1200">
+                    <a:solidFill>
+                      <a:schemeClr val="accent6"/>
+                    </a:solidFill>
+                    <a:latin typeface="+mn-lt"/>
+                    <a:ea typeface="+mn-ea"/>
+                    <a:cs typeface="+mn-cs"/>
+                  </a:defRPr>
+                </a:lvl3pPr>
+                <a:lvl4pPr marL="1600200" indent="-347472" algn="l" defTabSz="914400" rtl="0" eaLnBrk="1" latinLnBrk="0" hangingPunct="1">
+                  <a:lnSpc>
+                    <a:spcPct val="100000"/>
+                  </a:lnSpc>
+                  <a:spcBef>
+                    <a:spcPts val="360"/>
+                  </a:spcBef>
+                  <a:buFont typeface="Arial" panose="020B0604020202020204" pitchFamily="34" charset="0"/>
+                  <a:buChar char="•"/>
+                  <a:defRPr lang="fr-FR" sz="1800" kern="1200">
+                    <a:solidFill>
+                      <a:schemeClr val="accent6"/>
+                    </a:solidFill>
+                    <a:latin typeface="+mn-lt"/>
+                    <a:ea typeface="+mn-ea"/>
+                    <a:cs typeface="+mn-cs"/>
+                  </a:defRPr>
+                </a:lvl4pPr>
+                <a:lvl5pPr marL="2057400" indent="-347472" algn="l" defTabSz="914400" rtl="0" eaLnBrk="1" latinLnBrk="0" hangingPunct="1">
+                  <a:lnSpc>
+                    <a:spcPct val="100000"/>
+                  </a:lnSpc>
+                  <a:spcBef>
+                    <a:spcPts val="360"/>
+                  </a:spcBef>
+                  <a:buFont typeface="Arial" panose="020B0604020202020204" pitchFamily="34" charset="0"/>
+                  <a:buChar char="•"/>
+                  <a:defRPr lang="fr-FR" sz="1800" kern="1200">
+                    <a:solidFill>
+                      <a:schemeClr val="accent6"/>
+                    </a:solidFill>
+                    <a:latin typeface="+mn-lt"/>
+                    <a:ea typeface="+mn-ea"/>
+                    <a:cs typeface="+mn-cs"/>
+                  </a:defRPr>
+                </a:lvl5pPr>
+                <a:lvl6pPr marL="2514600" indent="-228600" algn="l" defTabSz="914400" rtl="0" eaLnBrk="1" latinLnBrk="0" hangingPunct="1">
+                  <a:lnSpc>
+                    <a:spcPct val="90000"/>
+                  </a:lnSpc>
+                  <a:spcBef>
+                    <a:spcPts val="500"/>
+                  </a:spcBef>
+                  <a:buFont typeface="Arial" panose="020B0604020202020204" pitchFamily="34" charset="0"/>
+                  <a:buChar char="•"/>
+                  <a:defRPr lang="fr-FR" sz="1800" kern="1200">
+                    <a:solidFill>
+                      <a:schemeClr val="tx1"/>
+                    </a:solidFill>
+                    <a:latin typeface="+mn-lt"/>
+                    <a:ea typeface="+mn-ea"/>
+                    <a:cs typeface="+mn-cs"/>
+                  </a:defRPr>
+                </a:lvl6pPr>
+                <a:lvl7pPr marL="2971800" indent="-228600" algn="l" defTabSz="914400" rtl="0" eaLnBrk="1" latinLnBrk="0" hangingPunct="1">
+                  <a:lnSpc>
+                    <a:spcPct val="90000"/>
+                  </a:lnSpc>
+                  <a:spcBef>
+                    <a:spcPts val="500"/>
+                  </a:spcBef>
+                  <a:buFont typeface="Arial" panose="020B0604020202020204" pitchFamily="34" charset="0"/>
+                  <a:buChar char="•"/>
+                  <a:defRPr lang="fr-FR" sz="1800" kern="1200">
+                    <a:solidFill>
+                      <a:schemeClr val="tx1"/>
+                    </a:solidFill>
+                    <a:latin typeface="+mn-lt"/>
+                    <a:ea typeface="+mn-ea"/>
+                    <a:cs typeface="+mn-cs"/>
+                  </a:defRPr>
+                </a:lvl7pPr>
+                <a:lvl8pPr marL="3429000" indent="-228600" algn="l" defTabSz="914400" rtl="0" eaLnBrk="1" latinLnBrk="0" hangingPunct="1">
+                  <a:lnSpc>
+                    <a:spcPct val="90000"/>
+                  </a:lnSpc>
+                  <a:spcBef>
+                    <a:spcPts val="500"/>
+                  </a:spcBef>
+                  <a:buFont typeface="Arial" panose="020B0604020202020204" pitchFamily="34" charset="0"/>
+                  <a:buChar char="•"/>
+                  <a:defRPr lang="fr-FR" sz="1800" kern="1200">
+                    <a:solidFill>
+                      <a:schemeClr val="tx1"/>
+                    </a:solidFill>
+                    <a:latin typeface="+mn-lt"/>
+                    <a:ea typeface="+mn-ea"/>
+                    <a:cs typeface="+mn-cs"/>
+                  </a:defRPr>
+                </a:lvl8pPr>
+                <a:lvl9pPr marL="3886200" indent="-228600" algn="l" defTabSz="914400" rtl="0" eaLnBrk="1" latinLnBrk="0" hangingPunct="1">
+                  <a:lnSpc>
+                    <a:spcPct val="90000"/>
+                  </a:lnSpc>
+                  <a:spcBef>
+                    <a:spcPts val="500"/>
+                  </a:spcBef>
+                  <a:buFont typeface="Arial" panose="020B0604020202020204" pitchFamily="34" charset="0"/>
+                  <a:buChar char="•"/>
+                  <a:defRPr lang="fr-FR" sz="1800" kern="1200">
+                    <a:solidFill>
+                      <a:schemeClr val="tx1"/>
+                    </a:solidFill>
+                    <a:latin typeface="+mn-lt"/>
+                    <a:ea typeface="+mn-ea"/>
+                    <a:cs typeface="+mn-cs"/>
+                  </a:defRPr>
+                </a:lvl9pPr>
+              </a:lstStyle>
+              <a:p>
+                <a:pPr>
+                  <a:lnSpc>
+                    <a:spcPct val="150000"/>
+                  </a:lnSpc>
+                </a:pPr>
+                <a14:m>
+                  <m:oMathPara xmlns:m="http://schemas.openxmlformats.org/officeDocument/2006/math">
+                    <m:oMathParaPr>
+                      <m:jc m:val="centerGroup"/>
+                    </m:oMathParaPr>
+                    <m:oMath xmlns:m="http://schemas.openxmlformats.org/officeDocument/2006/math">
+                      <m:sSub>
+                        <m:sSubPr>
+                          <m:ctrlPr>
+                            <a:rPr lang="fr-FR" sz="2000" b="0" i="1" smtClean="0">
+                              <a:latin typeface="Cambria Math" panose="02040503050406030204" pitchFamily="18" charset="0"/>
+                            </a:rPr>
+                          </m:ctrlPr>
+                        </m:sSubPr>
+                        <m:e>
+                          <m:r>
+                            <a:rPr lang="fr-FR" sz="2000" b="0" i="1" smtClean="0">
+                              <a:latin typeface="Cambria Math" panose="02040503050406030204" pitchFamily="18" charset="0"/>
+                            </a:rPr>
+                            <m:t>h</m:t>
+                          </m:r>
+                        </m:e>
+                        <m:sub>
+                          <m:r>
+                            <a:rPr lang="fr-FR" sz="2000" b="0" i="1" smtClean="0">
+                              <a:latin typeface="Cambria Math" panose="02040503050406030204" pitchFamily="18" charset="0"/>
+                            </a:rPr>
+                            <m:t>0</m:t>
+                          </m:r>
+                        </m:sub>
+                      </m:sSub>
+                      <m:r>
+                        <a:rPr lang="fr-FR" sz="2000" b="0" i="1" smtClean="0">
+                          <a:latin typeface="Cambria Math" panose="02040503050406030204" pitchFamily="18" charset="0"/>
+                        </a:rPr>
+                        <m:t>=</m:t>
+                      </m:r>
+                      <m:r>
+                        <a:rPr lang="fr-FR" sz="2000" b="0" i="1" smtClean="0">
+                          <a:latin typeface="Cambria Math" panose="02040503050406030204" pitchFamily="18" charset="0"/>
+                        </a:rPr>
+                        <m:t>5</m:t>
+                      </m:r>
+                      <m:r>
+                        <a:rPr lang="fr-FR" sz="2000" b="0" i="1" smtClean="0">
+                          <a:latin typeface="Cambria Math" panose="02040503050406030204" pitchFamily="18" charset="0"/>
+                        </a:rPr>
+                        <m:t> </m:t>
+                      </m:r>
+                      <m:r>
+                        <a:rPr lang="fr-FR" sz="2000" b="0" i="1" smtClean="0">
+                          <a:latin typeface="Cambria Math" panose="02040503050406030204" pitchFamily="18" charset="0"/>
+                        </a:rPr>
+                        <m:t>𝑚𝑚</m:t>
+                      </m:r>
+                    </m:oMath>
+                  </m:oMathPara>
+                </a14:m>
+                <a:endParaRPr lang="fr-FR" sz="2000" b="0" dirty="0"/>
+              </a:p>
+              <a:p>
+                <a:pPr>
+                  <a:lnSpc>
+                    <a:spcPct val="150000"/>
+                  </a:lnSpc>
+                </a:pPr>
+                <a14:m>
+                  <m:oMathPara xmlns:m="http://schemas.openxmlformats.org/officeDocument/2006/math">
+                    <m:oMathParaPr>
+                      <m:jc m:val="centerGroup"/>
+                    </m:oMathParaPr>
+                    <m:oMath xmlns:m="http://schemas.openxmlformats.org/officeDocument/2006/math">
+                      <m:sSub>
+                        <m:sSubPr>
+                          <m:ctrlPr>
+                            <a:rPr lang="fr-FR" sz="2000" i="1">
+                              <a:latin typeface="Cambria Math" panose="02040503050406030204" pitchFamily="18" charset="0"/>
+                            </a:rPr>
+                          </m:ctrlPr>
+                        </m:sSubPr>
+                        <m:e>
+                          <m:r>
+                            <a:rPr lang="fr-FR" sz="2000" b="0" i="1" smtClean="0">
+                              <a:latin typeface="Cambria Math" panose="02040503050406030204" pitchFamily="18" charset="0"/>
+                            </a:rPr>
+                            <m:t>𝑟</m:t>
+                          </m:r>
+                        </m:e>
+                        <m:sub>
+                          <m:r>
+                            <a:rPr lang="fr-FR" sz="2000" i="1">
+                              <a:latin typeface="Cambria Math" panose="02040503050406030204" pitchFamily="18" charset="0"/>
+                            </a:rPr>
+                            <m:t>0</m:t>
+                          </m:r>
+                        </m:sub>
+                      </m:sSub>
+                      <m:r>
+                        <a:rPr lang="fr-FR" sz="2000" i="1">
+                          <a:latin typeface="Cambria Math" panose="02040503050406030204" pitchFamily="18" charset="0"/>
+                        </a:rPr>
+                        <m:t>=</m:t>
+                      </m:r>
+                      <m:r>
+                        <a:rPr lang="fr-FR" sz="2000" b="0" i="1" smtClean="0">
+                          <a:latin typeface="Cambria Math" panose="02040503050406030204" pitchFamily="18" charset="0"/>
+                        </a:rPr>
+                        <m:t>2</m:t>
+                      </m:r>
+                      <m:r>
+                        <a:rPr lang="fr-FR" sz="2000" b="0" i="1" smtClean="0">
+                          <a:latin typeface="Cambria Math" panose="02040503050406030204" pitchFamily="18" charset="0"/>
+                        </a:rPr>
+                        <m:t>,</m:t>
+                      </m:r>
+                      <m:r>
+                        <a:rPr lang="fr-FR" sz="2000" i="1">
+                          <a:latin typeface="Cambria Math" panose="02040503050406030204" pitchFamily="18" charset="0"/>
+                        </a:rPr>
+                        <m:t>5</m:t>
+                      </m:r>
+                      <m:r>
+                        <a:rPr lang="fr-FR" sz="2000" i="1">
+                          <a:latin typeface="Cambria Math" panose="02040503050406030204" pitchFamily="18" charset="0"/>
+                        </a:rPr>
+                        <m:t> </m:t>
+                      </m:r>
+                      <m:r>
+                        <a:rPr lang="fr-FR" sz="2000" i="1">
+                          <a:latin typeface="Cambria Math" panose="02040503050406030204" pitchFamily="18" charset="0"/>
+                        </a:rPr>
+                        <m:t>𝑚𝑚</m:t>
+                      </m:r>
+                    </m:oMath>
+                  </m:oMathPara>
+                </a14:m>
+                <a:endParaRPr lang="fr-FR" sz="2000" dirty="0"/>
+              </a:p>
+              <a:p>
+                <a:pPr>
+                  <a:lnSpc>
+                    <a:spcPct val="150000"/>
+                  </a:lnSpc>
+                </a:pPr>
+                <a:endParaRPr lang="fr-FR" sz="1000" dirty="0"/>
+              </a:p>
+              <a:p>
+                <a:pPr>
+                  <a:lnSpc>
+                    <a:spcPct val="150000"/>
+                  </a:lnSpc>
+                </a:pPr>
+                <a14:m>
+                  <m:oMathPara xmlns:m="http://schemas.openxmlformats.org/officeDocument/2006/math">
+                    <m:oMathParaPr>
+                      <m:jc m:val="centerGroup"/>
+                    </m:oMathParaPr>
+                    <m:oMath xmlns:m="http://schemas.openxmlformats.org/officeDocument/2006/math">
+                      <m:r>
+                        <a:rPr lang="fr-FR" sz="2000" i="1">
+                          <a:latin typeface="Cambria Math" panose="02040503050406030204" pitchFamily="18" charset="0"/>
+                          <a:ea typeface="Cambria Math" panose="02040503050406030204" pitchFamily="18" charset="0"/>
+                        </a:rPr>
+                        <m:t>𝜌</m:t>
+                      </m:r>
+                      <m:r>
+                        <a:rPr lang="fr-FR" sz="2000" i="1">
+                          <a:latin typeface="Cambria Math" panose="02040503050406030204" pitchFamily="18" charset="0"/>
+                        </a:rPr>
+                        <m:t>=</m:t>
+                      </m:r>
+                      <m:sSup>
+                        <m:sSupPr>
+                          <m:ctrlPr>
+                            <a:rPr lang="fr-FR" sz="2000" i="1">
+                              <a:latin typeface="Cambria Math" panose="02040503050406030204" pitchFamily="18" charset="0"/>
+                            </a:rPr>
+                          </m:ctrlPr>
+                        </m:sSupPr>
+                        <m:e>
+                          <m:r>
+                            <a:rPr lang="fr-FR" sz="2000" i="1">
+                              <a:latin typeface="Cambria Math" panose="02040503050406030204" pitchFamily="18" charset="0"/>
+                            </a:rPr>
+                            <m:t>1</m:t>
+                          </m:r>
+                          <m:r>
+                            <a:rPr lang="fr-FR" sz="2000" i="1">
+                              <a:latin typeface="Cambria Math" panose="02040503050406030204" pitchFamily="18" charset="0"/>
+                            </a:rPr>
+                            <m:t>,</m:t>
+                          </m:r>
+                          <m:r>
+                            <a:rPr lang="fr-FR" sz="2000" i="1">
+                              <a:latin typeface="Cambria Math" panose="02040503050406030204" pitchFamily="18" charset="0"/>
+                            </a:rPr>
+                            <m:t>28</m:t>
+                          </m:r>
+                          <m:r>
+                            <a:rPr lang="fr-FR" sz="2000" i="1">
+                              <a:latin typeface="Cambria Math" panose="02040503050406030204" pitchFamily="18" charset="0"/>
+                            </a:rPr>
+                            <m:t>.</m:t>
+                          </m:r>
+                          <m:r>
+                            <a:rPr lang="fr-FR" sz="2000" i="1">
+                              <a:latin typeface="Cambria Math" panose="02040503050406030204" pitchFamily="18" charset="0"/>
+                            </a:rPr>
+                            <m:t>10</m:t>
+                          </m:r>
+                        </m:e>
+                        <m:sup>
+                          <m:r>
+                            <a:rPr lang="fr-FR" sz="2000" i="1">
+                              <a:latin typeface="Cambria Math" panose="02040503050406030204" pitchFamily="18" charset="0"/>
+                            </a:rPr>
+                            <m:t>3</m:t>
+                          </m:r>
+                        </m:sup>
+                      </m:sSup>
+                      <m:r>
+                        <a:rPr lang="fr-FR" sz="2000" i="1">
+                          <a:latin typeface="Cambria Math" panose="02040503050406030204" pitchFamily="18" charset="0"/>
+                        </a:rPr>
+                        <m:t> </m:t>
+                      </m:r>
+                      <m:r>
+                        <a:rPr lang="fr-FR" sz="2000" i="1">
+                          <a:latin typeface="Cambria Math" panose="02040503050406030204" pitchFamily="18" charset="0"/>
+                        </a:rPr>
+                        <m:t>𝑘𝑔</m:t>
+                      </m:r>
+                      <m:r>
+                        <a:rPr lang="fr-FR" sz="2000" i="1">
+                          <a:latin typeface="Cambria Math" panose="02040503050406030204" pitchFamily="18" charset="0"/>
+                        </a:rPr>
+                        <m:t>/</m:t>
+                      </m:r>
+                      <m:sSup>
+                        <m:sSupPr>
+                          <m:ctrlPr>
+                            <a:rPr lang="fr-FR" sz="2000" i="1">
+                              <a:latin typeface="Cambria Math" panose="02040503050406030204" pitchFamily="18" charset="0"/>
+                            </a:rPr>
+                          </m:ctrlPr>
+                        </m:sSupPr>
+                        <m:e>
+                          <m:r>
+                            <a:rPr lang="fr-FR" sz="2000" i="1">
+                              <a:latin typeface="Cambria Math" panose="02040503050406030204" pitchFamily="18" charset="0"/>
+                            </a:rPr>
+                            <m:t>𝑚</m:t>
+                          </m:r>
+                        </m:e>
+                        <m:sup>
+                          <m:r>
+                            <a:rPr lang="fr-FR" sz="2000" i="1">
+                              <a:latin typeface="Cambria Math" panose="02040503050406030204" pitchFamily="18" charset="0"/>
+                            </a:rPr>
+                            <m:t>3</m:t>
+                          </m:r>
+                        </m:sup>
+                      </m:sSup>
+                    </m:oMath>
+                  </m:oMathPara>
+                </a14:m>
+                <a:endParaRPr lang="fr-FR" sz="2000" dirty="0"/>
+              </a:p>
+              <a:p>
+                <a:pPr>
+                  <a:lnSpc>
+                    <a:spcPct val="150000"/>
+                  </a:lnSpc>
+                </a:pPr>
+                <a14:m>
+                  <m:oMathPara xmlns:m="http://schemas.openxmlformats.org/officeDocument/2006/math">
+                    <m:oMathParaPr>
+                      <m:jc m:val="centerGroup"/>
+                    </m:oMathParaPr>
+                    <m:oMath xmlns:m="http://schemas.openxmlformats.org/officeDocument/2006/math">
+                      <m:r>
+                        <a:rPr lang="fr-FR" sz="2000" i="1">
+                          <a:latin typeface="Cambria Math" panose="02040503050406030204" pitchFamily="18" charset="0"/>
+                          <a:ea typeface="Cambria Math" panose="02040503050406030204" pitchFamily="18" charset="0"/>
+                        </a:rPr>
+                        <m:t>𝜎</m:t>
+                      </m:r>
+                      <m:r>
+                        <a:rPr lang="fr-FR" sz="2000" i="1">
+                          <a:latin typeface="Cambria Math" panose="02040503050406030204" pitchFamily="18" charset="0"/>
+                        </a:rPr>
+                        <m:t>=</m:t>
+                      </m:r>
+                      <m:r>
+                        <a:rPr lang="fr-FR" sz="2000" i="1">
+                          <a:latin typeface="Cambria Math" panose="02040503050406030204" pitchFamily="18" charset="0"/>
+                        </a:rPr>
+                        <m:t>0</m:t>
+                      </m:r>
+                      <m:r>
+                        <a:rPr lang="fr-FR" sz="2000" i="1">
+                          <a:latin typeface="Cambria Math" panose="02040503050406030204" pitchFamily="18" charset="0"/>
+                        </a:rPr>
+                        <m:t>,</m:t>
+                      </m:r>
+                      <m:r>
+                        <a:rPr lang="fr-FR" sz="2000" i="1">
+                          <a:latin typeface="Cambria Math" panose="02040503050406030204" pitchFamily="18" charset="0"/>
+                        </a:rPr>
+                        <m:t>072</m:t>
+                      </m:r>
+                      <m:r>
+                        <a:rPr lang="fr-FR" sz="2000" i="1">
+                          <a:latin typeface="Cambria Math" panose="02040503050406030204" pitchFamily="18" charset="0"/>
+                        </a:rPr>
+                        <m:t> /</m:t>
+                      </m:r>
+                      <m:sSup>
+                        <m:sSupPr>
+                          <m:ctrlPr>
+                            <a:rPr lang="fr-FR" sz="2000" i="1">
+                              <a:latin typeface="Cambria Math" panose="02040503050406030204" pitchFamily="18" charset="0"/>
+                            </a:rPr>
+                          </m:ctrlPr>
+                        </m:sSupPr>
+                        <m:e>
+                          <m:r>
+                            <a:rPr lang="fr-FR" sz="2000" i="1">
+                              <a:latin typeface="Cambria Math" panose="02040503050406030204" pitchFamily="18" charset="0"/>
+                            </a:rPr>
+                            <m:t>𝑚</m:t>
+                          </m:r>
+                        </m:e>
+                        <m:sup>
+                          <m:r>
+                            <a:rPr lang="fr-FR" sz="2000" i="1">
+                              <a:latin typeface="Cambria Math" panose="02040503050406030204" pitchFamily="18" charset="0"/>
+                            </a:rPr>
+                            <m:t>2</m:t>
+                          </m:r>
+                        </m:sup>
+                      </m:sSup>
+                    </m:oMath>
+                  </m:oMathPara>
+                </a14:m>
+                <a:endParaRPr lang="fr-FR" sz="2000" dirty="0"/>
+              </a:p>
+              <a:p>
+                <a:pPr>
+                  <a:lnSpc>
+                    <a:spcPct val="150000"/>
+                  </a:lnSpc>
+                </a:pPr>
+                <a:endParaRPr lang="fr-FR" sz="1100" dirty="0"/>
+              </a:p>
+              <a:p>
+                <a:pPr>
+                  <a:lnSpc>
+                    <a:spcPct val="150000"/>
+                  </a:lnSpc>
+                </a:pPr>
+                <a14:m>
+                  <m:oMathPara xmlns:m="http://schemas.openxmlformats.org/officeDocument/2006/math">
+                    <m:oMathParaPr>
+                      <m:jc m:val="centerGroup"/>
+                    </m:oMathParaPr>
+                    <m:oMath xmlns:m="http://schemas.openxmlformats.org/officeDocument/2006/math">
+                      <m:r>
+                        <a:rPr lang="fr-FR" sz="2000" b="0" i="1" smtClean="0">
+                          <a:latin typeface="Cambria Math" panose="02040503050406030204" pitchFamily="18" charset="0"/>
+                        </a:rPr>
+                        <m:t>𝑘</m:t>
+                      </m:r>
+                      <m:r>
+                        <a:rPr lang="fr-FR" sz="2000" i="1">
+                          <a:latin typeface="Cambria Math" panose="02040503050406030204" pitchFamily="18" charset="0"/>
+                        </a:rPr>
+                        <m:t>=</m:t>
+                      </m:r>
+                      <m:r>
+                        <a:rPr lang="fr-FR" sz="2000" b="0" i="1" smtClean="0">
+                          <a:latin typeface="Cambria Math" panose="02040503050406030204" pitchFamily="18" charset="0"/>
+                        </a:rPr>
+                        <m:t>90</m:t>
+                      </m:r>
+                      <m:r>
+                        <a:rPr lang="fr-FR" sz="2000" b="0" i="1" smtClean="0">
+                          <a:latin typeface="Cambria Math" panose="02040503050406030204" pitchFamily="18" charset="0"/>
+                        </a:rPr>
+                        <m:t> </m:t>
+                      </m:r>
+                      <m:r>
+                        <a:rPr lang="fr-FR" sz="2000" b="0" i="1" smtClean="0">
+                          <a:latin typeface="Cambria Math" panose="02040503050406030204" pitchFamily="18" charset="0"/>
+                        </a:rPr>
+                        <m:t>𝑃𝑎</m:t>
+                      </m:r>
+                      <m:r>
+                        <a:rPr lang="fr-FR" sz="2000" b="0" i="1" smtClean="0">
+                          <a:latin typeface="Cambria Math" panose="02040503050406030204" pitchFamily="18" charset="0"/>
+                        </a:rPr>
+                        <m:t>.</m:t>
+                      </m:r>
+                      <m:sSup>
+                        <m:sSupPr>
+                          <m:ctrlPr>
+                            <a:rPr lang="fr-FR" sz="2000" b="0" i="1" smtClean="0">
+                              <a:latin typeface="Cambria Math" panose="02040503050406030204" pitchFamily="18" charset="0"/>
+                            </a:rPr>
+                          </m:ctrlPr>
+                        </m:sSupPr>
+                        <m:e>
+                          <m:r>
+                            <a:rPr lang="fr-FR" sz="2000" b="0" i="1" smtClean="0">
+                              <a:latin typeface="Cambria Math" panose="02040503050406030204" pitchFamily="18" charset="0"/>
+                            </a:rPr>
+                            <m:t>𝑠</m:t>
+                          </m:r>
+                        </m:e>
+                        <m:sup>
+                          <m:r>
+                            <a:rPr lang="fr-FR" sz="2000" b="0" i="1" smtClean="0">
+                              <a:latin typeface="Cambria Math" panose="02040503050406030204" pitchFamily="18" charset="0"/>
+                            </a:rPr>
+                            <m:t>𝑚</m:t>
+                          </m:r>
+                        </m:sup>
+                      </m:sSup>
+                    </m:oMath>
+                  </m:oMathPara>
+                </a14:m>
+                <a:endParaRPr lang="fr-FR" sz="2000" dirty="0"/>
+              </a:p>
+              <a:p>
+                <a:pPr>
+                  <a:lnSpc>
+                    <a:spcPct val="150000"/>
+                  </a:lnSpc>
+                </a:pPr>
+                <a14:m>
+                  <m:oMathPara xmlns:m="http://schemas.openxmlformats.org/officeDocument/2006/math">
+                    <m:oMathParaPr>
+                      <m:jc m:val="centerGroup"/>
+                    </m:oMathParaPr>
+                    <m:oMath xmlns:m="http://schemas.openxmlformats.org/officeDocument/2006/math">
+                      <m:r>
+                        <a:rPr lang="fr-FR" sz="2000" b="0" i="1" smtClean="0">
+                          <a:latin typeface="Cambria Math" panose="02040503050406030204" pitchFamily="18" charset="0"/>
+                        </a:rPr>
+                        <m:t>𝑚</m:t>
+                      </m:r>
+                      <m:r>
+                        <a:rPr lang="fr-FR" sz="2000" i="1">
+                          <a:latin typeface="Cambria Math" panose="02040503050406030204" pitchFamily="18" charset="0"/>
+                        </a:rPr>
+                        <m:t>=</m:t>
+                      </m:r>
+                      <m:r>
+                        <a:rPr lang="fr-FR" sz="2000" b="0" i="1" smtClean="0">
+                          <a:latin typeface="Cambria Math" panose="02040503050406030204" pitchFamily="18" charset="0"/>
+                        </a:rPr>
+                        <m:t>0</m:t>
+                      </m:r>
+                      <m:r>
+                        <a:rPr lang="fr-FR" sz="2000" b="0" i="1" smtClean="0">
+                          <a:latin typeface="Cambria Math" panose="02040503050406030204" pitchFamily="18" charset="0"/>
+                        </a:rPr>
+                        <m:t>,</m:t>
+                      </m:r>
+                      <m:r>
+                        <a:rPr lang="fr-FR" sz="2000" b="0" i="1" smtClean="0">
+                          <a:latin typeface="Cambria Math" panose="02040503050406030204" pitchFamily="18" charset="0"/>
+                        </a:rPr>
+                        <m:t>4</m:t>
+                      </m:r>
+                    </m:oMath>
+                  </m:oMathPara>
+                </a14:m>
+                <a:endParaRPr lang="fr-FR" sz="2000" dirty="0"/>
+              </a:p>
+              <a:p>
+                <a:pPr>
+                  <a:lnSpc>
+                    <a:spcPct val="150000"/>
+                  </a:lnSpc>
+                </a:pPr>
+                <a14:m>
+                  <m:oMathPara xmlns:m="http://schemas.openxmlformats.org/officeDocument/2006/math">
+                    <m:oMathParaPr>
+                      <m:jc m:val="centerGroup"/>
+                    </m:oMathParaPr>
+                    <m:oMath xmlns:m="http://schemas.openxmlformats.org/officeDocument/2006/math">
+                      <m:sSub>
+                        <m:sSubPr>
+                          <m:ctrlPr>
+                            <a:rPr lang="fr-FR" sz="2000" i="1">
+                              <a:latin typeface="Cambria Math" panose="02040503050406030204" pitchFamily="18" charset="0"/>
+                            </a:rPr>
+                          </m:ctrlPr>
+                        </m:sSubPr>
+                        <m:e>
+                          <m:r>
+                            <a:rPr lang="fr-FR" sz="2000" i="1" smtClean="0">
+                              <a:latin typeface="Cambria Math" panose="02040503050406030204" pitchFamily="18" charset="0"/>
+                              <a:ea typeface="Cambria Math" panose="02040503050406030204" pitchFamily="18" charset="0"/>
+                            </a:rPr>
+                            <m:t>𝜏</m:t>
+                          </m:r>
+                        </m:e>
+                        <m:sub>
+                          <m:r>
+                            <a:rPr lang="fr-FR" sz="2000" i="1">
+                              <a:latin typeface="Cambria Math" panose="02040503050406030204" pitchFamily="18" charset="0"/>
+                            </a:rPr>
+                            <m:t>0</m:t>
+                          </m:r>
+                        </m:sub>
+                      </m:sSub>
+                      <m:r>
+                        <a:rPr lang="fr-FR" sz="2000" i="1">
+                          <a:latin typeface="Cambria Math" panose="02040503050406030204" pitchFamily="18" charset="0"/>
+                        </a:rPr>
+                        <m:t>=</m:t>
+                      </m:r>
+                      <m:r>
+                        <a:rPr lang="fr-FR" sz="2000" b="0" i="1" smtClean="0">
+                          <a:latin typeface="Cambria Math" panose="02040503050406030204" pitchFamily="18" charset="0"/>
+                        </a:rPr>
+                        <m:t>15</m:t>
+                      </m:r>
+                      <m:r>
+                        <a:rPr lang="fr-FR" sz="2000" b="0" i="1" smtClean="0">
+                          <a:latin typeface="Cambria Math" panose="02040503050406030204" pitchFamily="18" charset="0"/>
+                        </a:rPr>
+                        <m:t> </m:t>
+                      </m:r>
+                      <m:r>
+                        <a:rPr lang="fr-FR" sz="2000" b="0" i="1" smtClean="0">
+                          <a:latin typeface="Cambria Math" panose="02040503050406030204" pitchFamily="18" charset="0"/>
+                        </a:rPr>
+                        <m:t>𝑃𝑎</m:t>
+                      </m:r>
+                    </m:oMath>
+                  </m:oMathPara>
+                </a14:m>
+                <a:endParaRPr lang="fr-FR" sz="2000" dirty="0"/>
+              </a:p>
+              <a:p>
+                <a:pPr>
+                  <a:lnSpc>
+                    <a:spcPct val="150000"/>
+                  </a:lnSpc>
+                </a:pPr>
+                <a14:m>
+                  <m:oMathPara xmlns:m="http://schemas.openxmlformats.org/officeDocument/2006/math">
+                    <m:oMathParaPr>
+                      <m:jc m:val="centerGroup"/>
+                    </m:oMathParaPr>
+                    <m:oMath xmlns:m="http://schemas.openxmlformats.org/officeDocument/2006/math">
+                      <m:r>
+                        <a:rPr lang="fr-FR" b="1" i="1" smtClean="0">
+                          <a:latin typeface="Cambria Math" panose="02040503050406030204" pitchFamily="18" charset="0"/>
+                        </a:rPr>
+                        <m:t>𝑮</m:t>
+                      </m:r>
+                      <m:r>
+                        <a:rPr lang="fr-FR" b="1" i="1">
+                          <a:latin typeface="Cambria Math" panose="02040503050406030204" pitchFamily="18" charset="0"/>
+                        </a:rPr>
+                        <m:t>=</m:t>
+                      </m:r>
+                      <m:r>
+                        <a:rPr lang="fr-FR" b="1" i="1" smtClean="0">
+                          <a:latin typeface="Cambria Math" panose="02040503050406030204" pitchFamily="18" charset="0"/>
+                        </a:rPr>
+                        <m:t>𝟗𝟎𝟕</m:t>
+                      </m:r>
+                      <m:r>
+                        <a:rPr lang="fr-FR" b="1" i="1">
+                          <a:latin typeface="Cambria Math" panose="02040503050406030204" pitchFamily="18" charset="0"/>
+                        </a:rPr>
+                        <m:t> </m:t>
+                      </m:r>
+                      <m:r>
+                        <a:rPr lang="fr-FR" b="1" i="1">
+                          <a:latin typeface="Cambria Math" panose="02040503050406030204" pitchFamily="18" charset="0"/>
+                        </a:rPr>
+                        <m:t>𝑷𝒂</m:t>
+                      </m:r>
+                    </m:oMath>
+                  </m:oMathPara>
+                </a14:m>
+                <a:endParaRPr lang="fr-FR" b="1" dirty="0"/>
+              </a:p>
+              <a:p>
+                <a:pPr>
+                  <a:lnSpc>
+                    <a:spcPct val="150000"/>
+                  </a:lnSpc>
+                </a:pPr>
+                <a:endParaRPr lang="fr-FR" sz="2000" dirty="0"/>
+              </a:p>
+            </p:txBody>
+          </p:sp>
+        </mc:Choice>
+        <mc:Fallback>
+          <p:sp>
+            <p:nvSpPr>
+              <p:cNvPr id="7" name="Espace réservé du texte 2">
+                <a:extLst>
+                  <a:ext uri="{FF2B5EF4-FFF2-40B4-BE49-F238E27FC236}">
+                    <a16:creationId xmlns:a16="http://schemas.microsoft.com/office/drawing/2014/main" id="{642B383E-03B4-F061-D542-B7BCD189D79A}"/>
+                  </a:ext>
+                </a:extLst>
+              </p:cNvPr>
+              <p:cNvSpPr txBox="1">
+                <a:spLocks noRot="1" noChangeAspect="1" noMove="1" noResize="1" noEditPoints="1" noAdjustHandles="1" noChangeArrowheads="1" noChangeShapeType="1" noTextEdit="1"/>
+              </p:cNvSpPr>
+              <p:nvPr/>
+            </p:nvSpPr>
+            <p:spPr>
+              <a:xfrm>
+                <a:off x="1098570" y="1538630"/>
+                <a:ext cx="2704399" cy="4944362"/>
+              </a:xfrm>
+              <a:prstGeom prst="rect">
+                <a:avLst/>
+              </a:prstGeom>
+              <a:blipFill>
+                <a:blip r:embed="rId4"/>
+                <a:stretch>
+                  <a:fillRect/>
+                </a:stretch>
+              </a:blipFill>
+            </p:spPr>
+            <p:txBody>
+              <a:bodyPr/>
+              <a:lstStyle/>
+              <a:p>
+                <a:r>
+                  <a:rPr lang="fr-FR">
+                    <a:noFill/>
+                  </a:rPr>
+                  <a:t> </a:t>
+                </a:r>
+              </a:p>
+            </p:txBody>
+          </p:sp>
+        </mc:Fallback>
+      </mc:AlternateContent>
+    </p:spTree>
+    <p:extLst>
+      <p:ext uri="{BB962C8B-B14F-4D97-AF65-F5344CB8AC3E}">
+        <p14:creationId xmlns:p14="http://schemas.microsoft.com/office/powerpoint/2010/main" val="1686213229"/>
+      </p:ext>
+    </p:extLst>
+  </p:cSld>
+  <p:clrMapOvr>
+    <a:masterClrMapping/>
+  </p:clrMapOvr>
+</p:sld>
+</file>
+
+<file path=ppt/slides/slide5.xml><?xml version="1.0" encoding="utf-8"?>
+<p:sld xmlns:a="http://schemas.openxmlformats.org/drawingml/2006/main" xmlns:r="http://schemas.openxmlformats.org/officeDocument/2006/relationships" xmlns:p="http://schemas.openxmlformats.org/presentationml/2006/main">
+  <p:cSld>
+    <p:spTree>
+      <p:nvGrpSpPr>
+        <p:cNvPr id="1" name=""/>
+        <p:cNvGrpSpPr/>
+        <p:nvPr/>
+      </p:nvGrpSpPr>
+      <p:grpSpPr>
+        <a:xfrm>
+          <a:off x="0" y="0"/>
+          <a:ext cx="0" cy="0"/>
+          <a:chOff x="0" y="0"/>
+          <a:chExt cx="0" cy="0"/>
+        </a:xfrm>
+      </p:grpSpPr>
+      <p:pic>
+        <p:nvPicPr>
+          <p:cNvPr id="7" name="Image 6">
+            <a:extLst>
+              <a:ext uri="{FF2B5EF4-FFF2-40B4-BE49-F238E27FC236}">
+                <a16:creationId xmlns:a16="http://schemas.microsoft.com/office/drawing/2014/main" id="{98BE0CC3-4269-6CEB-0DB1-2542A6166A88}"/>
+              </a:ext>
+            </a:extLst>
+          </p:cNvPr>
+          <p:cNvPicPr>
+            <a:picLocks noChangeAspect="1"/>
+          </p:cNvPicPr>
+          <p:nvPr/>
+        </p:nvPicPr>
+        <p:blipFill>
+          <a:blip r:embed="rId2"/>
+          <a:stretch>
+            <a:fillRect/>
+          </a:stretch>
+        </p:blipFill>
+        <p:spPr>
+          <a:xfrm>
+            <a:off x="133563" y="1094975"/>
+            <a:ext cx="6200074" cy="3706159"/>
+          </a:xfrm>
+          <a:prstGeom prst="rect">
+            <a:avLst/>
+          </a:prstGeom>
+        </p:spPr>
+      </p:pic>
+      <p:sp>
+        <p:nvSpPr>
+          <p:cNvPr id="12" name="Titre 1">
+            <a:extLst>
+              <a:ext uri="{FF2B5EF4-FFF2-40B4-BE49-F238E27FC236}">
+                <a16:creationId xmlns:a16="http://schemas.microsoft.com/office/drawing/2014/main" id="{519FC911-B328-A0E9-F524-9E4307FC2AEB}"/>
+              </a:ext>
+            </a:extLst>
+          </p:cNvPr>
+          <p:cNvSpPr>
+            <a:spLocks noGrp="1"/>
+          </p:cNvSpPr>
+          <p:nvPr>
+            <p:ph type="title"/>
+          </p:nvPr>
+        </p:nvSpPr>
+        <p:spPr>
+          <a:xfrm>
+            <a:off x="840186" y="366454"/>
+            <a:ext cx="10511627" cy="646331"/>
+          </a:xfrm>
+        </p:spPr>
+        <p:txBody>
+          <a:bodyPr rtlCol="0"/>
+          <a:lstStyle>
+            <a:defPPr>
+              <a:defRPr lang="fr-FR"/>
+            </a:defPPr>
+          </a:lstStyle>
+          <a:p>
+            <a:pPr rtl="0"/>
+            <a:r>
+              <a:rPr lang="fr-FR" dirty="0"/>
+              <a:t>Etalement</a:t>
+            </a:r>
+          </a:p>
+        </p:txBody>
+      </p:sp>
+      <p:pic>
+        <p:nvPicPr>
+          <p:cNvPr id="14" name="Image 13">
+            <a:extLst>
+              <a:ext uri="{FF2B5EF4-FFF2-40B4-BE49-F238E27FC236}">
+                <a16:creationId xmlns:a16="http://schemas.microsoft.com/office/drawing/2014/main" id="{7991C441-A0A1-6A58-1F96-7B09A1CA3693}"/>
+              </a:ext>
+            </a:extLst>
+          </p:cNvPr>
+          <p:cNvPicPr>
+            <a:picLocks noChangeAspect="1"/>
+          </p:cNvPicPr>
+          <p:nvPr/>
+        </p:nvPicPr>
+        <p:blipFill>
+          <a:blip r:embed="rId3"/>
+          <a:srcRect l="1458"/>
+          <a:stretch>
+            <a:fillRect/>
+          </a:stretch>
+        </p:blipFill>
+        <p:spPr>
+          <a:xfrm>
+            <a:off x="5948737" y="3289463"/>
+            <a:ext cx="6109700" cy="3434973"/>
+          </a:xfrm>
+          <a:prstGeom prst="rect">
+            <a:avLst/>
+          </a:prstGeom>
+        </p:spPr>
+      </p:pic>
+      <mc:AlternateContent xmlns:mc="http://schemas.openxmlformats.org/markup-compatibility/2006">
+        <mc:Choice xmlns:a14="http://schemas.microsoft.com/office/drawing/2010/main" Requires="a14">
+          <p:sp>
+            <p:nvSpPr>
+              <p:cNvPr id="15" name="Espace réservé du texte 2">
+                <a:extLst>
+                  <a:ext uri="{FF2B5EF4-FFF2-40B4-BE49-F238E27FC236}">
+                    <a16:creationId xmlns:a16="http://schemas.microsoft.com/office/drawing/2014/main" id="{C5930DD3-6DA0-4D04-6D55-C0C6853E9299}"/>
+                  </a:ext>
+                </a:extLst>
+              </p:cNvPr>
+              <p:cNvSpPr txBox="1">
+                <a:spLocks/>
+              </p:cNvSpPr>
+              <p:nvPr/>
+            </p:nvSpPr>
+            <p:spPr>
+              <a:xfrm>
+                <a:off x="1727289" y="4772726"/>
+                <a:ext cx="2704399" cy="701136"/>
+              </a:xfrm>
+              <a:prstGeom prst="rect">
+                <a:avLst/>
+              </a:prstGeom>
+            </p:spPr>
+            <p:txBody>
+              <a:bodyPr vert="horz" lIns="91440" tIns="0" rIns="91440" bIns="0" rtlCol="0">
+                <a:normAutofit/>
+              </a:bodyPr>
+              <a:lstStyle>
+                <a:defPPr>
+                  <a:defRPr lang="fr-FR"/>
+                </a:defPPr>
+                <a:lvl1pPr marL="0" indent="0" algn="l" defTabSz="914400" rtl="0" eaLnBrk="1" latinLnBrk="0" hangingPunct="1">
+                  <a:lnSpc>
+                    <a:spcPct val="100000"/>
+                  </a:lnSpc>
+                  <a:spcBef>
+                    <a:spcPts val="0"/>
+                  </a:spcBef>
+                  <a:buFont typeface="Arial" panose="020B0604020202020204" pitchFamily="34" charset="0"/>
+                  <a:buNone/>
+                  <a:defRPr lang="fr-FR" sz="2400" kern="1200">
+                    <a:solidFill>
+                      <a:schemeClr val="accent6"/>
+                    </a:solidFill>
+                    <a:latin typeface="+mn-lt"/>
+                    <a:ea typeface="+mn-ea"/>
+                    <a:cs typeface="+mn-cs"/>
+                  </a:defRPr>
+                </a:lvl1pPr>
+                <a:lvl2pPr marL="347472" indent="-347472" algn="l" defTabSz="914400" rtl="0" eaLnBrk="1" latinLnBrk="0" hangingPunct="1">
+                  <a:lnSpc>
+                    <a:spcPct val="100000"/>
+                  </a:lnSpc>
+                  <a:spcBef>
+                    <a:spcPts val="0"/>
+                  </a:spcBef>
+                  <a:buFont typeface="Arial" panose="020B0604020202020204" pitchFamily="34" charset="0"/>
+                  <a:buChar char="•"/>
+                  <a:defRPr lang="fr-FR" sz="2400" kern="1200">
+                    <a:solidFill>
+                      <a:schemeClr val="accent6"/>
+                    </a:solidFill>
+                    <a:latin typeface="+mn-lt"/>
+                    <a:ea typeface="+mn-ea"/>
+                    <a:cs typeface="+mn-cs"/>
+                  </a:defRPr>
+                </a:lvl2pPr>
+                <a:lvl3pPr marL="685800" indent="-347472" algn="l" defTabSz="914400" rtl="0" eaLnBrk="1" latinLnBrk="0" hangingPunct="1">
+                  <a:lnSpc>
+                    <a:spcPct val="100000"/>
+                  </a:lnSpc>
+                  <a:spcBef>
+                    <a:spcPts val="0"/>
+                  </a:spcBef>
+                  <a:buFont typeface="Arial" panose="020B0604020202020204" pitchFamily="34" charset="0"/>
+                  <a:buChar char="•"/>
+                  <a:defRPr lang="fr-FR" sz="2400" kern="1200">
+                    <a:solidFill>
+                      <a:schemeClr val="accent6"/>
+                    </a:solidFill>
+                    <a:latin typeface="+mn-lt"/>
+                    <a:ea typeface="+mn-ea"/>
+                    <a:cs typeface="+mn-cs"/>
+                  </a:defRPr>
+                </a:lvl3pPr>
+                <a:lvl4pPr marL="1600200" indent="-347472" algn="l" defTabSz="914400" rtl="0" eaLnBrk="1" latinLnBrk="0" hangingPunct="1">
+                  <a:lnSpc>
+                    <a:spcPct val="100000"/>
+                  </a:lnSpc>
+                  <a:spcBef>
+                    <a:spcPts val="360"/>
+                  </a:spcBef>
+                  <a:buFont typeface="Arial" panose="020B0604020202020204" pitchFamily="34" charset="0"/>
+                  <a:buChar char="•"/>
+                  <a:defRPr lang="fr-FR" sz="1800" kern="1200">
+                    <a:solidFill>
+                      <a:schemeClr val="accent6"/>
+                    </a:solidFill>
+                    <a:latin typeface="+mn-lt"/>
+                    <a:ea typeface="+mn-ea"/>
+                    <a:cs typeface="+mn-cs"/>
+                  </a:defRPr>
+                </a:lvl4pPr>
+                <a:lvl5pPr marL="2057400" indent="-347472" algn="l" defTabSz="914400" rtl="0" eaLnBrk="1" latinLnBrk="0" hangingPunct="1">
+                  <a:lnSpc>
+                    <a:spcPct val="100000"/>
+                  </a:lnSpc>
+                  <a:spcBef>
+                    <a:spcPts val="360"/>
+                  </a:spcBef>
+                  <a:buFont typeface="Arial" panose="020B0604020202020204" pitchFamily="34" charset="0"/>
+                  <a:buChar char="•"/>
+                  <a:defRPr lang="fr-FR" sz="1800" kern="1200">
+                    <a:solidFill>
+                      <a:schemeClr val="accent6"/>
+                    </a:solidFill>
+                    <a:latin typeface="+mn-lt"/>
+                    <a:ea typeface="+mn-ea"/>
+                    <a:cs typeface="+mn-cs"/>
+                  </a:defRPr>
+                </a:lvl5pPr>
+                <a:lvl6pPr marL="2514600" indent="-228600" algn="l" defTabSz="914400" rtl="0" eaLnBrk="1" latinLnBrk="0" hangingPunct="1">
+                  <a:lnSpc>
+                    <a:spcPct val="90000"/>
+                  </a:lnSpc>
+                  <a:spcBef>
+                    <a:spcPts val="500"/>
+                  </a:spcBef>
+                  <a:buFont typeface="Arial" panose="020B0604020202020204" pitchFamily="34" charset="0"/>
+                  <a:buChar char="•"/>
+                  <a:defRPr lang="fr-FR" sz="1800" kern="1200">
+                    <a:solidFill>
+                      <a:schemeClr val="tx1"/>
+                    </a:solidFill>
+                    <a:latin typeface="+mn-lt"/>
+                    <a:ea typeface="+mn-ea"/>
+                    <a:cs typeface="+mn-cs"/>
+                  </a:defRPr>
+                </a:lvl6pPr>
+                <a:lvl7pPr marL="2971800" indent="-228600" algn="l" defTabSz="914400" rtl="0" eaLnBrk="1" latinLnBrk="0" hangingPunct="1">
+                  <a:lnSpc>
+                    <a:spcPct val="90000"/>
+                  </a:lnSpc>
+                  <a:spcBef>
+                    <a:spcPts val="500"/>
+                  </a:spcBef>
+                  <a:buFont typeface="Arial" panose="020B0604020202020204" pitchFamily="34" charset="0"/>
+                  <a:buChar char="•"/>
+                  <a:defRPr lang="fr-FR" sz="1800" kern="1200">
+                    <a:solidFill>
+                      <a:schemeClr val="tx1"/>
+                    </a:solidFill>
+                    <a:latin typeface="+mn-lt"/>
+                    <a:ea typeface="+mn-ea"/>
+                    <a:cs typeface="+mn-cs"/>
+                  </a:defRPr>
+                </a:lvl7pPr>
+                <a:lvl8pPr marL="3429000" indent="-228600" algn="l" defTabSz="914400" rtl="0" eaLnBrk="1" latinLnBrk="0" hangingPunct="1">
+                  <a:lnSpc>
+                    <a:spcPct val="90000"/>
+                  </a:lnSpc>
+                  <a:spcBef>
+                    <a:spcPts val="500"/>
+                  </a:spcBef>
+                  <a:buFont typeface="Arial" panose="020B0604020202020204" pitchFamily="34" charset="0"/>
+                  <a:buChar char="•"/>
+                  <a:defRPr lang="fr-FR" sz="1800" kern="1200">
+                    <a:solidFill>
+                      <a:schemeClr val="tx1"/>
+                    </a:solidFill>
+                    <a:latin typeface="+mn-lt"/>
+                    <a:ea typeface="+mn-ea"/>
+                    <a:cs typeface="+mn-cs"/>
+                  </a:defRPr>
+                </a:lvl8pPr>
+                <a:lvl9pPr marL="3886200" indent="-228600" algn="l" defTabSz="914400" rtl="0" eaLnBrk="1" latinLnBrk="0" hangingPunct="1">
+                  <a:lnSpc>
+                    <a:spcPct val="90000"/>
+                  </a:lnSpc>
+                  <a:spcBef>
+                    <a:spcPts val="500"/>
+                  </a:spcBef>
+                  <a:buFont typeface="Arial" panose="020B0604020202020204" pitchFamily="34" charset="0"/>
+                  <a:buChar char="•"/>
+                  <a:defRPr lang="fr-FR" sz="1800" kern="1200">
+                    <a:solidFill>
+                      <a:schemeClr val="tx1"/>
+                    </a:solidFill>
+                    <a:latin typeface="+mn-lt"/>
+                    <a:ea typeface="+mn-ea"/>
+                    <a:cs typeface="+mn-cs"/>
+                  </a:defRPr>
+                </a:lvl9pPr>
+              </a:lstStyle>
+              <a:p>
+                <a:pPr>
+                  <a:lnSpc>
+                    <a:spcPct val="150000"/>
+                  </a:lnSpc>
+                </a:pPr>
+                <a14:m>
+                  <m:oMathPara xmlns:m="http://schemas.openxmlformats.org/officeDocument/2006/math">
+                    <m:oMathParaPr>
+                      <m:jc m:val="centerGroup"/>
+                    </m:oMathParaPr>
+                    <m:oMath xmlns:m="http://schemas.openxmlformats.org/officeDocument/2006/math">
+                      <m:r>
+                        <a:rPr lang="fr-FR" b="1" i="1" smtClean="0">
+                          <a:latin typeface="Cambria Math" panose="02040503050406030204" pitchFamily="18" charset="0"/>
+                        </a:rPr>
+                        <m:t>𝑮</m:t>
+                      </m:r>
+                      <m:r>
+                        <a:rPr lang="fr-FR" b="1" i="1">
+                          <a:latin typeface="Cambria Math" panose="02040503050406030204" pitchFamily="18" charset="0"/>
+                        </a:rPr>
+                        <m:t>=</m:t>
+                      </m:r>
+                      <m:r>
+                        <a:rPr lang="fr-FR" b="1" i="1" smtClean="0">
+                          <a:latin typeface="Cambria Math" panose="02040503050406030204" pitchFamily="18" charset="0"/>
+                        </a:rPr>
+                        <m:t>𝟐𝟐𝟎</m:t>
+                      </m:r>
+                      <m:r>
+                        <a:rPr lang="fr-FR" b="1" i="1">
+                          <a:latin typeface="Cambria Math" panose="02040503050406030204" pitchFamily="18" charset="0"/>
+                        </a:rPr>
+                        <m:t> </m:t>
+                      </m:r>
+                      <m:r>
+                        <a:rPr lang="fr-FR" b="1" i="1">
+                          <a:latin typeface="Cambria Math" panose="02040503050406030204" pitchFamily="18" charset="0"/>
+                        </a:rPr>
+                        <m:t>𝑷𝒂</m:t>
+                      </m:r>
+                    </m:oMath>
+                  </m:oMathPara>
+                </a14:m>
+                <a:endParaRPr lang="fr-FR" b="1" dirty="0"/>
+              </a:p>
+              <a:p>
+                <a:pPr>
+                  <a:lnSpc>
+                    <a:spcPct val="150000"/>
+                  </a:lnSpc>
+                </a:pPr>
+                <a:endParaRPr lang="fr-FR" sz="2000" dirty="0"/>
+              </a:p>
+            </p:txBody>
+          </p:sp>
+        </mc:Choice>
+        <mc:Fallback>
+          <p:sp>
+            <p:nvSpPr>
+              <p:cNvPr id="15" name="Espace réservé du texte 2">
+                <a:extLst>
+                  <a:ext uri="{FF2B5EF4-FFF2-40B4-BE49-F238E27FC236}">
+                    <a16:creationId xmlns:a16="http://schemas.microsoft.com/office/drawing/2014/main" id="{C5930DD3-6DA0-4D04-6D55-C0C6853E9299}"/>
+                  </a:ext>
+                </a:extLst>
+              </p:cNvPr>
+              <p:cNvSpPr txBox="1">
+                <a:spLocks noRot="1" noChangeAspect="1" noMove="1" noResize="1" noEditPoints="1" noAdjustHandles="1" noChangeArrowheads="1" noChangeShapeType="1" noTextEdit="1"/>
+              </p:cNvSpPr>
+              <p:nvPr/>
+            </p:nvSpPr>
+            <p:spPr>
+              <a:xfrm>
+                <a:off x="1727289" y="4772726"/>
+                <a:ext cx="2704399" cy="701136"/>
+              </a:xfrm>
+              <a:prstGeom prst="rect">
+                <a:avLst/>
+              </a:prstGeom>
+              <a:blipFill>
+                <a:blip r:embed="rId4"/>
+                <a:stretch>
+                  <a:fillRect/>
+                </a:stretch>
+              </a:blipFill>
+            </p:spPr>
+            <p:txBody>
+              <a:bodyPr/>
+              <a:lstStyle/>
+              <a:p>
+                <a:r>
+                  <a:rPr lang="fr-FR">
+                    <a:noFill/>
+                  </a:rPr>
+                  <a:t> </a:t>
+                </a:r>
+              </a:p>
+            </p:txBody>
+          </p:sp>
+        </mc:Fallback>
+      </mc:AlternateContent>
+      <mc:AlternateContent xmlns:mc="http://schemas.openxmlformats.org/markup-compatibility/2006">
+        <mc:Choice xmlns:a14="http://schemas.microsoft.com/office/drawing/2010/main" Requires="a14">
+          <p:sp>
+            <p:nvSpPr>
+              <p:cNvPr id="16" name="Espace réservé du texte 2">
+                <a:extLst>
+                  <a:ext uri="{FF2B5EF4-FFF2-40B4-BE49-F238E27FC236}">
+                    <a16:creationId xmlns:a16="http://schemas.microsoft.com/office/drawing/2014/main" id="{F923FE4F-E68C-2761-F4FF-744969602A56}"/>
+                  </a:ext>
+                </a:extLst>
+              </p:cNvPr>
+              <p:cNvSpPr txBox="1">
+                <a:spLocks/>
+              </p:cNvSpPr>
+              <p:nvPr/>
+            </p:nvSpPr>
+            <p:spPr>
+              <a:xfrm>
+                <a:off x="7739764" y="2813492"/>
+                <a:ext cx="2704399" cy="646331"/>
+              </a:xfrm>
+              <a:prstGeom prst="rect">
+                <a:avLst/>
+              </a:prstGeom>
+            </p:spPr>
+            <p:txBody>
+              <a:bodyPr vert="horz" lIns="91440" tIns="0" rIns="91440" bIns="0" rtlCol="0">
+                <a:normAutofit/>
+              </a:bodyPr>
+              <a:lstStyle>
+                <a:defPPr>
+                  <a:defRPr lang="fr-FR"/>
+                </a:defPPr>
+                <a:lvl1pPr marL="0" indent="0" algn="l" defTabSz="914400" rtl="0" eaLnBrk="1" latinLnBrk="0" hangingPunct="1">
+                  <a:lnSpc>
+                    <a:spcPct val="100000"/>
+                  </a:lnSpc>
+                  <a:spcBef>
+                    <a:spcPts val="0"/>
+                  </a:spcBef>
+                  <a:buFont typeface="Arial" panose="020B0604020202020204" pitchFamily="34" charset="0"/>
+                  <a:buNone/>
+                  <a:defRPr lang="fr-FR" sz="2400" kern="1200">
+                    <a:solidFill>
+                      <a:schemeClr val="accent6"/>
+                    </a:solidFill>
+                    <a:latin typeface="+mn-lt"/>
+                    <a:ea typeface="+mn-ea"/>
+                    <a:cs typeface="+mn-cs"/>
+                  </a:defRPr>
+                </a:lvl1pPr>
+                <a:lvl2pPr marL="347472" indent="-347472" algn="l" defTabSz="914400" rtl="0" eaLnBrk="1" latinLnBrk="0" hangingPunct="1">
+                  <a:lnSpc>
+                    <a:spcPct val="100000"/>
+                  </a:lnSpc>
+                  <a:spcBef>
+                    <a:spcPts val="0"/>
+                  </a:spcBef>
+                  <a:buFont typeface="Arial" panose="020B0604020202020204" pitchFamily="34" charset="0"/>
+                  <a:buChar char="•"/>
+                  <a:defRPr lang="fr-FR" sz="2400" kern="1200">
+                    <a:solidFill>
+                      <a:schemeClr val="accent6"/>
+                    </a:solidFill>
+                    <a:latin typeface="+mn-lt"/>
+                    <a:ea typeface="+mn-ea"/>
+                    <a:cs typeface="+mn-cs"/>
+                  </a:defRPr>
+                </a:lvl2pPr>
+                <a:lvl3pPr marL="685800" indent="-347472" algn="l" defTabSz="914400" rtl="0" eaLnBrk="1" latinLnBrk="0" hangingPunct="1">
+                  <a:lnSpc>
+                    <a:spcPct val="100000"/>
+                  </a:lnSpc>
+                  <a:spcBef>
+                    <a:spcPts val="0"/>
+                  </a:spcBef>
+                  <a:buFont typeface="Arial" panose="020B0604020202020204" pitchFamily="34" charset="0"/>
+                  <a:buChar char="•"/>
+                  <a:defRPr lang="fr-FR" sz="2400" kern="1200">
+                    <a:solidFill>
+                      <a:schemeClr val="accent6"/>
+                    </a:solidFill>
+                    <a:latin typeface="+mn-lt"/>
+                    <a:ea typeface="+mn-ea"/>
+                    <a:cs typeface="+mn-cs"/>
+                  </a:defRPr>
+                </a:lvl3pPr>
+                <a:lvl4pPr marL="1600200" indent="-347472" algn="l" defTabSz="914400" rtl="0" eaLnBrk="1" latinLnBrk="0" hangingPunct="1">
+                  <a:lnSpc>
+                    <a:spcPct val="100000"/>
+                  </a:lnSpc>
+                  <a:spcBef>
+                    <a:spcPts val="360"/>
+                  </a:spcBef>
+                  <a:buFont typeface="Arial" panose="020B0604020202020204" pitchFamily="34" charset="0"/>
+                  <a:buChar char="•"/>
+                  <a:defRPr lang="fr-FR" sz="1800" kern="1200">
+                    <a:solidFill>
+                      <a:schemeClr val="accent6"/>
+                    </a:solidFill>
+                    <a:latin typeface="+mn-lt"/>
+                    <a:ea typeface="+mn-ea"/>
+                    <a:cs typeface="+mn-cs"/>
+                  </a:defRPr>
+                </a:lvl4pPr>
+                <a:lvl5pPr marL="2057400" indent="-347472" algn="l" defTabSz="914400" rtl="0" eaLnBrk="1" latinLnBrk="0" hangingPunct="1">
+                  <a:lnSpc>
+                    <a:spcPct val="100000"/>
+                  </a:lnSpc>
+                  <a:spcBef>
+                    <a:spcPts val="360"/>
+                  </a:spcBef>
+                  <a:buFont typeface="Arial" panose="020B0604020202020204" pitchFamily="34" charset="0"/>
+                  <a:buChar char="•"/>
+                  <a:defRPr lang="fr-FR" sz="1800" kern="1200">
+                    <a:solidFill>
+                      <a:schemeClr val="accent6"/>
+                    </a:solidFill>
+                    <a:latin typeface="+mn-lt"/>
+                    <a:ea typeface="+mn-ea"/>
+                    <a:cs typeface="+mn-cs"/>
+                  </a:defRPr>
+                </a:lvl5pPr>
+                <a:lvl6pPr marL="2514600" indent="-228600" algn="l" defTabSz="914400" rtl="0" eaLnBrk="1" latinLnBrk="0" hangingPunct="1">
+                  <a:lnSpc>
+                    <a:spcPct val="90000"/>
+                  </a:lnSpc>
+                  <a:spcBef>
+                    <a:spcPts val="500"/>
+                  </a:spcBef>
+                  <a:buFont typeface="Arial" panose="020B0604020202020204" pitchFamily="34" charset="0"/>
+                  <a:buChar char="•"/>
+                  <a:defRPr lang="fr-FR" sz="1800" kern="1200">
+                    <a:solidFill>
+                      <a:schemeClr val="tx1"/>
+                    </a:solidFill>
+                    <a:latin typeface="+mn-lt"/>
+                    <a:ea typeface="+mn-ea"/>
+                    <a:cs typeface="+mn-cs"/>
+                  </a:defRPr>
+                </a:lvl6pPr>
+                <a:lvl7pPr marL="2971800" indent="-228600" algn="l" defTabSz="914400" rtl="0" eaLnBrk="1" latinLnBrk="0" hangingPunct="1">
+                  <a:lnSpc>
+                    <a:spcPct val="90000"/>
+                  </a:lnSpc>
+                  <a:spcBef>
+                    <a:spcPts val="500"/>
+                  </a:spcBef>
+                  <a:buFont typeface="Arial" panose="020B0604020202020204" pitchFamily="34" charset="0"/>
+                  <a:buChar char="•"/>
+                  <a:defRPr lang="fr-FR" sz="1800" kern="1200">
+                    <a:solidFill>
+                      <a:schemeClr val="tx1"/>
+                    </a:solidFill>
+                    <a:latin typeface="+mn-lt"/>
+                    <a:ea typeface="+mn-ea"/>
+                    <a:cs typeface="+mn-cs"/>
+                  </a:defRPr>
+                </a:lvl7pPr>
+                <a:lvl8pPr marL="3429000" indent="-228600" algn="l" defTabSz="914400" rtl="0" eaLnBrk="1" latinLnBrk="0" hangingPunct="1">
+                  <a:lnSpc>
+                    <a:spcPct val="90000"/>
+                  </a:lnSpc>
+                  <a:spcBef>
+                    <a:spcPts val="500"/>
+                  </a:spcBef>
+                  <a:buFont typeface="Arial" panose="020B0604020202020204" pitchFamily="34" charset="0"/>
+                  <a:buChar char="•"/>
+                  <a:defRPr lang="fr-FR" sz="1800" kern="1200">
+                    <a:solidFill>
+                      <a:schemeClr val="tx1"/>
+                    </a:solidFill>
+                    <a:latin typeface="+mn-lt"/>
+                    <a:ea typeface="+mn-ea"/>
+                    <a:cs typeface="+mn-cs"/>
+                  </a:defRPr>
+                </a:lvl8pPr>
+                <a:lvl9pPr marL="3886200" indent="-228600" algn="l" defTabSz="914400" rtl="0" eaLnBrk="1" latinLnBrk="0" hangingPunct="1">
+                  <a:lnSpc>
+                    <a:spcPct val="90000"/>
+                  </a:lnSpc>
+                  <a:spcBef>
+                    <a:spcPts val="500"/>
+                  </a:spcBef>
+                  <a:buFont typeface="Arial" panose="020B0604020202020204" pitchFamily="34" charset="0"/>
+                  <a:buChar char="•"/>
+                  <a:defRPr lang="fr-FR" sz="1800" kern="1200">
+                    <a:solidFill>
+                      <a:schemeClr val="tx1"/>
+                    </a:solidFill>
+                    <a:latin typeface="+mn-lt"/>
+                    <a:ea typeface="+mn-ea"/>
+                    <a:cs typeface="+mn-cs"/>
+                  </a:defRPr>
+                </a:lvl9pPr>
+              </a:lstStyle>
+              <a:p>
+                <a:pPr>
+                  <a:lnSpc>
+                    <a:spcPct val="150000"/>
+                  </a:lnSpc>
+                </a:pPr>
+                <a14:m>
+                  <m:oMathPara xmlns:m="http://schemas.openxmlformats.org/officeDocument/2006/math">
+                    <m:oMathParaPr>
+                      <m:jc m:val="centerGroup"/>
+                    </m:oMathParaPr>
+                    <m:oMath xmlns:m="http://schemas.openxmlformats.org/officeDocument/2006/math">
+                      <m:r>
+                        <a:rPr lang="fr-FR" b="1" i="1" smtClean="0">
+                          <a:latin typeface="Cambria Math" panose="02040503050406030204" pitchFamily="18" charset="0"/>
+                        </a:rPr>
+                        <m:t>𝑮</m:t>
+                      </m:r>
+                      <m:r>
+                        <a:rPr lang="fr-FR" b="1" i="1">
+                          <a:latin typeface="Cambria Math" panose="02040503050406030204" pitchFamily="18" charset="0"/>
+                        </a:rPr>
+                        <m:t>=</m:t>
+                      </m:r>
+                      <m:r>
+                        <a:rPr lang="fr-FR" b="1" i="1" smtClean="0">
+                          <a:latin typeface="Cambria Math" panose="02040503050406030204" pitchFamily="18" charset="0"/>
+                        </a:rPr>
+                        <m:t>𝟏𝟎𝟎</m:t>
+                      </m:r>
+                      <m:r>
+                        <a:rPr lang="fr-FR" b="1" i="1">
+                          <a:latin typeface="Cambria Math" panose="02040503050406030204" pitchFamily="18" charset="0"/>
+                        </a:rPr>
+                        <m:t> </m:t>
+                      </m:r>
+                      <m:r>
+                        <a:rPr lang="fr-FR" b="1" i="1">
+                          <a:latin typeface="Cambria Math" panose="02040503050406030204" pitchFamily="18" charset="0"/>
+                        </a:rPr>
+                        <m:t>𝑷𝒂</m:t>
+                      </m:r>
+                    </m:oMath>
+                  </m:oMathPara>
+                </a14:m>
+                <a:endParaRPr lang="fr-FR" b="1" dirty="0"/>
+              </a:p>
+              <a:p>
+                <a:pPr>
+                  <a:lnSpc>
+                    <a:spcPct val="150000"/>
+                  </a:lnSpc>
+                </a:pPr>
+                <a:endParaRPr lang="fr-FR" sz="2000" dirty="0"/>
+              </a:p>
+            </p:txBody>
+          </p:sp>
+        </mc:Choice>
+        <mc:Fallback>
+          <p:sp>
+            <p:nvSpPr>
+              <p:cNvPr id="16" name="Espace réservé du texte 2">
+                <a:extLst>
+                  <a:ext uri="{FF2B5EF4-FFF2-40B4-BE49-F238E27FC236}">
+                    <a16:creationId xmlns:a16="http://schemas.microsoft.com/office/drawing/2014/main" id="{F923FE4F-E68C-2761-F4FF-744969602A56}"/>
+                  </a:ext>
+                </a:extLst>
+              </p:cNvPr>
+              <p:cNvSpPr txBox="1">
+                <a:spLocks noRot="1" noChangeAspect="1" noMove="1" noResize="1" noEditPoints="1" noAdjustHandles="1" noChangeArrowheads="1" noChangeShapeType="1" noTextEdit="1"/>
+              </p:cNvSpPr>
+              <p:nvPr/>
+            </p:nvSpPr>
+            <p:spPr>
+              <a:xfrm>
+                <a:off x="7739764" y="2813492"/>
+                <a:ext cx="2704399" cy="646331"/>
+              </a:xfrm>
+              <a:prstGeom prst="rect">
+                <a:avLst/>
+              </a:prstGeom>
+              <a:blipFill>
+                <a:blip r:embed="rId5"/>
+                <a:stretch>
+                  <a:fillRect/>
+                </a:stretch>
+              </a:blipFill>
+            </p:spPr>
+            <p:txBody>
+              <a:bodyPr/>
+              <a:lstStyle/>
+              <a:p>
+                <a:r>
+                  <a:rPr lang="fr-FR">
+                    <a:noFill/>
+                  </a:rPr>
+                  <a:t> </a:t>
+                </a:r>
+              </a:p>
+            </p:txBody>
+          </p:sp>
+        </mc:Fallback>
+      </mc:AlternateContent>
+    </p:spTree>
+    <p:extLst>
+      <p:ext uri="{BB962C8B-B14F-4D97-AF65-F5344CB8AC3E}">
+        <p14:creationId xmlns:p14="http://schemas.microsoft.com/office/powerpoint/2010/main" val="4106121250"/>
+      </p:ext>
+    </p:extLst>
+  </p:cSld>
+  <p:clrMapOvr>
+    <a:masterClrMapping/>
+  </p:clrMapOvr>
+</p:sld>
+</file>
+
+<file path=ppt/slides/slide6.xml><?xml version="1.0" encoding="utf-8"?>
+<p:sld xmlns:a="http://schemas.openxmlformats.org/drawingml/2006/main" xmlns:r="http://schemas.openxmlformats.org/officeDocument/2006/relationships" xmlns:p="http://schemas.openxmlformats.org/presentationml/2006/main">
+  <p:cSld>
+    <p:spTree>
+      <p:nvGrpSpPr>
+        <p:cNvPr id="1" name=""/>
+        <p:cNvGrpSpPr/>
+        <p:nvPr/>
+      </p:nvGrpSpPr>
+      <p:grpSpPr>
+        <a:xfrm>
+          <a:off x="0" y="0"/>
+          <a:ext cx="0" cy="0"/>
+          <a:chOff x="0" y="0"/>
+          <a:chExt cx="0" cy="0"/>
+        </a:xfrm>
+      </p:grpSpPr>
+      <p:sp>
+        <p:nvSpPr>
+          <p:cNvPr id="7" name="Titre 1">
+            <a:extLst>
+              <a:ext uri="{FF2B5EF4-FFF2-40B4-BE49-F238E27FC236}">
+                <a16:creationId xmlns:a16="http://schemas.microsoft.com/office/drawing/2014/main" id="{3553A97C-6CB9-5122-5F65-CBA2B304E8E1}"/>
+              </a:ext>
+            </a:extLst>
+          </p:cNvPr>
+          <p:cNvSpPr>
+            <a:spLocks noGrp="1"/>
+          </p:cNvSpPr>
+          <p:nvPr>
+            <p:ph type="title"/>
+          </p:nvPr>
+        </p:nvSpPr>
+        <p:spPr>
+          <a:xfrm>
+            <a:off x="840186" y="366454"/>
+            <a:ext cx="10511627" cy="646331"/>
+          </a:xfrm>
+        </p:spPr>
+        <p:txBody>
+          <a:bodyPr rtlCol="0"/>
+          <a:lstStyle>
+            <a:defPPr>
+              <a:defRPr lang="fr-FR"/>
+            </a:defPPr>
+          </a:lstStyle>
+          <a:p>
+            <a:pPr rtl="0"/>
+            <a:r>
+              <a:rPr lang="fr-FR" dirty="0"/>
+              <a:t>Etalement</a:t>
+            </a:r>
+          </a:p>
+        </p:txBody>
+      </p:sp>
+      <p:sp>
+        <p:nvSpPr>
+          <p:cNvPr id="8" name="Espace réservé du texte 2">
+            <a:extLst>
+              <a:ext uri="{FF2B5EF4-FFF2-40B4-BE49-F238E27FC236}">
+                <a16:creationId xmlns:a16="http://schemas.microsoft.com/office/drawing/2014/main" id="{DF764B89-76E2-5F33-9892-594CAC0AB0CE}"/>
+              </a:ext>
+            </a:extLst>
+          </p:cNvPr>
+          <p:cNvSpPr txBox="1">
+            <a:spLocks/>
+          </p:cNvSpPr>
+          <p:nvPr/>
+        </p:nvSpPr>
+        <p:spPr>
+          <a:xfrm>
+            <a:off x="2598414" y="5998023"/>
+            <a:ext cx="6995171" cy="493524"/>
+          </a:xfrm>
+          <a:prstGeom prst="rect">
+            <a:avLst/>
+          </a:prstGeom>
+        </p:spPr>
+        <p:txBody>
+          <a:bodyPr vert="horz" lIns="91440" tIns="0" rIns="91440" bIns="0" rtlCol="0">
+            <a:normAutofit/>
+          </a:bodyPr>
+          <a:lstStyle>
+            <a:defPPr>
+              <a:defRPr lang="fr-FR"/>
+            </a:defPPr>
+            <a:lvl1pPr marL="0" indent="0" algn="l" defTabSz="914400" rtl="0" eaLnBrk="1" latinLnBrk="0" hangingPunct="1">
+              <a:lnSpc>
+                <a:spcPct val="100000"/>
+              </a:lnSpc>
+              <a:spcBef>
+                <a:spcPts val="0"/>
+              </a:spcBef>
+              <a:buFont typeface="Arial" panose="020B0604020202020204" pitchFamily="34" charset="0"/>
+              <a:buNone/>
+              <a:defRPr lang="fr-FR" sz="2400" kern="1200">
+                <a:solidFill>
+                  <a:schemeClr val="accent6"/>
+                </a:solidFill>
+                <a:latin typeface="+mn-lt"/>
+                <a:ea typeface="+mn-ea"/>
+                <a:cs typeface="+mn-cs"/>
+              </a:defRPr>
+            </a:lvl1pPr>
+            <a:lvl2pPr marL="347472" indent="-347472" algn="l" defTabSz="914400" rtl="0" eaLnBrk="1" latinLnBrk="0" hangingPunct="1">
+              <a:lnSpc>
+                <a:spcPct val="100000"/>
+              </a:lnSpc>
+              <a:spcBef>
+                <a:spcPts val="0"/>
+              </a:spcBef>
+              <a:buFont typeface="Arial" panose="020B0604020202020204" pitchFamily="34" charset="0"/>
+              <a:buChar char="•"/>
+              <a:defRPr lang="fr-FR" sz="2400" kern="1200">
+                <a:solidFill>
+                  <a:schemeClr val="accent6"/>
+                </a:solidFill>
+                <a:latin typeface="+mn-lt"/>
+                <a:ea typeface="+mn-ea"/>
+                <a:cs typeface="+mn-cs"/>
+              </a:defRPr>
+            </a:lvl2pPr>
+            <a:lvl3pPr marL="685800" indent="-347472" algn="l" defTabSz="914400" rtl="0" eaLnBrk="1" latinLnBrk="0" hangingPunct="1">
+              <a:lnSpc>
+                <a:spcPct val="100000"/>
+              </a:lnSpc>
+              <a:spcBef>
+                <a:spcPts val="0"/>
+              </a:spcBef>
+              <a:buFont typeface="Arial" panose="020B0604020202020204" pitchFamily="34" charset="0"/>
+              <a:buChar char="•"/>
+              <a:defRPr lang="fr-FR" sz="2400" kern="1200">
+                <a:solidFill>
+                  <a:schemeClr val="accent6"/>
+                </a:solidFill>
+                <a:latin typeface="+mn-lt"/>
+                <a:ea typeface="+mn-ea"/>
+                <a:cs typeface="+mn-cs"/>
+              </a:defRPr>
+            </a:lvl3pPr>
+            <a:lvl4pPr marL="1600200" indent="-347472" algn="l" defTabSz="914400" rtl="0" eaLnBrk="1" latinLnBrk="0" hangingPunct="1">
+              <a:lnSpc>
+                <a:spcPct val="100000"/>
+              </a:lnSpc>
+              <a:spcBef>
+                <a:spcPts val="360"/>
+              </a:spcBef>
+              <a:buFont typeface="Arial" panose="020B0604020202020204" pitchFamily="34" charset="0"/>
+              <a:buChar char="•"/>
+              <a:defRPr lang="fr-FR" sz="1800" kern="1200">
+                <a:solidFill>
+                  <a:schemeClr val="accent6"/>
+                </a:solidFill>
+                <a:latin typeface="+mn-lt"/>
+                <a:ea typeface="+mn-ea"/>
+                <a:cs typeface="+mn-cs"/>
+              </a:defRPr>
+            </a:lvl4pPr>
+            <a:lvl5pPr marL="2057400" indent="-347472" algn="l" defTabSz="914400" rtl="0" eaLnBrk="1" latinLnBrk="0" hangingPunct="1">
+              <a:lnSpc>
+                <a:spcPct val="100000"/>
+              </a:lnSpc>
+              <a:spcBef>
+                <a:spcPts val="360"/>
+              </a:spcBef>
+              <a:buFont typeface="Arial" panose="020B0604020202020204" pitchFamily="34" charset="0"/>
+              <a:buChar char="•"/>
+              <a:defRPr lang="fr-FR" sz="1800" kern="1200">
+                <a:solidFill>
+                  <a:schemeClr val="accent6"/>
+                </a:solidFill>
+                <a:latin typeface="+mn-lt"/>
+                <a:ea typeface="+mn-ea"/>
+                <a:cs typeface="+mn-cs"/>
+              </a:defRPr>
+            </a:lvl5pPr>
+            <a:lvl6pPr marL="2514600" indent="-228600" algn="l" defTabSz="914400" rtl="0" eaLnBrk="1" latinLnBrk="0" hangingPunct="1">
+              <a:lnSpc>
+                <a:spcPct val="90000"/>
+              </a:lnSpc>
+              <a:spcBef>
+                <a:spcPts val="500"/>
+              </a:spcBef>
+              <a:buFont typeface="Arial" panose="020B0604020202020204" pitchFamily="34" charset="0"/>
+              <a:buChar char="•"/>
+              <a:defRPr lang="fr-FR" sz="1800" kern="1200">
+                <a:solidFill>
+                  <a:schemeClr val="tx1"/>
+                </a:solidFill>
+                <a:latin typeface="+mn-lt"/>
+                <a:ea typeface="+mn-ea"/>
+                <a:cs typeface="+mn-cs"/>
+              </a:defRPr>
+            </a:lvl6pPr>
+            <a:lvl7pPr marL="2971800" indent="-228600" algn="l" defTabSz="914400" rtl="0" eaLnBrk="1" latinLnBrk="0" hangingPunct="1">
+              <a:lnSpc>
+                <a:spcPct val="90000"/>
+              </a:lnSpc>
+              <a:spcBef>
+                <a:spcPts val="500"/>
+              </a:spcBef>
+              <a:buFont typeface="Arial" panose="020B0604020202020204" pitchFamily="34" charset="0"/>
+              <a:buChar char="•"/>
+              <a:defRPr lang="fr-FR" sz="1800" kern="1200">
+                <a:solidFill>
+                  <a:schemeClr val="tx1"/>
+                </a:solidFill>
+                <a:latin typeface="+mn-lt"/>
+                <a:ea typeface="+mn-ea"/>
+                <a:cs typeface="+mn-cs"/>
+              </a:defRPr>
+            </a:lvl7pPr>
+            <a:lvl8pPr marL="3429000" indent="-228600" algn="l" defTabSz="914400" rtl="0" eaLnBrk="1" latinLnBrk="0" hangingPunct="1">
+              <a:lnSpc>
+                <a:spcPct val="90000"/>
+              </a:lnSpc>
+              <a:spcBef>
+                <a:spcPts val="500"/>
+              </a:spcBef>
+              <a:buFont typeface="Arial" panose="020B0604020202020204" pitchFamily="34" charset="0"/>
+              <a:buChar char="•"/>
+              <a:defRPr lang="fr-FR" sz="1800" kern="1200">
+                <a:solidFill>
+                  <a:schemeClr val="tx1"/>
+                </a:solidFill>
+                <a:latin typeface="+mn-lt"/>
+                <a:ea typeface="+mn-ea"/>
+                <a:cs typeface="+mn-cs"/>
+              </a:defRPr>
+            </a:lvl8pPr>
+            <a:lvl9pPr marL="3886200" indent="-228600" algn="l" defTabSz="914400" rtl="0" eaLnBrk="1" latinLnBrk="0" hangingPunct="1">
+              <a:lnSpc>
+                <a:spcPct val="90000"/>
+              </a:lnSpc>
+              <a:spcBef>
+                <a:spcPts val="500"/>
+              </a:spcBef>
+              <a:buFont typeface="Arial" panose="020B0604020202020204" pitchFamily="34" charset="0"/>
+              <a:buChar char="•"/>
+              <a:defRPr lang="fr-FR" sz="1800" kern="1200">
+                <a:solidFill>
+                  <a:schemeClr val="tx1"/>
+                </a:solidFill>
+                <a:latin typeface="+mn-lt"/>
+                <a:ea typeface="+mn-ea"/>
+                <a:cs typeface="+mn-cs"/>
+              </a:defRPr>
+            </a:lvl9pPr>
+          </a:lstStyle>
+          <a:p>
+            <a:pPr algn="ctr"/>
+            <a:r>
+              <a:rPr lang="fr-FR" sz="2000" dirty="0"/>
+              <a:t>Pour différentes masses M</a:t>
+            </a:r>
+            <a:endParaRPr lang="ar-AE" sz="2000" dirty="0"/>
+          </a:p>
+        </p:txBody>
+      </p:sp>
+      <p:pic>
+        <p:nvPicPr>
+          <p:cNvPr id="10" name="Image 9">
+            <a:extLst>
+              <a:ext uri="{FF2B5EF4-FFF2-40B4-BE49-F238E27FC236}">
+                <a16:creationId xmlns:a16="http://schemas.microsoft.com/office/drawing/2014/main" id="{9DFFAD79-E9A8-CB3C-A4BB-B4678FC88794}"/>
+              </a:ext>
+            </a:extLst>
+          </p:cNvPr>
+          <p:cNvPicPr>
+            <a:picLocks noChangeAspect="1"/>
+          </p:cNvPicPr>
+          <p:nvPr/>
+        </p:nvPicPr>
+        <p:blipFill>
+          <a:blip r:embed="rId2"/>
+          <a:stretch>
+            <a:fillRect/>
+          </a:stretch>
+        </p:blipFill>
+        <p:spPr>
+          <a:xfrm>
+            <a:off x="1695783" y="1202335"/>
+            <a:ext cx="8800434" cy="4606138"/>
           </a:xfrm>
           <a:prstGeom prst="rect">
             <a:avLst/>
@@ -19247,7 +23590,7 @@
     </p:spTree>
     <p:extLst>
       <p:ext uri="{BB962C8B-B14F-4D97-AF65-F5344CB8AC3E}">
-        <p14:creationId xmlns:p14="http://schemas.microsoft.com/office/powerpoint/2010/main" val="1686213229"/>
+        <p14:creationId xmlns:p14="http://schemas.microsoft.com/office/powerpoint/2010/main" val="4253638334"/>
       </p:ext>
     </p:extLst>
   </p:cSld>
@@ -19257,7 +23600,7 @@
 </p:sld>
 </file>
 
-<file path=ppt/slides/slide4.xml><?xml version="1.0" encoding="utf-8"?>
+<file path=ppt/slides/slide7.xml><?xml version="1.0" encoding="utf-8"?>
 <p:sld xmlns:a="http://schemas.openxmlformats.org/drawingml/2006/main" xmlns:r="http://schemas.openxmlformats.org/officeDocument/2006/relationships" xmlns:p="http://schemas.openxmlformats.org/presentationml/2006/main">
   <p:cSld>
     <p:spTree>
@@ -19318,41 +23661,6 @@
           </a:p>
         </p:txBody>
       </p:sp>
-      <p:pic>
-        <p:nvPicPr>
-          <p:cNvPr id="10" name="Image 9">
-            <a:extLst>
-              <a:ext uri="{FF2B5EF4-FFF2-40B4-BE49-F238E27FC236}">
-                <a16:creationId xmlns:a16="http://schemas.microsoft.com/office/drawing/2014/main" id="{55C4F4F2-D8B9-0CD1-0B5F-E4E6D9DA3BC9}"/>
-              </a:ext>
-            </a:extLst>
-          </p:cNvPr>
-          <p:cNvPicPr>
-            <a:picLocks noChangeAspect="1"/>
-          </p:cNvPicPr>
-          <p:nvPr/>
-        </p:nvPicPr>
-        <p:blipFill>
-          <a:blip r:embed="rId3"/>
-          <a:stretch>
-            <a:fillRect/>
-          </a:stretch>
-        </p:blipFill>
-        <p:spPr>
-          <a:xfrm>
-            <a:off x="1055940" y="1278473"/>
-            <a:ext cx="7460927" cy="5073134"/>
-          </a:xfrm>
-          <a:prstGeom prst="rect">
-            <a:avLst/>
-          </a:prstGeom>
-          <a:ln w="57150">
-            <a:solidFill>
-              <a:srgbClr val="F5CDCE"/>
-            </a:solidFill>
-          </a:ln>
-        </p:spPr>
-      </p:pic>
       <p:sp>
         <p:nvSpPr>
           <p:cNvPr id="11" name="Espace réservé du texte 2">
@@ -19562,10 +23870,1070 @@
           </a:p>
         </p:txBody>
       </p:sp>
+      <p:pic>
+        <p:nvPicPr>
+          <p:cNvPr id="6" name="Image 5">
+            <a:extLst>
+              <a:ext uri="{FF2B5EF4-FFF2-40B4-BE49-F238E27FC236}">
+                <a16:creationId xmlns:a16="http://schemas.microsoft.com/office/drawing/2014/main" id="{E83DA697-DB72-9C72-2D4F-25EBBEE14F4F}"/>
+              </a:ext>
+            </a:extLst>
+          </p:cNvPr>
+          <p:cNvPicPr>
+            <a:picLocks noChangeAspect="1"/>
+          </p:cNvPicPr>
+          <p:nvPr/>
+        </p:nvPicPr>
+        <p:blipFill>
+          <a:blip r:embed="rId3"/>
+          <a:stretch>
+            <a:fillRect/>
+          </a:stretch>
+        </p:blipFill>
+        <p:spPr>
+          <a:xfrm>
+            <a:off x="1058807" y="1448473"/>
+            <a:ext cx="7410169" cy="4540643"/>
+          </a:xfrm>
+          <a:prstGeom prst="rect">
+            <a:avLst/>
+          </a:prstGeom>
+          <a:ln w="57150">
+            <a:solidFill>
+              <a:srgbClr val="F5CDCE"/>
+            </a:solidFill>
+          </a:ln>
+        </p:spPr>
+      </p:pic>
+      <mc:AlternateContent xmlns:mc="http://schemas.openxmlformats.org/markup-compatibility/2006">
+        <mc:Choice xmlns:a14="http://schemas.microsoft.com/office/drawing/2010/main" Requires="a14">
+          <p:sp>
+            <p:nvSpPr>
+              <p:cNvPr id="7" name="Espace réservé du texte 2">
+                <a:extLst>
+                  <a:ext uri="{FF2B5EF4-FFF2-40B4-BE49-F238E27FC236}">
+                    <a16:creationId xmlns:a16="http://schemas.microsoft.com/office/drawing/2014/main" id="{71C725C3-B485-CFB0-98E0-D67571FB3B69}"/>
+                  </a:ext>
+                </a:extLst>
+              </p:cNvPr>
+              <p:cNvSpPr txBox="1">
+                <a:spLocks/>
+              </p:cNvSpPr>
+              <p:nvPr/>
+            </p:nvSpPr>
+            <p:spPr>
+              <a:xfrm>
+                <a:off x="8332156" y="5200867"/>
+                <a:ext cx="2704399" cy="701136"/>
+              </a:xfrm>
+              <a:prstGeom prst="rect">
+                <a:avLst/>
+              </a:prstGeom>
+            </p:spPr>
+            <p:txBody>
+              <a:bodyPr vert="horz" lIns="91440" tIns="0" rIns="91440" bIns="0" rtlCol="0">
+                <a:normAutofit/>
+              </a:bodyPr>
+              <a:lstStyle>
+                <a:defPPr>
+                  <a:defRPr lang="fr-FR"/>
+                </a:defPPr>
+                <a:lvl1pPr marL="0" indent="0" algn="l" defTabSz="914400" rtl="0" eaLnBrk="1" latinLnBrk="0" hangingPunct="1">
+                  <a:lnSpc>
+                    <a:spcPct val="100000"/>
+                  </a:lnSpc>
+                  <a:spcBef>
+                    <a:spcPts val="0"/>
+                  </a:spcBef>
+                  <a:buFont typeface="Arial" panose="020B0604020202020204" pitchFamily="34" charset="0"/>
+                  <a:buNone/>
+                  <a:defRPr lang="fr-FR" sz="2400" kern="1200">
+                    <a:solidFill>
+                      <a:schemeClr val="accent6"/>
+                    </a:solidFill>
+                    <a:latin typeface="+mn-lt"/>
+                    <a:ea typeface="+mn-ea"/>
+                    <a:cs typeface="+mn-cs"/>
+                  </a:defRPr>
+                </a:lvl1pPr>
+                <a:lvl2pPr marL="347472" indent="-347472" algn="l" defTabSz="914400" rtl="0" eaLnBrk="1" latinLnBrk="0" hangingPunct="1">
+                  <a:lnSpc>
+                    <a:spcPct val="100000"/>
+                  </a:lnSpc>
+                  <a:spcBef>
+                    <a:spcPts val="0"/>
+                  </a:spcBef>
+                  <a:buFont typeface="Arial" panose="020B0604020202020204" pitchFamily="34" charset="0"/>
+                  <a:buChar char="•"/>
+                  <a:defRPr lang="fr-FR" sz="2400" kern="1200">
+                    <a:solidFill>
+                      <a:schemeClr val="accent6"/>
+                    </a:solidFill>
+                    <a:latin typeface="+mn-lt"/>
+                    <a:ea typeface="+mn-ea"/>
+                    <a:cs typeface="+mn-cs"/>
+                  </a:defRPr>
+                </a:lvl2pPr>
+                <a:lvl3pPr marL="685800" indent="-347472" algn="l" defTabSz="914400" rtl="0" eaLnBrk="1" latinLnBrk="0" hangingPunct="1">
+                  <a:lnSpc>
+                    <a:spcPct val="100000"/>
+                  </a:lnSpc>
+                  <a:spcBef>
+                    <a:spcPts val="0"/>
+                  </a:spcBef>
+                  <a:buFont typeface="Arial" panose="020B0604020202020204" pitchFamily="34" charset="0"/>
+                  <a:buChar char="•"/>
+                  <a:defRPr lang="fr-FR" sz="2400" kern="1200">
+                    <a:solidFill>
+                      <a:schemeClr val="accent6"/>
+                    </a:solidFill>
+                    <a:latin typeface="+mn-lt"/>
+                    <a:ea typeface="+mn-ea"/>
+                    <a:cs typeface="+mn-cs"/>
+                  </a:defRPr>
+                </a:lvl3pPr>
+                <a:lvl4pPr marL="1600200" indent="-347472" algn="l" defTabSz="914400" rtl="0" eaLnBrk="1" latinLnBrk="0" hangingPunct="1">
+                  <a:lnSpc>
+                    <a:spcPct val="100000"/>
+                  </a:lnSpc>
+                  <a:spcBef>
+                    <a:spcPts val="360"/>
+                  </a:spcBef>
+                  <a:buFont typeface="Arial" panose="020B0604020202020204" pitchFamily="34" charset="0"/>
+                  <a:buChar char="•"/>
+                  <a:defRPr lang="fr-FR" sz="1800" kern="1200">
+                    <a:solidFill>
+                      <a:schemeClr val="accent6"/>
+                    </a:solidFill>
+                    <a:latin typeface="+mn-lt"/>
+                    <a:ea typeface="+mn-ea"/>
+                    <a:cs typeface="+mn-cs"/>
+                  </a:defRPr>
+                </a:lvl4pPr>
+                <a:lvl5pPr marL="2057400" indent="-347472" algn="l" defTabSz="914400" rtl="0" eaLnBrk="1" latinLnBrk="0" hangingPunct="1">
+                  <a:lnSpc>
+                    <a:spcPct val="100000"/>
+                  </a:lnSpc>
+                  <a:spcBef>
+                    <a:spcPts val="360"/>
+                  </a:spcBef>
+                  <a:buFont typeface="Arial" panose="020B0604020202020204" pitchFamily="34" charset="0"/>
+                  <a:buChar char="•"/>
+                  <a:defRPr lang="fr-FR" sz="1800" kern="1200">
+                    <a:solidFill>
+                      <a:schemeClr val="accent6"/>
+                    </a:solidFill>
+                    <a:latin typeface="+mn-lt"/>
+                    <a:ea typeface="+mn-ea"/>
+                    <a:cs typeface="+mn-cs"/>
+                  </a:defRPr>
+                </a:lvl5pPr>
+                <a:lvl6pPr marL="2514600" indent="-228600" algn="l" defTabSz="914400" rtl="0" eaLnBrk="1" latinLnBrk="0" hangingPunct="1">
+                  <a:lnSpc>
+                    <a:spcPct val="90000"/>
+                  </a:lnSpc>
+                  <a:spcBef>
+                    <a:spcPts val="500"/>
+                  </a:spcBef>
+                  <a:buFont typeface="Arial" panose="020B0604020202020204" pitchFamily="34" charset="0"/>
+                  <a:buChar char="•"/>
+                  <a:defRPr lang="fr-FR" sz="1800" kern="1200">
+                    <a:solidFill>
+                      <a:schemeClr val="tx1"/>
+                    </a:solidFill>
+                    <a:latin typeface="+mn-lt"/>
+                    <a:ea typeface="+mn-ea"/>
+                    <a:cs typeface="+mn-cs"/>
+                  </a:defRPr>
+                </a:lvl6pPr>
+                <a:lvl7pPr marL="2971800" indent="-228600" algn="l" defTabSz="914400" rtl="0" eaLnBrk="1" latinLnBrk="0" hangingPunct="1">
+                  <a:lnSpc>
+                    <a:spcPct val="90000"/>
+                  </a:lnSpc>
+                  <a:spcBef>
+                    <a:spcPts val="500"/>
+                  </a:spcBef>
+                  <a:buFont typeface="Arial" panose="020B0604020202020204" pitchFamily="34" charset="0"/>
+                  <a:buChar char="•"/>
+                  <a:defRPr lang="fr-FR" sz="1800" kern="1200">
+                    <a:solidFill>
+                      <a:schemeClr val="tx1"/>
+                    </a:solidFill>
+                    <a:latin typeface="+mn-lt"/>
+                    <a:ea typeface="+mn-ea"/>
+                    <a:cs typeface="+mn-cs"/>
+                  </a:defRPr>
+                </a:lvl7pPr>
+                <a:lvl8pPr marL="3429000" indent="-228600" algn="l" defTabSz="914400" rtl="0" eaLnBrk="1" latinLnBrk="0" hangingPunct="1">
+                  <a:lnSpc>
+                    <a:spcPct val="90000"/>
+                  </a:lnSpc>
+                  <a:spcBef>
+                    <a:spcPts val="500"/>
+                  </a:spcBef>
+                  <a:buFont typeface="Arial" panose="020B0604020202020204" pitchFamily="34" charset="0"/>
+                  <a:buChar char="•"/>
+                  <a:defRPr lang="fr-FR" sz="1800" kern="1200">
+                    <a:solidFill>
+                      <a:schemeClr val="tx1"/>
+                    </a:solidFill>
+                    <a:latin typeface="+mn-lt"/>
+                    <a:ea typeface="+mn-ea"/>
+                    <a:cs typeface="+mn-cs"/>
+                  </a:defRPr>
+                </a:lvl8pPr>
+                <a:lvl9pPr marL="3886200" indent="-228600" algn="l" defTabSz="914400" rtl="0" eaLnBrk="1" latinLnBrk="0" hangingPunct="1">
+                  <a:lnSpc>
+                    <a:spcPct val="90000"/>
+                  </a:lnSpc>
+                  <a:spcBef>
+                    <a:spcPts val="500"/>
+                  </a:spcBef>
+                  <a:buFont typeface="Arial" panose="020B0604020202020204" pitchFamily="34" charset="0"/>
+                  <a:buChar char="•"/>
+                  <a:defRPr lang="fr-FR" sz="1800" kern="1200">
+                    <a:solidFill>
+                      <a:schemeClr val="tx1"/>
+                    </a:solidFill>
+                    <a:latin typeface="+mn-lt"/>
+                    <a:ea typeface="+mn-ea"/>
+                    <a:cs typeface="+mn-cs"/>
+                  </a:defRPr>
+                </a:lvl9pPr>
+              </a:lstStyle>
+              <a:p>
+                <a:pPr>
+                  <a:lnSpc>
+                    <a:spcPct val="150000"/>
+                  </a:lnSpc>
+                </a:pPr>
+                <a14:m>
+                  <m:oMathPara xmlns:m="http://schemas.openxmlformats.org/officeDocument/2006/math">
+                    <m:oMathParaPr>
+                      <m:jc m:val="centerGroup"/>
+                    </m:oMathParaPr>
+                    <m:oMath xmlns:m="http://schemas.openxmlformats.org/officeDocument/2006/math">
+                      <m:r>
+                        <a:rPr lang="fr-FR" b="0" i="1" smtClean="0">
+                          <a:latin typeface="Cambria Math" panose="02040503050406030204" pitchFamily="18" charset="0"/>
+                        </a:rPr>
+                        <m:t>𝐺</m:t>
+                      </m:r>
+                      <m:r>
+                        <a:rPr lang="fr-FR" b="0" i="1">
+                          <a:latin typeface="Cambria Math" panose="02040503050406030204" pitchFamily="18" charset="0"/>
+                        </a:rPr>
+                        <m:t>=</m:t>
+                      </m:r>
+                      <m:r>
+                        <a:rPr lang="fr-FR" b="0" i="1" smtClean="0">
+                          <a:latin typeface="Cambria Math" panose="02040503050406030204" pitchFamily="18" charset="0"/>
+                        </a:rPr>
+                        <m:t>907</m:t>
+                      </m:r>
+                      <m:r>
+                        <a:rPr lang="fr-FR" b="0" i="1">
+                          <a:latin typeface="Cambria Math" panose="02040503050406030204" pitchFamily="18" charset="0"/>
+                        </a:rPr>
+                        <m:t> </m:t>
+                      </m:r>
+                      <m:r>
+                        <a:rPr lang="fr-FR" b="0" i="1">
+                          <a:latin typeface="Cambria Math" panose="02040503050406030204" pitchFamily="18" charset="0"/>
+                        </a:rPr>
+                        <m:t>𝑃𝑎</m:t>
+                      </m:r>
+                    </m:oMath>
+                  </m:oMathPara>
+                </a14:m>
+                <a:endParaRPr lang="fr-FR" dirty="0"/>
+              </a:p>
+              <a:p>
+                <a:pPr>
+                  <a:lnSpc>
+                    <a:spcPct val="150000"/>
+                  </a:lnSpc>
+                </a:pPr>
+                <a:endParaRPr lang="fr-FR" sz="2000" dirty="0"/>
+              </a:p>
+            </p:txBody>
+          </p:sp>
+        </mc:Choice>
+        <mc:Fallback>
+          <p:sp>
+            <p:nvSpPr>
+              <p:cNvPr id="7" name="Espace réservé du texte 2">
+                <a:extLst>
+                  <a:ext uri="{FF2B5EF4-FFF2-40B4-BE49-F238E27FC236}">
+                    <a16:creationId xmlns:a16="http://schemas.microsoft.com/office/drawing/2014/main" id="{71C725C3-B485-CFB0-98E0-D67571FB3B69}"/>
+                  </a:ext>
+                </a:extLst>
+              </p:cNvPr>
+              <p:cNvSpPr txBox="1">
+                <a:spLocks noRot="1" noChangeAspect="1" noMove="1" noResize="1" noEditPoints="1" noAdjustHandles="1" noChangeArrowheads="1" noChangeShapeType="1" noTextEdit="1"/>
+              </p:cNvSpPr>
+              <p:nvPr/>
+            </p:nvSpPr>
+            <p:spPr>
+              <a:xfrm>
+                <a:off x="8332156" y="5200867"/>
+                <a:ext cx="2704399" cy="701136"/>
+              </a:xfrm>
+              <a:prstGeom prst="rect">
+                <a:avLst/>
+              </a:prstGeom>
+              <a:blipFill>
+                <a:blip r:embed="rId4"/>
+                <a:stretch>
+                  <a:fillRect/>
+                </a:stretch>
+              </a:blipFill>
+            </p:spPr>
+            <p:txBody>
+              <a:bodyPr/>
+              <a:lstStyle/>
+              <a:p>
+                <a:r>
+                  <a:rPr lang="fr-FR">
+                    <a:noFill/>
+                  </a:rPr>
+                  <a:t> </a:t>
+                </a:r>
+              </a:p>
+            </p:txBody>
+          </p:sp>
+        </mc:Fallback>
+      </mc:AlternateContent>
     </p:spTree>
     <p:extLst>
       <p:ext uri="{BB962C8B-B14F-4D97-AF65-F5344CB8AC3E}">
         <p14:creationId xmlns:p14="http://schemas.microsoft.com/office/powerpoint/2010/main" val="3801704473"/>
+      </p:ext>
+    </p:extLst>
+  </p:cSld>
+  <p:clrMapOvr>
+    <a:masterClrMapping/>
+  </p:clrMapOvr>
+</p:sld>
+</file>
+
+<file path=ppt/slides/slide8.xml><?xml version="1.0" encoding="utf-8"?>
+<p:sld xmlns:a="http://schemas.openxmlformats.org/drawingml/2006/main" xmlns:r="http://schemas.openxmlformats.org/officeDocument/2006/relationships" xmlns:p="http://schemas.openxmlformats.org/presentationml/2006/main">
+  <p:cSld>
+    <p:spTree>
+      <p:nvGrpSpPr>
+        <p:cNvPr id="1" name=""/>
+        <p:cNvGrpSpPr/>
+        <p:nvPr/>
+      </p:nvGrpSpPr>
+      <p:grpSpPr>
+        <a:xfrm>
+          <a:off x="0" y="0"/>
+          <a:ext cx="0" cy="0"/>
+          <a:chOff x="0" y="0"/>
+          <a:chExt cx="0" cy="0"/>
+        </a:xfrm>
+      </p:grpSpPr>
+      <p:pic>
+        <p:nvPicPr>
+          <p:cNvPr id="6" name="Image 5">
+            <a:extLst>
+              <a:ext uri="{FF2B5EF4-FFF2-40B4-BE49-F238E27FC236}">
+                <a16:creationId xmlns:a16="http://schemas.microsoft.com/office/drawing/2014/main" id="{2EAF08E2-C807-7659-69DF-3A1644B9E587}"/>
+              </a:ext>
+            </a:extLst>
+          </p:cNvPr>
+          <p:cNvPicPr>
+            <a:picLocks noChangeAspect="1"/>
+          </p:cNvPicPr>
+          <p:nvPr/>
+        </p:nvPicPr>
+        <p:blipFill>
+          <a:blip r:embed="rId2"/>
+          <a:stretch>
+            <a:fillRect/>
+          </a:stretch>
+        </p:blipFill>
+        <p:spPr>
+          <a:xfrm>
+            <a:off x="501502" y="1133149"/>
+            <a:ext cx="5702593" cy="4324572"/>
+          </a:xfrm>
+          <a:prstGeom prst="rect">
+            <a:avLst/>
+          </a:prstGeom>
+        </p:spPr>
+      </p:pic>
+      <p:sp>
+        <p:nvSpPr>
+          <p:cNvPr id="7" name="Titre 1">
+            <a:extLst>
+              <a:ext uri="{FF2B5EF4-FFF2-40B4-BE49-F238E27FC236}">
+                <a16:creationId xmlns:a16="http://schemas.microsoft.com/office/drawing/2014/main" id="{6215C27B-7F65-4766-826D-AFEE7B2F77C3}"/>
+              </a:ext>
+            </a:extLst>
+          </p:cNvPr>
+          <p:cNvSpPr>
+            <a:spLocks noGrp="1"/>
+          </p:cNvSpPr>
+          <p:nvPr>
+            <p:ph type="title"/>
+          </p:nvPr>
+        </p:nvSpPr>
+        <p:spPr>
+          <a:xfrm>
+            <a:off x="840186" y="0"/>
+            <a:ext cx="10511627" cy="1012785"/>
+          </a:xfrm>
+        </p:spPr>
+        <p:txBody>
+          <a:bodyPr rtlCol="0"/>
+          <a:lstStyle>
+            <a:defPPr>
+              <a:defRPr lang="fr-FR"/>
+            </a:defPPr>
+          </a:lstStyle>
+          <a:p>
+            <a:pPr rtl="0"/>
+            <a:r>
+              <a:rPr lang="fr-FR" dirty="0"/>
+              <a:t>Contribution des contraintes</a:t>
+            </a:r>
+          </a:p>
+        </p:txBody>
+      </p:sp>
+      <mc:AlternateContent xmlns:mc="http://schemas.openxmlformats.org/markup-compatibility/2006">
+        <mc:Choice xmlns:a14="http://schemas.microsoft.com/office/drawing/2010/main" Requires="a14">
+          <p:sp>
+            <p:nvSpPr>
+              <p:cNvPr id="10" name="Espace réservé du texte 2">
+                <a:extLst>
+                  <a:ext uri="{FF2B5EF4-FFF2-40B4-BE49-F238E27FC236}">
+                    <a16:creationId xmlns:a16="http://schemas.microsoft.com/office/drawing/2014/main" id="{3DA844B5-5EA0-2503-78E9-B494AAF23196}"/>
+                  </a:ext>
+                </a:extLst>
+              </p:cNvPr>
+              <p:cNvSpPr txBox="1">
+                <a:spLocks/>
+              </p:cNvSpPr>
+              <p:nvPr/>
+            </p:nvSpPr>
+            <p:spPr>
+              <a:xfrm>
+                <a:off x="1921081" y="5457721"/>
+                <a:ext cx="2704399" cy="701136"/>
+              </a:xfrm>
+              <a:prstGeom prst="rect">
+                <a:avLst/>
+              </a:prstGeom>
+            </p:spPr>
+            <p:txBody>
+              <a:bodyPr vert="horz" lIns="91440" tIns="0" rIns="91440" bIns="0" rtlCol="0">
+                <a:normAutofit/>
+              </a:bodyPr>
+              <a:lstStyle>
+                <a:defPPr>
+                  <a:defRPr lang="fr-FR"/>
+                </a:defPPr>
+                <a:lvl1pPr marL="0" indent="0" algn="l" defTabSz="914400" rtl="0" eaLnBrk="1" latinLnBrk="0" hangingPunct="1">
+                  <a:lnSpc>
+                    <a:spcPct val="100000"/>
+                  </a:lnSpc>
+                  <a:spcBef>
+                    <a:spcPts val="0"/>
+                  </a:spcBef>
+                  <a:buFont typeface="Arial" panose="020B0604020202020204" pitchFamily="34" charset="0"/>
+                  <a:buNone/>
+                  <a:defRPr lang="fr-FR" sz="2400" kern="1200">
+                    <a:solidFill>
+                      <a:schemeClr val="accent6"/>
+                    </a:solidFill>
+                    <a:latin typeface="+mn-lt"/>
+                    <a:ea typeface="+mn-ea"/>
+                    <a:cs typeface="+mn-cs"/>
+                  </a:defRPr>
+                </a:lvl1pPr>
+                <a:lvl2pPr marL="347472" indent="-347472" algn="l" defTabSz="914400" rtl="0" eaLnBrk="1" latinLnBrk="0" hangingPunct="1">
+                  <a:lnSpc>
+                    <a:spcPct val="100000"/>
+                  </a:lnSpc>
+                  <a:spcBef>
+                    <a:spcPts val="0"/>
+                  </a:spcBef>
+                  <a:buFont typeface="Arial" panose="020B0604020202020204" pitchFamily="34" charset="0"/>
+                  <a:buChar char="•"/>
+                  <a:defRPr lang="fr-FR" sz="2400" kern="1200">
+                    <a:solidFill>
+                      <a:schemeClr val="accent6"/>
+                    </a:solidFill>
+                    <a:latin typeface="+mn-lt"/>
+                    <a:ea typeface="+mn-ea"/>
+                    <a:cs typeface="+mn-cs"/>
+                  </a:defRPr>
+                </a:lvl2pPr>
+                <a:lvl3pPr marL="685800" indent="-347472" algn="l" defTabSz="914400" rtl="0" eaLnBrk="1" latinLnBrk="0" hangingPunct="1">
+                  <a:lnSpc>
+                    <a:spcPct val="100000"/>
+                  </a:lnSpc>
+                  <a:spcBef>
+                    <a:spcPts val="0"/>
+                  </a:spcBef>
+                  <a:buFont typeface="Arial" panose="020B0604020202020204" pitchFamily="34" charset="0"/>
+                  <a:buChar char="•"/>
+                  <a:defRPr lang="fr-FR" sz="2400" kern="1200">
+                    <a:solidFill>
+                      <a:schemeClr val="accent6"/>
+                    </a:solidFill>
+                    <a:latin typeface="+mn-lt"/>
+                    <a:ea typeface="+mn-ea"/>
+                    <a:cs typeface="+mn-cs"/>
+                  </a:defRPr>
+                </a:lvl3pPr>
+                <a:lvl4pPr marL="1600200" indent="-347472" algn="l" defTabSz="914400" rtl="0" eaLnBrk="1" latinLnBrk="0" hangingPunct="1">
+                  <a:lnSpc>
+                    <a:spcPct val="100000"/>
+                  </a:lnSpc>
+                  <a:spcBef>
+                    <a:spcPts val="360"/>
+                  </a:spcBef>
+                  <a:buFont typeface="Arial" panose="020B0604020202020204" pitchFamily="34" charset="0"/>
+                  <a:buChar char="•"/>
+                  <a:defRPr lang="fr-FR" sz="1800" kern="1200">
+                    <a:solidFill>
+                      <a:schemeClr val="accent6"/>
+                    </a:solidFill>
+                    <a:latin typeface="+mn-lt"/>
+                    <a:ea typeface="+mn-ea"/>
+                    <a:cs typeface="+mn-cs"/>
+                  </a:defRPr>
+                </a:lvl4pPr>
+                <a:lvl5pPr marL="2057400" indent="-347472" algn="l" defTabSz="914400" rtl="0" eaLnBrk="1" latinLnBrk="0" hangingPunct="1">
+                  <a:lnSpc>
+                    <a:spcPct val="100000"/>
+                  </a:lnSpc>
+                  <a:spcBef>
+                    <a:spcPts val="360"/>
+                  </a:spcBef>
+                  <a:buFont typeface="Arial" panose="020B0604020202020204" pitchFamily="34" charset="0"/>
+                  <a:buChar char="•"/>
+                  <a:defRPr lang="fr-FR" sz="1800" kern="1200">
+                    <a:solidFill>
+                      <a:schemeClr val="accent6"/>
+                    </a:solidFill>
+                    <a:latin typeface="+mn-lt"/>
+                    <a:ea typeface="+mn-ea"/>
+                    <a:cs typeface="+mn-cs"/>
+                  </a:defRPr>
+                </a:lvl5pPr>
+                <a:lvl6pPr marL="2514600" indent="-228600" algn="l" defTabSz="914400" rtl="0" eaLnBrk="1" latinLnBrk="0" hangingPunct="1">
+                  <a:lnSpc>
+                    <a:spcPct val="90000"/>
+                  </a:lnSpc>
+                  <a:spcBef>
+                    <a:spcPts val="500"/>
+                  </a:spcBef>
+                  <a:buFont typeface="Arial" panose="020B0604020202020204" pitchFamily="34" charset="0"/>
+                  <a:buChar char="•"/>
+                  <a:defRPr lang="fr-FR" sz="1800" kern="1200">
+                    <a:solidFill>
+                      <a:schemeClr val="tx1"/>
+                    </a:solidFill>
+                    <a:latin typeface="+mn-lt"/>
+                    <a:ea typeface="+mn-ea"/>
+                    <a:cs typeface="+mn-cs"/>
+                  </a:defRPr>
+                </a:lvl6pPr>
+                <a:lvl7pPr marL="2971800" indent="-228600" algn="l" defTabSz="914400" rtl="0" eaLnBrk="1" latinLnBrk="0" hangingPunct="1">
+                  <a:lnSpc>
+                    <a:spcPct val="90000"/>
+                  </a:lnSpc>
+                  <a:spcBef>
+                    <a:spcPts val="500"/>
+                  </a:spcBef>
+                  <a:buFont typeface="Arial" panose="020B0604020202020204" pitchFamily="34" charset="0"/>
+                  <a:buChar char="•"/>
+                  <a:defRPr lang="fr-FR" sz="1800" kern="1200">
+                    <a:solidFill>
+                      <a:schemeClr val="tx1"/>
+                    </a:solidFill>
+                    <a:latin typeface="+mn-lt"/>
+                    <a:ea typeface="+mn-ea"/>
+                    <a:cs typeface="+mn-cs"/>
+                  </a:defRPr>
+                </a:lvl7pPr>
+                <a:lvl8pPr marL="3429000" indent="-228600" algn="l" defTabSz="914400" rtl="0" eaLnBrk="1" latinLnBrk="0" hangingPunct="1">
+                  <a:lnSpc>
+                    <a:spcPct val="90000"/>
+                  </a:lnSpc>
+                  <a:spcBef>
+                    <a:spcPts val="500"/>
+                  </a:spcBef>
+                  <a:buFont typeface="Arial" panose="020B0604020202020204" pitchFamily="34" charset="0"/>
+                  <a:buChar char="•"/>
+                  <a:defRPr lang="fr-FR" sz="1800" kern="1200">
+                    <a:solidFill>
+                      <a:schemeClr val="tx1"/>
+                    </a:solidFill>
+                    <a:latin typeface="+mn-lt"/>
+                    <a:ea typeface="+mn-ea"/>
+                    <a:cs typeface="+mn-cs"/>
+                  </a:defRPr>
+                </a:lvl8pPr>
+                <a:lvl9pPr marL="3886200" indent="-228600" algn="l" defTabSz="914400" rtl="0" eaLnBrk="1" latinLnBrk="0" hangingPunct="1">
+                  <a:lnSpc>
+                    <a:spcPct val="90000"/>
+                  </a:lnSpc>
+                  <a:spcBef>
+                    <a:spcPts val="500"/>
+                  </a:spcBef>
+                  <a:buFont typeface="Arial" panose="020B0604020202020204" pitchFamily="34" charset="0"/>
+                  <a:buChar char="•"/>
+                  <a:defRPr lang="fr-FR" sz="1800" kern="1200">
+                    <a:solidFill>
+                      <a:schemeClr val="tx1"/>
+                    </a:solidFill>
+                    <a:latin typeface="+mn-lt"/>
+                    <a:ea typeface="+mn-ea"/>
+                    <a:cs typeface="+mn-cs"/>
+                  </a:defRPr>
+                </a:lvl9pPr>
+              </a:lstStyle>
+              <a:p>
+                <a:pPr>
+                  <a:lnSpc>
+                    <a:spcPct val="150000"/>
+                  </a:lnSpc>
+                </a:pPr>
+                <a14:m>
+                  <m:oMathPara xmlns:m="http://schemas.openxmlformats.org/officeDocument/2006/math">
+                    <m:oMathParaPr>
+                      <m:jc m:val="centerGroup"/>
+                    </m:oMathParaPr>
+                    <m:oMath xmlns:m="http://schemas.openxmlformats.org/officeDocument/2006/math">
+                      <m:r>
+                        <a:rPr lang="fr-FR" b="1" i="1" smtClean="0">
+                          <a:latin typeface="Cambria Math" panose="02040503050406030204" pitchFamily="18" charset="0"/>
+                        </a:rPr>
+                        <m:t>𝑮</m:t>
+                      </m:r>
+                      <m:r>
+                        <a:rPr lang="fr-FR" b="1" i="1">
+                          <a:latin typeface="Cambria Math" panose="02040503050406030204" pitchFamily="18" charset="0"/>
+                        </a:rPr>
+                        <m:t>=</m:t>
+                      </m:r>
+                      <m:r>
+                        <a:rPr lang="fr-FR" b="1" i="1" smtClean="0">
+                          <a:latin typeface="Cambria Math" panose="02040503050406030204" pitchFamily="18" charset="0"/>
+                        </a:rPr>
+                        <m:t>𝟐𝟐𝟎</m:t>
+                      </m:r>
+                      <m:r>
+                        <a:rPr lang="fr-FR" b="1" i="1">
+                          <a:latin typeface="Cambria Math" panose="02040503050406030204" pitchFamily="18" charset="0"/>
+                        </a:rPr>
+                        <m:t> </m:t>
+                      </m:r>
+                      <m:r>
+                        <a:rPr lang="fr-FR" b="1" i="1">
+                          <a:latin typeface="Cambria Math" panose="02040503050406030204" pitchFamily="18" charset="0"/>
+                        </a:rPr>
+                        <m:t>𝑷𝒂</m:t>
+                      </m:r>
+                    </m:oMath>
+                  </m:oMathPara>
+                </a14:m>
+                <a:endParaRPr lang="fr-FR" b="1" dirty="0"/>
+              </a:p>
+              <a:p>
+                <a:pPr>
+                  <a:lnSpc>
+                    <a:spcPct val="150000"/>
+                  </a:lnSpc>
+                </a:pPr>
+                <a:endParaRPr lang="fr-FR" sz="2000" dirty="0"/>
+              </a:p>
+            </p:txBody>
+          </p:sp>
+        </mc:Choice>
+        <mc:Fallback>
+          <p:sp>
+            <p:nvSpPr>
+              <p:cNvPr id="10" name="Espace réservé du texte 2">
+                <a:extLst>
+                  <a:ext uri="{FF2B5EF4-FFF2-40B4-BE49-F238E27FC236}">
+                    <a16:creationId xmlns:a16="http://schemas.microsoft.com/office/drawing/2014/main" id="{3DA844B5-5EA0-2503-78E9-B494AAF23196}"/>
+                  </a:ext>
+                </a:extLst>
+              </p:cNvPr>
+              <p:cNvSpPr txBox="1">
+                <a:spLocks noRot="1" noChangeAspect="1" noMove="1" noResize="1" noEditPoints="1" noAdjustHandles="1" noChangeArrowheads="1" noChangeShapeType="1" noTextEdit="1"/>
+              </p:cNvSpPr>
+              <p:nvPr/>
+            </p:nvSpPr>
+            <p:spPr>
+              <a:xfrm>
+                <a:off x="1921081" y="5457721"/>
+                <a:ext cx="2704399" cy="701136"/>
+              </a:xfrm>
+              <a:prstGeom prst="rect">
+                <a:avLst/>
+              </a:prstGeom>
+              <a:blipFill>
+                <a:blip r:embed="rId3"/>
+                <a:stretch>
+                  <a:fillRect/>
+                </a:stretch>
+              </a:blipFill>
+            </p:spPr>
+            <p:txBody>
+              <a:bodyPr/>
+              <a:lstStyle/>
+              <a:p>
+                <a:r>
+                  <a:rPr lang="fr-FR">
+                    <a:noFill/>
+                  </a:rPr>
+                  <a:t> </a:t>
+                </a:r>
+              </a:p>
+            </p:txBody>
+          </p:sp>
+        </mc:Fallback>
+      </mc:AlternateContent>
+      <mc:AlternateContent xmlns:mc="http://schemas.openxmlformats.org/markup-compatibility/2006">
+        <mc:Choice xmlns:a14="http://schemas.microsoft.com/office/drawing/2010/main" Requires="a14">
+          <p:sp>
+            <p:nvSpPr>
+              <p:cNvPr id="11" name="Espace réservé du texte 2">
+                <a:extLst>
+                  <a:ext uri="{FF2B5EF4-FFF2-40B4-BE49-F238E27FC236}">
+                    <a16:creationId xmlns:a16="http://schemas.microsoft.com/office/drawing/2014/main" id="{09F2978D-A346-6B02-52AF-51848B48083B}"/>
+                  </a:ext>
+                </a:extLst>
+              </p:cNvPr>
+              <p:cNvSpPr txBox="1">
+                <a:spLocks/>
+              </p:cNvSpPr>
+              <p:nvPr/>
+            </p:nvSpPr>
+            <p:spPr>
+              <a:xfrm>
+                <a:off x="7623673" y="1621690"/>
+                <a:ext cx="2704399" cy="646331"/>
+              </a:xfrm>
+              <a:prstGeom prst="rect">
+                <a:avLst/>
+              </a:prstGeom>
+            </p:spPr>
+            <p:txBody>
+              <a:bodyPr vert="horz" lIns="91440" tIns="0" rIns="91440" bIns="0" rtlCol="0">
+                <a:normAutofit/>
+              </a:bodyPr>
+              <a:lstStyle>
+                <a:defPPr>
+                  <a:defRPr lang="fr-FR"/>
+                </a:defPPr>
+                <a:lvl1pPr marL="0" indent="0" algn="l" defTabSz="914400" rtl="0" eaLnBrk="1" latinLnBrk="0" hangingPunct="1">
+                  <a:lnSpc>
+                    <a:spcPct val="100000"/>
+                  </a:lnSpc>
+                  <a:spcBef>
+                    <a:spcPts val="0"/>
+                  </a:spcBef>
+                  <a:buFont typeface="Arial" panose="020B0604020202020204" pitchFamily="34" charset="0"/>
+                  <a:buNone/>
+                  <a:defRPr lang="fr-FR" sz="2400" kern="1200">
+                    <a:solidFill>
+                      <a:schemeClr val="accent6"/>
+                    </a:solidFill>
+                    <a:latin typeface="+mn-lt"/>
+                    <a:ea typeface="+mn-ea"/>
+                    <a:cs typeface="+mn-cs"/>
+                  </a:defRPr>
+                </a:lvl1pPr>
+                <a:lvl2pPr marL="347472" indent="-347472" algn="l" defTabSz="914400" rtl="0" eaLnBrk="1" latinLnBrk="0" hangingPunct="1">
+                  <a:lnSpc>
+                    <a:spcPct val="100000"/>
+                  </a:lnSpc>
+                  <a:spcBef>
+                    <a:spcPts val="0"/>
+                  </a:spcBef>
+                  <a:buFont typeface="Arial" panose="020B0604020202020204" pitchFamily="34" charset="0"/>
+                  <a:buChar char="•"/>
+                  <a:defRPr lang="fr-FR" sz="2400" kern="1200">
+                    <a:solidFill>
+                      <a:schemeClr val="accent6"/>
+                    </a:solidFill>
+                    <a:latin typeface="+mn-lt"/>
+                    <a:ea typeface="+mn-ea"/>
+                    <a:cs typeface="+mn-cs"/>
+                  </a:defRPr>
+                </a:lvl2pPr>
+                <a:lvl3pPr marL="685800" indent="-347472" algn="l" defTabSz="914400" rtl="0" eaLnBrk="1" latinLnBrk="0" hangingPunct="1">
+                  <a:lnSpc>
+                    <a:spcPct val="100000"/>
+                  </a:lnSpc>
+                  <a:spcBef>
+                    <a:spcPts val="0"/>
+                  </a:spcBef>
+                  <a:buFont typeface="Arial" panose="020B0604020202020204" pitchFamily="34" charset="0"/>
+                  <a:buChar char="•"/>
+                  <a:defRPr lang="fr-FR" sz="2400" kern="1200">
+                    <a:solidFill>
+                      <a:schemeClr val="accent6"/>
+                    </a:solidFill>
+                    <a:latin typeface="+mn-lt"/>
+                    <a:ea typeface="+mn-ea"/>
+                    <a:cs typeface="+mn-cs"/>
+                  </a:defRPr>
+                </a:lvl3pPr>
+                <a:lvl4pPr marL="1600200" indent="-347472" algn="l" defTabSz="914400" rtl="0" eaLnBrk="1" latinLnBrk="0" hangingPunct="1">
+                  <a:lnSpc>
+                    <a:spcPct val="100000"/>
+                  </a:lnSpc>
+                  <a:spcBef>
+                    <a:spcPts val="360"/>
+                  </a:spcBef>
+                  <a:buFont typeface="Arial" panose="020B0604020202020204" pitchFamily="34" charset="0"/>
+                  <a:buChar char="•"/>
+                  <a:defRPr lang="fr-FR" sz="1800" kern="1200">
+                    <a:solidFill>
+                      <a:schemeClr val="accent6"/>
+                    </a:solidFill>
+                    <a:latin typeface="+mn-lt"/>
+                    <a:ea typeface="+mn-ea"/>
+                    <a:cs typeface="+mn-cs"/>
+                  </a:defRPr>
+                </a:lvl4pPr>
+                <a:lvl5pPr marL="2057400" indent="-347472" algn="l" defTabSz="914400" rtl="0" eaLnBrk="1" latinLnBrk="0" hangingPunct="1">
+                  <a:lnSpc>
+                    <a:spcPct val="100000"/>
+                  </a:lnSpc>
+                  <a:spcBef>
+                    <a:spcPts val="360"/>
+                  </a:spcBef>
+                  <a:buFont typeface="Arial" panose="020B0604020202020204" pitchFamily="34" charset="0"/>
+                  <a:buChar char="•"/>
+                  <a:defRPr lang="fr-FR" sz="1800" kern="1200">
+                    <a:solidFill>
+                      <a:schemeClr val="accent6"/>
+                    </a:solidFill>
+                    <a:latin typeface="+mn-lt"/>
+                    <a:ea typeface="+mn-ea"/>
+                    <a:cs typeface="+mn-cs"/>
+                  </a:defRPr>
+                </a:lvl5pPr>
+                <a:lvl6pPr marL="2514600" indent="-228600" algn="l" defTabSz="914400" rtl="0" eaLnBrk="1" latinLnBrk="0" hangingPunct="1">
+                  <a:lnSpc>
+                    <a:spcPct val="90000"/>
+                  </a:lnSpc>
+                  <a:spcBef>
+                    <a:spcPts val="500"/>
+                  </a:spcBef>
+                  <a:buFont typeface="Arial" panose="020B0604020202020204" pitchFamily="34" charset="0"/>
+                  <a:buChar char="•"/>
+                  <a:defRPr lang="fr-FR" sz="1800" kern="1200">
+                    <a:solidFill>
+                      <a:schemeClr val="tx1"/>
+                    </a:solidFill>
+                    <a:latin typeface="+mn-lt"/>
+                    <a:ea typeface="+mn-ea"/>
+                    <a:cs typeface="+mn-cs"/>
+                  </a:defRPr>
+                </a:lvl6pPr>
+                <a:lvl7pPr marL="2971800" indent="-228600" algn="l" defTabSz="914400" rtl="0" eaLnBrk="1" latinLnBrk="0" hangingPunct="1">
+                  <a:lnSpc>
+                    <a:spcPct val="90000"/>
+                  </a:lnSpc>
+                  <a:spcBef>
+                    <a:spcPts val="500"/>
+                  </a:spcBef>
+                  <a:buFont typeface="Arial" panose="020B0604020202020204" pitchFamily="34" charset="0"/>
+                  <a:buChar char="•"/>
+                  <a:defRPr lang="fr-FR" sz="1800" kern="1200">
+                    <a:solidFill>
+                      <a:schemeClr val="tx1"/>
+                    </a:solidFill>
+                    <a:latin typeface="+mn-lt"/>
+                    <a:ea typeface="+mn-ea"/>
+                    <a:cs typeface="+mn-cs"/>
+                  </a:defRPr>
+                </a:lvl7pPr>
+                <a:lvl8pPr marL="3429000" indent="-228600" algn="l" defTabSz="914400" rtl="0" eaLnBrk="1" latinLnBrk="0" hangingPunct="1">
+                  <a:lnSpc>
+                    <a:spcPct val="90000"/>
+                  </a:lnSpc>
+                  <a:spcBef>
+                    <a:spcPts val="500"/>
+                  </a:spcBef>
+                  <a:buFont typeface="Arial" panose="020B0604020202020204" pitchFamily="34" charset="0"/>
+                  <a:buChar char="•"/>
+                  <a:defRPr lang="fr-FR" sz="1800" kern="1200">
+                    <a:solidFill>
+                      <a:schemeClr val="tx1"/>
+                    </a:solidFill>
+                    <a:latin typeface="+mn-lt"/>
+                    <a:ea typeface="+mn-ea"/>
+                    <a:cs typeface="+mn-cs"/>
+                  </a:defRPr>
+                </a:lvl8pPr>
+                <a:lvl9pPr marL="3886200" indent="-228600" algn="l" defTabSz="914400" rtl="0" eaLnBrk="1" latinLnBrk="0" hangingPunct="1">
+                  <a:lnSpc>
+                    <a:spcPct val="90000"/>
+                  </a:lnSpc>
+                  <a:spcBef>
+                    <a:spcPts val="500"/>
+                  </a:spcBef>
+                  <a:buFont typeface="Arial" panose="020B0604020202020204" pitchFamily="34" charset="0"/>
+                  <a:buChar char="•"/>
+                  <a:defRPr lang="fr-FR" sz="1800" kern="1200">
+                    <a:solidFill>
+                      <a:schemeClr val="tx1"/>
+                    </a:solidFill>
+                    <a:latin typeface="+mn-lt"/>
+                    <a:ea typeface="+mn-ea"/>
+                    <a:cs typeface="+mn-cs"/>
+                  </a:defRPr>
+                </a:lvl9pPr>
+              </a:lstStyle>
+              <a:p>
+                <a:pPr>
+                  <a:lnSpc>
+                    <a:spcPct val="150000"/>
+                  </a:lnSpc>
+                </a:pPr>
+                <a14:m>
+                  <m:oMathPara xmlns:m="http://schemas.openxmlformats.org/officeDocument/2006/math">
+                    <m:oMathParaPr>
+                      <m:jc m:val="centerGroup"/>
+                    </m:oMathParaPr>
+                    <m:oMath xmlns:m="http://schemas.openxmlformats.org/officeDocument/2006/math">
+                      <m:r>
+                        <a:rPr lang="fr-FR" b="1" i="1" smtClean="0">
+                          <a:latin typeface="Cambria Math" panose="02040503050406030204" pitchFamily="18" charset="0"/>
+                        </a:rPr>
+                        <m:t>𝑮</m:t>
+                      </m:r>
+                      <m:r>
+                        <a:rPr lang="fr-FR" b="1" i="1">
+                          <a:latin typeface="Cambria Math" panose="02040503050406030204" pitchFamily="18" charset="0"/>
+                        </a:rPr>
+                        <m:t>=</m:t>
+                      </m:r>
+                      <m:r>
+                        <a:rPr lang="fr-FR" b="1" i="1" smtClean="0">
+                          <a:latin typeface="Cambria Math" panose="02040503050406030204" pitchFamily="18" charset="0"/>
+                        </a:rPr>
+                        <m:t>𝟏𝟎𝟎</m:t>
+                      </m:r>
+                      <m:r>
+                        <a:rPr lang="fr-FR" b="1" i="1">
+                          <a:latin typeface="Cambria Math" panose="02040503050406030204" pitchFamily="18" charset="0"/>
+                        </a:rPr>
+                        <m:t> </m:t>
+                      </m:r>
+                      <m:r>
+                        <a:rPr lang="fr-FR" b="1" i="1">
+                          <a:latin typeface="Cambria Math" panose="02040503050406030204" pitchFamily="18" charset="0"/>
+                        </a:rPr>
+                        <m:t>𝑷𝒂</m:t>
+                      </m:r>
+                    </m:oMath>
+                  </m:oMathPara>
+                </a14:m>
+                <a:endParaRPr lang="fr-FR" b="1" dirty="0"/>
+              </a:p>
+              <a:p>
+                <a:pPr>
+                  <a:lnSpc>
+                    <a:spcPct val="150000"/>
+                  </a:lnSpc>
+                </a:pPr>
+                <a:endParaRPr lang="fr-FR" sz="2000" dirty="0"/>
+              </a:p>
+            </p:txBody>
+          </p:sp>
+        </mc:Choice>
+        <mc:Fallback>
+          <p:sp>
+            <p:nvSpPr>
+              <p:cNvPr id="11" name="Espace réservé du texte 2">
+                <a:extLst>
+                  <a:ext uri="{FF2B5EF4-FFF2-40B4-BE49-F238E27FC236}">
+                    <a16:creationId xmlns:a16="http://schemas.microsoft.com/office/drawing/2014/main" id="{09F2978D-A346-6B02-52AF-51848B48083B}"/>
+                  </a:ext>
+                </a:extLst>
+              </p:cNvPr>
+              <p:cNvSpPr txBox="1">
+                <a:spLocks noRot="1" noChangeAspect="1" noMove="1" noResize="1" noEditPoints="1" noAdjustHandles="1" noChangeArrowheads="1" noChangeShapeType="1" noTextEdit="1"/>
+              </p:cNvSpPr>
+              <p:nvPr/>
+            </p:nvSpPr>
+            <p:spPr>
+              <a:xfrm>
+                <a:off x="7623673" y="1621690"/>
+                <a:ext cx="2704399" cy="646331"/>
+              </a:xfrm>
+              <a:prstGeom prst="rect">
+                <a:avLst/>
+              </a:prstGeom>
+              <a:blipFill>
+                <a:blip r:embed="rId4"/>
+                <a:stretch>
+                  <a:fillRect/>
+                </a:stretch>
+              </a:blipFill>
+            </p:spPr>
+            <p:txBody>
+              <a:bodyPr/>
+              <a:lstStyle/>
+              <a:p>
+                <a:r>
+                  <a:rPr lang="fr-FR">
+                    <a:noFill/>
+                  </a:rPr>
+                  <a:t> </a:t>
+                </a:r>
+              </a:p>
+            </p:txBody>
+          </p:sp>
+        </mc:Fallback>
+      </mc:AlternateContent>
+      <p:pic>
+        <p:nvPicPr>
+          <p:cNvPr id="13" name="Image 12">
+            <a:extLst>
+              <a:ext uri="{FF2B5EF4-FFF2-40B4-BE49-F238E27FC236}">
+                <a16:creationId xmlns:a16="http://schemas.microsoft.com/office/drawing/2014/main" id="{33A2789D-7A72-248B-BEE2-0CC449A64FFD}"/>
+              </a:ext>
+            </a:extLst>
+          </p:cNvPr>
+          <p:cNvPicPr>
+            <a:picLocks noChangeAspect="1"/>
+          </p:cNvPicPr>
+          <p:nvPr/>
+        </p:nvPicPr>
+        <p:blipFill>
+          <a:blip r:embed="rId5"/>
+          <a:stretch>
+            <a:fillRect/>
+          </a:stretch>
+        </p:blipFill>
+        <p:spPr>
+          <a:xfrm>
+            <a:off x="5959119" y="2173085"/>
+            <a:ext cx="5724999" cy="4566762"/>
+          </a:xfrm>
+          <a:prstGeom prst="rect">
+            <a:avLst/>
+          </a:prstGeom>
+        </p:spPr>
+      </p:pic>
+    </p:spTree>
+    <p:extLst>
+      <p:ext uri="{BB962C8B-B14F-4D97-AF65-F5344CB8AC3E}">
+        <p14:creationId xmlns:p14="http://schemas.microsoft.com/office/powerpoint/2010/main" val="1752895831"/>
       </p:ext>
     </p:extLst>
   </p:cSld>
@@ -20373,15 +25741,6 @@
 </file>
 
 <file path=customXml/item2.xml><?xml version="1.0" encoding="utf-8"?>
-<?mso-contentType ?>
-<FormTemplates xmlns="http://schemas.microsoft.com/sharepoint/v3/contenttype/forms">
-  <Display>DocumentLibraryForm</Display>
-  <Edit>DocumentLibraryForm</Edit>
-  <New>DocumentLibraryForm</New>
-</FormTemplates>
-</file>
-
-<file path=customXml/item3.xml><?xml version="1.0" encoding="utf-8"?>
 <ct:contentTypeSchema xmlns:ct="http://schemas.microsoft.com/office/2006/metadata/contentType" xmlns:ma="http://schemas.microsoft.com/office/2006/metadata/properties/metaAttributes" ct:_="" ma:_="" ma:contentTypeName="Document" ma:contentTypeID="0x0101007A262EAC855B9A4AA1EA640DE55D9291" ma:contentTypeVersion="1" ma:contentTypeDescription="Crée un document." ma:contentTypeScope="" ma:versionID="b77c85bbfd0b92efe37df041e558d067">
   <xsd:schema xmlns:xsd="http://www.w3.org/2001/XMLSchema" xmlns:xs="http://www.w3.org/2001/XMLSchema" xmlns:p="http://schemas.microsoft.com/office/2006/metadata/properties" xmlns:ns3="5fe2be53-eead-4083-8773-55ad5d51649a" targetNamespace="http://schemas.microsoft.com/office/2006/metadata/properties" ma:root="true" ma:fieldsID="d116f912760d7d2eb93dc091ad074d5c" ns3:_="">
     <xsd:import namespace="5fe2be53-eead-4083-8773-55ad5d51649a"/>
@@ -20507,6 +25866,15 @@
 </ct:contentTypeSchema>
 </file>
 
+<file path=customXml/item3.xml><?xml version="1.0" encoding="utf-8"?>
+<?mso-contentType ?>
+<FormTemplates xmlns="http://schemas.microsoft.com/sharepoint/v3/contenttype/forms">
+  <Display>DocumentLibraryForm</Display>
+  <Edit>DocumentLibraryForm</Edit>
+  <New>DocumentLibraryForm</New>
+</FormTemplates>
+</file>
+
 <file path=customXml/itemProps1.xml><?xml version="1.0" encoding="utf-8"?>
 <ds:datastoreItem xmlns:ds="http://schemas.openxmlformats.org/officeDocument/2006/customXml" ds:itemID="{BA719FA4-954C-4FA8-82CB-206659C3B826}">
   <ds:schemaRefs>
@@ -20524,14 +25892,6 @@
 </file>
 
 <file path=customXml/itemProps2.xml><?xml version="1.0" encoding="utf-8"?>
-<ds:datastoreItem xmlns:ds="http://schemas.openxmlformats.org/officeDocument/2006/customXml" ds:itemID="{16DBB56F-4362-4386-A1A1-3DF898896616}">
-  <ds:schemaRefs>
-    <ds:schemaRef ds:uri="http://schemas.microsoft.com/sharepoint/v3/contenttype/forms"/>
-  </ds:schemaRefs>
-</ds:datastoreItem>
-</file>
-
-<file path=customXml/itemProps3.xml><?xml version="1.0" encoding="utf-8"?>
 <ds:datastoreItem xmlns:ds="http://schemas.openxmlformats.org/officeDocument/2006/customXml" ds:itemID="{995F1B84-5324-45B5-9B4C-63D8886BFBE7}">
   <ds:schemaRefs>
     <ds:schemaRef ds:uri="http://schemas.microsoft.com/office/2006/metadata/contentType"/>
@@ -20549,6 +25909,14 @@
 </ds:datastoreItem>
 </file>
 
+<file path=customXml/itemProps3.xml><?xml version="1.0" encoding="utf-8"?>
+<ds:datastoreItem xmlns:ds="http://schemas.openxmlformats.org/officeDocument/2006/customXml" ds:itemID="{16DBB56F-4362-4386-A1A1-3DF898896616}">
+  <ds:schemaRefs>
+    <ds:schemaRef ds:uri="http://schemas.microsoft.com/sharepoint/v3/contenttype/forms"/>
+  </ds:schemaRefs>
+</ds:datastoreItem>
+</file>
+
 <file path=docMetadata/LabelInfo.xml><?xml version="1.0" encoding="utf-8"?>
 <clbl:labelList xmlns:clbl="http://schemas.microsoft.com/office/2020/mipLabelMetadata"/>
 </file>